--- a/PAPARAN_ESTIMASI_STRATEGIS_PORTOFOLIO_KEBUN_TMC.pptx
+++ b/PAPARAN_ESTIMASI_STRATEGIS_PORTOFOLIO_KEBUN_TMC.pptx
@@ -1831,7 +1831,7 @@
                 <a:ea typeface="Arial" pitchFamily="34" charset="-122"/>
                 <a:cs typeface="Arial" pitchFamily="34" charset="-120"/>
               </a:rPr>
-              <a:t>Kapasitas Olah Pabrik &amp; Urgensi Pasokan:
+              <a:t>Target Kebutuhan Bahan Baku Operasional Pabrik:
 </a:t>
             </a:r>
             <a:pPr indent="0" marL="0">
@@ -1846,7 +1846,7 @@
                 <a:ea typeface="Arial" pitchFamily="34" charset="-122"/>
                 <a:cs typeface="Arial" pitchFamily="34" charset="-120"/>
               </a:rPr>
-              <a:t>• Pabrik kelapa terpadu TMC memiliki kapasitas olah sebesar </a:t>
+              <a:t>• Target pemenuhan bahan baku operasional pabrik kelapa terpadu TMC ditetapkan sebesar </a:t>
             </a:r>
             <a:pPr indent="0" marL="0">
               <a:buNone/>
@@ -1874,7 +1874,7 @@
                 <a:ea typeface="Arial" pitchFamily="34" charset="-122"/>
                 <a:cs typeface="Arial" pitchFamily="34" charset="-120"/>
               </a:rPr>
-              <a:t> dengan operasional 20 Hari Kerja/bulan (400.000 butir/HK).
+              <a:t> dengan operasional 20 Hari Kerja/bulan (400.000 butir/HK). Angka ini adalah target kebutuhan bahan baku untuk kelancaran pabrik (bukan kapasitas olah yang telah berjalan saat ini).
 </a:t>
             </a:r>
             <a:pPr indent="0" marL="0">

--- a/PAPARAN_ESTIMASI_STRATEGIS_PORTOFOLIO_KEBUN_TMC.pptx
+++ b/PAPARAN_ESTIMASI_STRATEGIS_PORTOFOLIO_KEBUN_TMC.pptx
@@ -1742,7 +1742,7 @@
                 <a:ea typeface="Arial" pitchFamily="34" charset="-122"/>
                 <a:cs typeface="Arial" pitchFamily="34" charset="-120"/>
               </a:rPr>
-              <a:t>1. Latar Belakang &amp; Mandat Target Pasokan Mandiri 10%</a:t>
+              <a:t>1. Kebutuhan Pasokan Kelapa TMC: Target Supply Kebun Mandiri 10% / Hari</a:t>
             </a:r>
             <a:endParaRPr lang="en-US" sz="1800" dirty="0"/>
           </a:p>
@@ -1779,12 +1779,12 @@
         </p:nvSpPr>
         <p:spPr>
           <a:xfrm>
-            <a:off x="731520" y="1371600"/>
-            <a:ext cx="10698480" cy="1371600"/>
+            <a:off x="731520" y="1325880"/>
+            <a:ext cx="10698480" cy="1508760"/>
           </a:xfrm>
           <a:prstGeom prst="roundRect">
             <a:avLst>
-              <a:gd name="adj" fmla="val 5333"/>
+              <a:gd name="adj" fmla="val 4848"/>
             </a:avLst>
           </a:prstGeom>
           <a:solidFill>
@@ -1806,8 +1806,8 @@
         </p:nvSpPr>
         <p:spPr>
           <a:xfrm>
-            <a:off x="1005840" y="1481328"/>
-            <a:ext cx="10149840" cy="1143000"/>
+            <a:off x="1005840" y="1389888"/>
+            <a:ext cx="10149840" cy="1371600"/>
           </a:xfrm>
           <a:prstGeom prst="rect">
             <a:avLst/>
@@ -1823,7 +1823,35 @@
               <a:buNone/>
             </a:pPr>
             <a:r>
-              <a:rPr lang="en-US" sz="1100" b="1" dirty="0">
+              <a:rPr lang="en-US" sz="950" b="1" dirty="0">
+                <a:solidFill>
+                  <a:srgbClr val="047857"/>
+                </a:solidFill>
+                <a:latin typeface="Arial" pitchFamily="34" charset="0"/>
+                <a:ea typeface="Arial" pitchFamily="34" charset="-122"/>
+                <a:cs typeface="Arial" pitchFamily="34" charset="-120"/>
+              </a:rPr>
+              <a:t>• Target Kebutuhan Produksi Pabrik: </a:t>
+            </a:r>
+            <a:pPr indent="0" marL="0">
+              <a:buNone/>
+            </a:pPr>
+            <a:r>
+              <a:rPr lang="en-US" sz="850" dirty="0">
+                <a:solidFill>
+                  <a:srgbClr val="334155"/>
+                </a:solidFill>
+                <a:latin typeface="Arial" pitchFamily="34" charset="0"/>
+                <a:ea typeface="Arial" pitchFamily="34" charset="-122"/>
+                <a:cs typeface="Arial" pitchFamily="34" charset="-120"/>
+              </a:rPr>
+              <a:t>Kebutuhan bahan baku produksi pabrik pengolahan kelapa terpadu TMC ditetapkan sebesar </a:t>
+            </a:r>
+            <a:pPr indent="0" marL="0">
+              <a:buNone/>
+            </a:pPr>
+            <a:r>
+              <a:rPr lang="en-US" sz="850" b="1" dirty="0">
                 <a:solidFill>
                   <a:srgbClr val="0F172A"/>
                 </a:solidFill>
@@ -1831,14 +1859,42 @@
                 <a:ea typeface="Arial" pitchFamily="34" charset="-122"/>
                 <a:cs typeface="Arial" pitchFamily="34" charset="-120"/>
               </a:rPr>
-              <a:t>Target Kebutuhan Bahan Baku Operasional Pabrik:
+              <a:t>400.000 butir kelapa/hari kerja </a:t>
+            </a:r>
+            <a:pPr indent="0" marL="0">
+              <a:buNone/>
+            </a:pPr>
+            <a:r>
+              <a:rPr lang="en-US" sz="850" dirty="0">
+                <a:solidFill>
+                  <a:srgbClr val="334155"/>
+                </a:solidFill>
+                <a:latin typeface="Arial" pitchFamily="34" charset="0"/>
+                <a:ea typeface="Arial" pitchFamily="34" charset="-122"/>
+                <a:cs typeface="Arial" pitchFamily="34" charset="-120"/>
+              </a:rPr>
+              <a:t>(20 HK/bulan = 8.000.000 butir/bulan atau 24.000.000 butir per kuartal 3 bulan) yang harus dipenuhi secara stabil dan berkesinambungan.
 </a:t>
             </a:r>
             <a:pPr indent="0" marL="0">
               <a:buNone/>
             </a:pPr>
             <a:r>
-              <a:rPr lang="en-US" sz="950" dirty="0">
+              <a:rPr lang="en-US" sz="950" b="1" dirty="0">
+                <a:solidFill>
+                  <a:srgbClr val="047857"/>
+                </a:solidFill>
+                <a:latin typeface="Arial" pitchFamily="34" charset="0"/>
+                <a:ea typeface="Arial" pitchFamily="34" charset="-122"/>
+                <a:cs typeface="Arial" pitchFamily="34" charset="-120"/>
+              </a:rPr>
+              <a:t>• Kebutuhan Perusahaan: Supply dari Perkebunan TMC (10% Target Harian): </a:t>
+            </a:r>
+            <a:pPr indent="0" marL="0">
+              <a:buNone/>
+            </a:pPr>
+            <a:r>
+              <a:rPr lang="en-US" sz="850" dirty="0">
                 <a:solidFill>
                   <a:srgbClr val="334155"/>
                 </a:solidFill>
@@ -1846,27 +1902,84 @@
                 <a:ea typeface="Arial" pitchFamily="34" charset="-122"/>
                 <a:cs typeface="Arial" pitchFamily="34" charset="-120"/>
               </a:rPr>
-              <a:t>• Target pemenuhan bahan baku operasional pabrik kelapa terpadu TMC ditetapkan sebesar </a:t>
+              <a:t>Perusahaan menetapkan pemenuhan pasokan dari kebun internal sebesar </a:t>
             </a:r>
             <a:pPr indent="0" marL="0">
               <a:buNone/>
             </a:pPr>
             <a:r>
+              <a:rPr lang="en-US" sz="850" b="1" dirty="0">
+                <a:solidFill>
+                  <a:srgbClr val="047857"/>
+                </a:solidFill>
+                <a:latin typeface="Arial" pitchFamily="34" charset="0"/>
+                <a:ea typeface="Arial" pitchFamily="34" charset="-122"/>
+                <a:cs typeface="Arial" pitchFamily="34" charset="-120"/>
+              </a:rPr>
+              <a:t>10% per hari (40.000 butir/hari kerja atau 2.400.000 butir per kuartal 3 bulan) </a:t>
+            </a:r>
+            <a:pPr indent="0" marL="0">
+              <a:buNone/>
+            </a:pPr>
+            <a:r>
+              <a:rPr lang="en-US" sz="850" dirty="0">
+                <a:solidFill>
+                  <a:srgbClr val="334155"/>
+                </a:solidFill>
+                <a:latin typeface="Arial" pitchFamily="34" charset="0"/>
+                <a:ea typeface="Arial" pitchFamily="34" charset="-122"/>
+                <a:cs typeface="Arial" pitchFamily="34" charset="-120"/>
+              </a:rPr>
+              <a:t>guna menjaga stabilitas HPP serta menjamin buffer stock operasional pabrik.
+</a:t>
+            </a:r>
+            <a:pPr indent="0" marL="0">
+              <a:buNone/>
+            </a:pPr>
+            <a:r>
               <a:rPr lang="en-US" sz="950" b="1" dirty="0">
                 <a:solidFill>
+                  <a:srgbClr val="047857"/>
+                </a:solidFill>
+                <a:latin typeface="Arial" pitchFamily="34" charset="0"/>
+                <a:ea typeface="Arial" pitchFamily="34" charset="-122"/>
+                <a:cs typeface="Arial" pitchFamily="34" charset="-120"/>
+              </a:rPr>
+              <a:t>• Realisasi Saat Ini - Perkebunan TMC Eksisting (Blok 1): </a:t>
+            </a:r>
+            <a:pPr indent="0" marL="0">
+              <a:buNone/>
+            </a:pPr>
+            <a:r>
+              <a:rPr lang="en-US" sz="850" dirty="0">
+                <a:solidFill>
+                  <a:srgbClr val="334155"/>
+                </a:solidFill>
+                <a:latin typeface="Arial" pitchFamily="34" charset="0"/>
+                <a:ea typeface="Arial" pitchFamily="34" charset="-122"/>
+                <a:cs typeface="Arial" pitchFamily="34" charset="-120"/>
+              </a:rPr>
+              <a:t>Sesuai hasil panen saat ini di seluruh kebun produktif TMC (Blok 1 seluas 200 Ha), produksi per kuartal (3 bulan) telah mencapai </a:t>
+            </a:r>
+            <a:pPr indent="0" marL="0">
+              <a:buNone/>
+            </a:pPr>
+            <a:r>
+              <a:rPr lang="en-US" sz="850" b="1" dirty="0">
+                <a:solidFill>
                   <a:srgbClr val="0F172A"/>
                 </a:solidFill>
                 <a:latin typeface="Arial" pitchFamily="34" charset="0"/>
                 <a:ea typeface="Arial" pitchFamily="34" charset="-122"/>
                 <a:cs typeface="Arial" pitchFamily="34" charset="-120"/>
               </a:rPr>
-              <a:t>8.000.000 butir/bulan (24.000.000 butir per 3 bulan / 96.000.000 butir/tahun)</a:t>
+              <a:t>hampir 200.000 butir kelapa (3.333 butir/HK). </a:t>
             </a:r>
             <a:pPr indent="0" marL="0">
               <a:buNone/>
             </a:pPr>
             <a:r>
-              <a:rPr lang="en-US" sz="950" dirty="0">
+              <a:rPr lang="en-US" sz="850" dirty="0">
                 <a:solidFill>
                   <a:srgbClr val="334155"/>
                 </a:solidFill>
@@ -1874,66 +1987,9 @@
                 <a:ea typeface="Arial" pitchFamily="34" charset="-122"/>
                 <a:cs typeface="Arial" pitchFamily="34" charset="-120"/>
               </a:rPr>
-              <a:t> dengan operasional 20 Hari Kerja/bulan (400.000 butir/HK). Angka ini adalah target kebutuhan bahan baku untuk kelancaran pabrik (bukan kapasitas olah yang telah berjalan saat ini).
-</a:t>
-            </a:r>
-            <a:pPr indent="0" marL="0">
-              <a:buNone/>
-            </a:pPr>
-            <a:r>
-              <a:rPr lang="en-US" sz="950" b="1" dirty="0">
-                <a:solidFill>
-                  <a:srgbClr val="047857"/>
-                </a:solidFill>
-                <a:latin typeface="Arial" pitchFamily="34" charset="0"/>
-                <a:ea typeface="Arial" pitchFamily="34" charset="-122"/>
-                <a:cs typeface="Arial" pitchFamily="34" charset="-120"/>
-              </a:rPr>
-              <a:t>• Mandat Kebijakan Direksi: </a:t>
-            </a:r>
-            <a:pPr indent="0" marL="0">
-              <a:buNone/>
-            </a:pPr>
-            <a:r>
-              <a:rPr lang="en-US" sz="950" dirty="0">
-                <a:solidFill>
-                  <a:srgbClr val="334155"/>
-                </a:solidFill>
-                <a:latin typeface="Arial" pitchFamily="34" charset="0"/>
-                <a:ea typeface="Arial" pitchFamily="34" charset="-122"/>
-                <a:cs typeface="Arial" pitchFamily="34" charset="-120"/>
-              </a:rPr>
-              <a:t>Menetapkan target pasokan mandiri sebesar </a:t>
-            </a:r>
-            <a:pPr indent="0" marL="0">
-              <a:buNone/>
-            </a:pPr>
-            <a:r>
-              <a:rPr lang="en-US" sz="950" b="1" dirty="0">
-                <a:solidFill>
-                  <a:srgbClr val="047857"/>
-                </a:solidFill>
-                <a:latin typeface="Arial" pitchFamily="34" charset="0"/>
-                <a:ea typeface="Arial" pitchFamily="34" charset="-122"/>
-                <a:cs typeface="Arial" pitchFamily="34" charset="-120"/>
-              </a:rPr>
-              <a:t>10% (2.400.000 butir / 3 bulan atau 40.000 butir / HK) </a:t>
-            </a:r>
-            <a:pPr indent="0" marL="0">
-              <a:buNone/>
-            </a:pPr>
-            <a:r>
-              <a:rPr lang="en-US" sz="950" dirty="0">
-                <a:solidFill>
-                  <a:srgbClr val="334155"/>
-                </a:solidFill>
-                <a:latin typeface="Arial" pitchFamily="34" charset="0"/>
-                <a:ea typeface="Arial" pitchFamily="34" charset="-122"/>
-                <a:cs typeface="Arial" pitchFamily="34" charset="-120"/>
-              </a:rPr>
-              <a:t>guna menjamin buffer stock, menstabilkan HPP, serta melindungi pabrik dari fluktuasi harga dan kelangkaan bahan baku di pasar bebas.</a:t>
-            </a:r>
-            <a:endParaRPr lang="en-US" sz="1100" dirty="0"/>
+              <a:t>Hasil ini telah menutup 8,33% kebutuhan supply kebun internal (0,83% kebutuhan produksi pabrik), sehingga sisa kebutuhan sebesar 2.200.000 butir/kuartal diselesaikan melalui ekspansi lahan baru.</a:t>
+            </a:r>
+            <a:endParaRPr lang="en-US" sz="950" dirty="0"/>
           </a:p>
         </p:txBody>
       </p:sp>
@@ -1945,12 +2001,12 @@
         </p:nvSpPr>
         <p:spPr>
           <a:xfrm>
-            <a:off x="731520" y="2971800"/>
-            <a:ext cx="2514600" cy="1463040"/>
+            <a:off x="731520" y="3017520"/>
+            <a:ext cx="2514600" cy="1417320"/>
           </a:xfrm>
           <a:prstGeom prst="roundRect">
             <a:avLst>
-              <a:gd name="adj" fmla="val 5000"/>
+              <a:gd name="adj" fmla="val 5161"/>
             </a:avLst>
           </a:prstGeom>
           <a:solidFill>
@@ -1972,8 +2028,8 @@
         </p:nvSpPr>
         <p:spPr>
           <a:xfrm>
-            <a:off x="868680" y="3127248"/>
-            <a:ext cx="2240280" cy="320040"/>
+            <a:off x="868680" y="3154680"/>
+            <a:ext cx="2240280" cy="292608"/>
           </a:xfrm>
           <a:prstGeom prst="rect">
             <a:avLst/>
@@ -1997,7 +2053,7 @@
                 <a:ea typeface="Arial" pitchFamily="34" charset="-122"/>
                 <a:cs typeface="Arial" pitchFamily="34" charset="-120"/>
               </a:rPr>
-              <a:t>KEBUTUHAN PABRIK (3 BLN)</a:t>
+              <a:t>TARGET PRODUKSI PABRIK</a:t>
             </a:r>
             <a:endParaRPr lang="en-US" sz="800" dirty="0"/>
           </a:p>
@@ -2012,7 +2068,7 @@
         <p:spPr>
           <a:xfrm>
             <a:off x="868680" y="3493008"/>
-            <a:ext cx="2240280" cy="502920"/>
+            <a:ext cx="2240280" cy="475488"/>
           </a:xfrm>
           <a:prstGeom prst="rect">
             <a:avLst/>
@@ -2028,7 +2084,7 @@
               <a:buNone/>
             </a:pPr>
             <a:r>
-              <a:rPr lang="en-US" sz="1600" b="1" dirty="0">
+              <a:rPr lang="en-US" sz="1500" b="1" dirty="0">
                 <a:solidFill>
                   <a:srgbClr val="0F172A"/>
                 </a:solidFill>
@@ -2036,9 +2092,9 @@
                 <a:ea typeface="Arial" pitchFamily="34" charset="-122"/>
                 <a:cs typeface="Arial" pitchFamily="34" charset="-120"/>
               </a:rPr>
-              <a:t>24.000.000</a:t>
-            </a:r>
-            <a:endParaRPr lang="en-US" sz="1600" dirty="0"/>
+              <a:t>400.000</a:t>
+            </a:r>
+            <a:endParaRPr lang="en-US" sz="1500" dirty="0"/>
           </a:p>
         </p:txBody>
       </p:sp>
@@ -2050,7 +2106,7 @@
         </p:nvSpPr>
         <p:spPr>
           <a:xfrm>
-            <a:off x="868680" y="4023360"/>
+            <a:off x="868680" y="4005072"/>
             <a:ext cx="2240280" cy="274320"/>
           </a:xfrm>
           <a:prstGeom prst="rect">
@@ -2067,7 +2123,7 @@
               <a:buNone/>
             </a:pPr>
             <a:r>
-              <a:rPr lang="en-US" sz="800" dirty="0">
+              <a:rPr lang="en-US" sz="750" dirty="0">
                 <a:solidFill>
                   <a:srgbClr val="334155"/>
                 </a:solidFill>
@@ -2075,9 +2131,9 @@
                 <a:ea typeface="Arial" pitchFamily="34" charset="-122"/>
                 <a:cs typeface="Arial" pitchFamily="34" charset="-120"/>
               </a:rPr>
-              <a:t>400.000 Butir / HK</a:t>
-            </a:r>
-            <a:endParaRPr lang="en-US" sz="800" dirty="0"/>
+              <a:t>Butir/Hari (24 Juta/3 Bln)</a:t>
+            </a:r>
+            <a:endParaRPr lang="en-US" sz="750" dirty="0"/>
           </a:p>
         </p:txBody>
       </p:sp>
@@ -2089,12 +2145,12 @@
         </p:nvSpPr>
         <p:spPr>
           <a:xfrm>
-            <a:off x="3456432" y="2971800"/>
-            <a:ext cx="2514600" cy="1463040"/>
+            <a:off x="3456432" y="3017520"/>
+            <a:ext cx="2514600" cy="1417320"/>
           </a:xfrm>
           <a:prstGeom prst="roundRect">
             <a:avLst>
-              <a:gd name="adj" fmla="val 5000"/>
+              <a:gd name="adj" fmla="val 5161"/>
             </a:avLst>
           </a:prstGeom>
           <a:solidFill>
@@ -2116,8 +2172,8 @@
         </p:nvSpPr>
         <p:spPr>
           <a:xfrm>
-            <a:off x="3593592" y="3127248"/>
-            <a:ext cx="2240280" cy="320040"/>
+            <a:off x="3593592" y="3154680"/>
+            <a:ext cx="2240280" cy="292608"/>
           </a:xfrm>
           <a:prstGeom prst="rect">
             <a:avLst/>
@@ -2141,7 +2197,7 @@
                 <a:ea typeface="Arial" pitchFamily="34" charset="-122"/>
                 <a:cs typeface="Arial" pitchFamily="34" charset="-120"/>
               </a:rPr>
-              <a:t>TARGET KEBUN MANDIRI (10%)</a:t>
+              <a:t>TARGET SUPPLY KEBUN (10%)</a:t>
             </a:r>
             <a:endParaRPr lang="en-US" sz="800" dirty="0"/>
           </a:p>
@@ -2156,7 +2212,7 @@
         <p:spPr>
           <a:xfrm>
             <a:off x="3593592" y="3493008"/>
-            <a:ext cx="2240280" cy="502920"/>
+            <a:ext cx="2240280" cy="475488"/>
           </a:xfrm>
           <a:prstGeom prst="rect">
             <a:avLst/>
@@ -2172,7 +2228,7 @@
               <a:buNone/>
             </a:pPr>
             <a:r>
-              <a:rPr lang="en-US" sz="1600" b="1" dirty="0">
+              <a:rPr lang="en-US" sz="1500" b="1" dirty="0">
                 <a:solidFill>
                   <a:srgbClr val="047857"/>
                 </a:solidFill>
@@ -2180,9 +2236,9 @@
                 <a:ea typeface="Arial" pitchFamily="34" charset="-122"/>
                 <a:cs typeface="Arial" pitchFamily="34" charset="-120"/>
               </a:rPr>
-              <a:t>2.400.000</a:t>
-            </a:r>
-            <a:endParaRPr lang="en-US" sz="1600" dirty="0"/>
+              <a:t>40.000</a:t>
+            </a:r>
+            <a:endParaRPr lang="en-US" sz="1500" dirty="0"/>
           </a:p>
         </p:txBody>
       </p:sp>
@@ -2194,7 +2250,7 @@
         </p:nvSpPr>
         <p:spPr>
           <a:xfrm>
-            <a:off x="3593592" y="4023360"/>
+            <a:off x="3593592" y="4005072"/>
             <a:ext cx="2240280" cy="274320"/>
           </a:xfrm>
           <a:prstGeom prst="rect">
@@ -2211,7 +2267,7 @@
               <a:buNone/>
             </a:pPr>
             <a:r>
-              <a:rPr lang="en-US" sz="800" dirty="0">
+              <a:rPr lang="en-US" sz="750" dirty="0">
                 <a:solidFill>
                   <a:srgbClr val="334155"/>
                 </a:solidFill>
@@ -2219,9 +2275,9 @@
                 <a:ea typeface="Arial" pitchFamily="34" charset="-122"/>
                 <a:cs typeface="Arial" pitchFamily="34" charset="-120"/>
               </a:rPr>
-              <a:t>40.000 Butir / HK</a:t>
-            </a:r>
-            <a:endParaRPr lang="en-US" sz="800" dirty="0"/>
+              <a:t>Butir/Hari (2,4 Juta/3 Bln)</a:t>
+            </a:r>
+            <a:endParaRPr lang="en-US" sz="750" dirty="0"/>
           </a:p>
         </p:txBody>
       </p:sp>
@@ -2233,12 +2289,156 @@
         </p:nvSpPr>
         <p:spPr>
           <a:xfrm>
-            <a:off x="6181344" y="2971800"/>
-            <a:ext cx="2514600" cy="1463040"/>
+            <a:off x="6181344" y="3017520"/>
+            <a:ext cx="2514600" cy="1417320"/>
           </a:xfrm>
           <a:prstGeom prst="roundRect">
             <a:avLst>
-              <a:gd name="adj" fmla="val 5000"/>
+              <a:gd name="adj" fmla="val 5161"/>
+            </a:avLst>
+          </a:prstGeom>
+          <a:solidFill>
+            <a:srgbClr val="F8FAFC"/>
+          </a:solidFill>
+          <a:ln w="19050">
+            <a:solidFill>
+              <a:srgbClr val="CBD5E1"/>
+            </a:solidFill>
+            <a:prstDash val="solid"/>
+          </a:ln>
+        </p:spPr>
+      </p:sp>
+      <p:sp>
+        <p:nvSpPr>
+          <p:cNvPr id="16" name="Text 14"/>
+          <p:cNvSpPr/>
+          <p:nvPr/>
+        </p:nvSpPr>
+        <p:spPr>
+          <a:xfrm>
+            <a:off x="6318504" y="3154680"/>
+            <a:ext cx="2240280" cy="292608"/>
+          </a:xfrm>
+          <a:prstGeom prst="rect">
+            <a:avLst/>
+          </a:prstGeom>
+          <a:noFill/>
+          <a:ln/>
+        </p:spPr>
+        <p:txBody>
+          <a:bodyPr wrap="square" rtlCol="0" anchor="ctr"/>
+          <a:lstStyle/>
+          <a:p>
+            <a:pPr algn="ctr" indent="0" marL="0">
+              <a:buNone/>
+            </a:pPr>
+            <a:r>
+              <a:rPr lang="en-US" sz="800" b="1" dirty="0">
+                <a:solidFill>
+                  <a:srgbClr val="64748B"/>
+                </a:solidFill>
+                <a:latin typeface="Arial" pitchFamily="34" charset="0"/>
+                <a:ea typeface="Arial" pitchFamily="34" charset="-122"/>
+                <a:cs typeface="Arial" pitchFamily="34" charset="-120"/>
+              </a:rPr>
+              <a:t>HASIL SAAT INI (BLOK 1)</a:t>
+            </a:r>
+            <a:endParaRPr lang="en-US" sz="800" dirty="0"/>
+          </a:p>
+        </p:txBody>
+      </p:sp>
+      <p:sp>
+        <p:nvSpPr>
+          <p:cNvPr id="17" name="Text 15"/>
+          <p:cNvSpPr/>
+          <p:nvPr/>
+        </p:nvSpPr>
+        <p:spPr>
+          <a:xfrm>
+            <a:off x="6318504" y="3493008"/>
+            <a:ext cx="2240280" cy="475488"/>
+          </a:xfrm>
+          <a:prstGeom prst="rect">
+            <a:avLst/>
+          </a:prstGeom>
+          <a:noFill/>
+          <a:ln/>
+        </p:spPr>
+        <p:txBody>
+          <a:bodyPr wrap="square" rtlCol="0" anchor="ctr"/>
+          <a:lstStyle/>
+          <a:p>
+            <a:pPr algn="ctr" indent="0" marL="0">
+              <a:buNone/>
+            </a:pPr>
+            <a:r>
+              <a:rPr lang="en-US" sz="1500" b="1" dirty="0">
+                <a:solidFill>
+                  <a:srgbClr val="0F172A"/>
+                </a:solidFill>
+                <a:latin typeface="Arial" pitchFamily="34" charset="0"/>
+                <a:ea typeface="Arial" pitchFamily="34" charset="-122"/>
+                <a:cs typeface="Arial" pitchFamily="34" charset="-120"/>
+              </a:rPr>
+              <a:t>~200.000</a:t>
+            </a:r>
+            <a:endParaRPr lang="en-US" sz="1500" dirty="0"/>
+          </a:p>
+        </p:txBody>
+      </p:sp>
+      <p:sp>
+        <p:nvSpPr>
+          <p:cNvPr id="18" name="Text 16"/>
+          <p:cNvSpPr/>
+          <p:nvPr/>
+        </p:nvSpPr>
+        <p:spPr>
+          <a:xfrm>
+            <a:off x="6318504" y="4005072"/>
+            <a:ext cx="2240280" cy="274320"/>
+          </a:xfrm>
+          <a:prstGeom prst="rect">
+            <a:avLst/>
+          </a:prstGeom>
+          <a:noFill/>
+          <a:ln/>
+        </p:spPr>
+        <p:txBody>
+          <a:bodyPr wrap="square" rtlCol="0" anchor="ctr"/>
+          <a:lstStyle/>
+          <a:p>
+            <a:pPr algn="ctr" indent="0" marL="0">
+              <a:buNone/>
+            </a:pPr>
+            <a:r>
+              <a:rPr lang="en-US" sz="750" dirty="0">
+                <a:solidFill>
+                  <a:srgbClr val="334155"/>
+                </a:solidFill>
+                <a:latin typeface="Arial" pitchFamily="34" charset="0"/>
+                <a:ea typeface="Arial" pitchFamily="34" charset="-122"/>
+                <a:cs typeface="Arial" pitchFamily="34" charset="-120"/>
+              </a:rPr>
+              <a:t>Butir/3 Bln (3.333 Btr/HK)</a:t>
+            </a:r>
+            <a:endParaRPr lang="en-US" sz="750" dirty="0"/>
+          </a:p>
+        </p:txBody>
+      </p:sp>
+      <p:sp>
+        <p:nvSpPr>
+          <p:cNvPr id="19" name="Shape 17"/>
+          <p:cNvSpPr/>
+          <p:nvPr/>
+        </p:nvSpPr>
+        <p:spPr>
+          <a:xfrm>
+            <a:off x="8906256" y="3017520"/>
+            <a:ext cx="2514600" cy="1417320"/>
+          </a:xfrm>
+          <a:prstGeom prst="roundRect">
+            <a:avLst>
+              <a:gd name="adj" fmla="val 5161"/>
             </a:avLst>
           </a:prstGeom>
           <a:solidFill>
@@ -2254,14 +2454,14 @@
       </p:sp>
       <p:sp>
         <p:nvSpPr>
-          <p:cNvPr id="16" name="Text 14"/>
-          <p:cNvSpPr/>
-          <p:nvPr/>
-        </p:nvSpPr>
-        <p:spPr>
-          <a:xfrm>
-            <a:off x="6318504" y="3127248"/>
-            <a:ext cx="2240280" cy="320040"/>
+          <p:cNvPr id="20" name="Text 18"/>
+          <p:cNvSpPr/>
+          <p:nvPr/>
+        </p:nvSpPr>
+        <p:spPr>
+          <a:xfrm>
+            <a:off x="9043416" y="3154680"/>
+            <a:ext cx="2240280" cy="292608"/>
           </a:xfrm>
           <a:prstGeom prst="rect">
             <a:avLst/>
@@ -2285,7 +2485,7 @@
                 <a:ea typeface="Arial" pitchFamily="34" charset="-122"/>
                 <a:cs typeface="Arial" pitchFamily="34" charset="-120"/>
               </a:rPr>
-              <a:t>REALISASI 3 BLOK KEBUN</a:t>
+              <a:t>PORTOFOLIO 3 BLOK KEBUN</a:t>
             </a:r>
             <a:endParaRPr lang="en-US" sz="800" dirty="0"/>
           </a:p>
@@ -2293,14 +2493,14 @@
       </p:sp>
       <p:sp>
         <p:nvSpPr>
-          <p:cNvPr id="17" name="Text 15"/>
-          <p:cNvSpPr/>
-          <p:nvPr/>
-        </p:nvSpPr>
-        <p:spPr>
-          <a:xfrm>
-            <a:off x="6318504" y="3493008"/>
-            <a:ext cx="2240280" cy="502920"/>
+          <p:cNvPr id="21" name="Text 19"/>
+          <p:cNvSpPr/>
+          <p:nvPr/>
+        </p:nvSpPr>
+        <p:spPr>
+          <a:xfrm>
+            <a:off x="9043416" y="3493008"/>
+            <a:ext cx="2240280" cy="475488"/>
           </a:xfrm>
           <a:prstGeom prst="rect">
             <a:avLst/>
@@ -2316,7 +2516,7 @@
               <a:buNone/>
             </a:pPr>
             <a:r>
-              <a:rPr lang="en-US" sz="1600" b="1" dirty="0">
+              <a:rPr lang="en-US" sz="1500" b="1" dirty="0">
                 <a:solidFill>
                   <a:srgbClr val="047857"/>
                 </a:solidFill>
@@ -2326,19 +2526,19 @@
               </a:rPr>
               <a:t>2.400.600</a:t>
             </a:r>
-            <a:endParaRPr lang="en-US" sz="1600" dirty="0"/>
-          </a:p>
-        </p:txBody>
-      </p:sp>
-      <p:sp>
-        <p:nvSpPr>
-          <p:cNvPr id="18" name="Text 16"/>
-          <p:cNvSpPr/>
-          <p:nvPr/>
-        </p:nvSpPr>
-        <p:spPr>
-          <a:xfrm>
-            <a:off x="6318504" y="4023360"/>
+            <a:endParaRPr lang="en-US" sz="1500" dirty="0"/>
+          </a:p>
+        </p:txBody>
+      </p:sp>
+      <p:sp>
+        <p:nvSpPr>
+          <p:cNvPr id="22" name="Text 20"/>
+          <p:cNvSpPr/>
+          <p:nvPr/>
+        </p:nvSpPr>
+        <p:spPr>
+          <a:xfrm>
+            <a:off x="9043416" y="4005072"/>
             <a:ext cx="2240280" cy="274320"/>
           </a:xfrm>
           <a:prstGeom prst="rect">
@@ -2355,7 +2555,7 @@
               <a:buNone/>
             </a:pPr>
             <a:r>
-              <a:rPr lang="en-US" sz="800" dirty="0">
+              <a:rPr lang="en-US" sz="750" dirty="0">
                 <a:solidFill>
                   <a:srgbClr val="334155"/>
                 </a:solidFill>
@@ -2363,153 +2563,9 @@
                 <a:ea typeface="Arial" pitchFamily="34" charset="-122"/>
                 <a:cs typeface="Arial" pitchFamily="34" charset="-120"/>
               </a:rPr>
-              <a:t>40.010 Butir / HK (100,03%)</a:t>
-            </a:r>
-            <a:endParaRPr lang="en-US" sz="800" dirty="0"/>
-          </a:p>
-        </p:txBody>
-      </p:sp>
-      <p:sp>
-        <p:nvSpPr>
-          <p:cNvPr id="19" name="Shape 17"/>
-          <p:cNvSpPr/>
-          <p:nvPr/>
-        </p:nvSpPr>
-        <p:spPr>
-          <a:xfrm>
-            <a:off x="8906256" y="2971800"/>
-            <a:ext cx="2514600" cy="1463040"/>
-          </a:xfrm>
-          <a:prstGeom prst="roundRect">
-            <a:avLst>
-              <a:gd name="adj" fmla="val 5000"/>
-            </a:avLst>
-          </a:prstGeom>
-          <a:solidFill>
-            <a:srgbClr val="FFFBEB"/>
-          </a:solidFill>
-          <a:ln w="19050">
-            <a:solidFill>
-              <a:srgbClr val="FDE68A"/>
-            </a:solidFill>
-            <a:prstDash val="solid"/>
-          </a:ln>
-        </p:spPr>
-      </p:sp>
-      <p:sp>
-        <p:nvSpPr>
-          <p:cNvPr id="20" name="Text 18"/>
-          <p:cNvSpPr/>
-          <p:nvPr/>
-        </p:nvSpPr>
-        <p:spPr>
-          <a:xfrm>
-            <a:off x="9043416" y="3127248"/>
-            <a:ext cx="2240280" cy="320040"/>
-          </a:xfrm>
-          <a:prstGeom prst="rect">
-            <a:avLst/>
-          </a:prstGeom>
-          <a:noFill/>
-          <a:ln/>
-        </p:spPr>
-        <p:txBody>
-          <a:bodyPr wrap="square" rtlCol="0" anchor="ctr"/>
-          <a:lstStyle/>
-          <a:p>
-            <a:pPr algn="ctr" indent="0" marL="0">
-              <a:buNone/>
-            </a:pPr>
-            <a:r>
-              <a:rPr lang="en-US" sz="800" b="1" dirty="0">
-                <a:solidFill>
-                  <a:srgbClr val="64748B"/>
-                </a:solidFill>
-                <a:latin typeface="Arial" pitchFamily="34" charset="0"/>
-                <a:ea typeface="Arial" pitchFamily="34" charset="-122"/>
-                <a:cs typeface="Arial" pitchFamily="34" charset="-120"/>
-              </a:rPr>
-              <a:t>PEMBELIAN PETANI LUAR</a:t>
-            </a:r>
-            <a:endParaRPr lang="en-US" sz="800" dirty="0"/>
-          </a:p>
-        </p:txBody>
-      </p:sp>
-      <p:sp>
-        <p:nvSpPr>
-          <p:cNvPr id="21" name="Text 19"/>
-          <p:cNvSpPr/>
-          <p:nvPr/>
-        </p:nvSpPr>
-        <p:spPr>
-          <a:xfrm>
-            <a:off x="9043416" y="3493008"/>
-            <a:ext cx="2240280" cy="502920"/>
-          </a:xfrm>
-          <a:prstGeom prst="rect">
-            <a:avLst/>
-          </a:prstGeom>
-          <a:noFill/>
-          <a:ln/>
-        </p:spPr>
-        <p:txBody>
-          <a:bodyPr wrap="square" rtlCol="0" anchor="ctr"/>
-          <a:lstStyle/>
-          <a:p>
-            <a:pPr algn="ctr" indent="0" marL="0">
-              <a:buNone/>
-            </a:pPr>
-            <a:r>
-              <a:rPr lang="en-US" sz="1600" b="1" dirty="0">
-                <a:solidFill>
-                  <a:srgbClr val="D97706"/>
-                </a:solidFill>
-                <a:latin typeface="Arial" pitchFamily="34" charset="0"/>
-                <a:ea typeface="Arial" pitchFamily="34" charset="-122"/>
-                <a:cs typeface="Arial" pitchFamily="34" charset="-120"/>
-              </a:rPr>
-              <a:t>21.599.400</a:t>
-            </a:r>
-            <a:endParaRPr lang="en-US" sz="1600" dirty="0"/>
-          </a:p>
-        </p:txBody>
-      </p:sp>
-      <p:sp>
-        <p:nvSpPr>
-          <p:cNvPr id="22" name="Text 20"/>
-          <p:cNvSpPr/>
-          <p:nvPr/>
-        </p:nvSpPr>
-        <p:spPr>
-          <a:xfrm>
-            <a:off x="9043416" y="4023360"/>
-            <a:ext cx="2240280" cy="274320"/>
-          </a:xfrm>
-          <a:prstGeom prst="rect">
-            <a:avLst/>
-          </a:prstGeom>
-          <a:noFill/>
-          <a:ln/>
-        </p:spPr>
-        <p:txBody>
-          <a:bodyPr wrap="square" rtlCol="0" anchor="ctr"/>
-          <a:lstStyle/>
-          <a:p>
-            <a:pPr algn="ctr" indent="0" marL="0">
-              <a:buNone/>
-            </a:pPr>
-            <a:r>
-              <a:rPr lang="en-US" sz="800" dirty="0">
-                <a:solidFill>
-                  <a:srgbClr val="334155"/>
-                </a:solidFill>
-                <a:latin typeface="Arial" pitchFamily="34" charset="0"/>
-                <a:ea typeface="Arial" pitchFamily="34" charset="-122"/>
-                <a:cs typeface="Arial" pitchFamily="34" charset="-120"/>
-              </a:rPr>
-              <a:t>89,99% Total Pabrik</a:t>
-            </a:r>
-            <a:endParaRPr lang="en-US" sz="800" dirty="0"/>
+              <a:t>40.010 Butir/HK (100,03%)</a:t>
+            </a:r>
+            <a:endParaRPr lang="en-US" sz="750" dirty="0"/>
           </a:p>
         </p:txBody>
       </p:sp>
@@ -2573,7 +2629,7 @@
                 <a:ea typeface="Arial" pitchFamily="34" charset="-122"/>
                 <a:cs typeface="Arial" pitchFamily="34" charset="-120"/>
               </a:rPr>
-              <a:t>Kesimpulan Latar Belakang:
+              <a:t>Kesimpulan Analisis Pasokan:
 </a:t>
             </a:r>
             <a:pPr indent="0" marL="0">
@@ -2588,7 +2644,7 @@
                 <a:ea typeface="Arial" pitchFamily="34" charset="-122"/>
                 <a:cs typeface="Arial" pitchFamily="34" charset="-120"/>
               </a:rPr>
-              <a:t>Untuk mencukupi kuota 10% pasokan (2.400.000 butir), perusahaan tidak dapat hanya mengandalkan kebun yang ada saat ini. </a:t>
+              <a:t>Realisasi panen kebun eksisting (Blok 1) yang mencapai hampir 200.000 butir per kuartal membuktikan kelayakan produktivitas kebun TMC. </a:t>
             </a:r>
             <a:pPr indent="0" marL="0">
               <a:buNone/>
@@ -2602,7 +2658,7 @@
                 <a:ea typeface="Arial" pitchFamily="34" charset="-122"/>
                 <a:cs typeface="Arial" pitchFamily="34" charset="-120"/>
               </a:rPr>
-              <a:t>Diperlukan integrasi strategis antara lahan eksisting (Blok 1), tambahan deal akuisisi (Blok 2), serta penetapan alokasi lahan ekspansi baru (Blok 3) seluas 2.044 Ha.</a:t>
+              <a:t>Guna memenuhi target supply harian 10% (40.000 butir/HK), akuisisi Blok 2 (Binjeita 135 Ha) dan pengalokasian Blok 3 (Ekspansi 2.044 Ha) secara definitif menuntaskan sisa defisit 2.200.000 butir kelapa.</a:t>
             </a:r>
             <a:endParaRPr lang="en-US" sz="1050" dirty="0"/>
           </a:p>
@@ -10942,7 +10998,7 @@
                 <a:ea typeface="Arial" pitchFamily="34" charset="-122"/>
                 <a:cs typeface="Arial" pitchFamily="34" charset="-120"/>
               </a:rPr>
-              <a:t>Mengesahkan penganggaran modal (CAPEX) untuk akuisisi/pembukaan lahan ekspansi Blok 3 seluas 2.044 Ha. Blok 3 adalah penentu utama yang menyumbang 85,17% dari target mandat 10% (2.044.000 butir/3 bulan).</a:t>
+              <a:t>Mengesahkan penganggaran modal (CAPEX) untuk akuisisi/pembukaan lahan ekspansi Blok 3 seluas 2.044 Ha. Blok 3 adalah penentu utama yang menyumbang 85,17% dari target kebutuhan supply 10% kebun TMC (2.044.000 butir/3 bulan).</a:t>
             </a:r>
             <a:endParaRPr lang="en-US" sz="850" dirty="0"/>
           </a:p>
@@ -11179,7 +11235,7 @@
                 <a:ea typeface="Arial" pitchFamily="34" charset="-122"/>
                 <a:cs typeface="Arial" pitchFamily="34" charset="-120"/>
               </a:rPr>
-              <a:t>RINGKASAN EKSEKUTIF: Portofolio 3 Blok seluas 2.379 Ha (120.030 pohon) menghasilkan 2.400.600 butir/3 bulan, TUNTAS memenuhi 100,03% dari target mandat pasokan mandiri 10% pabrik kelapa TMC.</a:t>
+              <a:t>RINGKASAN EKSEKUTIF: Portofolio 3 Blok seluas 2.379 Ha (120.030 pohon) menghasilkan 2.400.600 butir/3 bulan, TUNTAS memenuhi 100% kebutuhan supply perkebunan TMC (10% target harian produksi pabrik 400.000 butir kelapa/hari).</a:t>
             </a:r>
             <a:endParaRPr lang="en-US" sz="850" dirty="0"/>
           </a:p>

--- a/PAPARAN_ESTIMASI_STRATEGIS_PORTOFOLIO_KEBUN_TMC.pptx
+++ b/PAPARAN_ESTIMASI_STRATEGIS_PORTOFOLIO_KEBUN_TMC.pptx
@@ -1631,7 +1631,7 @@
               <a:buNone/>
             </a:pPr>
             <a:r>
-              <a:rPr lang="en-US" sz="850" dirty="0">
+              <a:rPr lang="en-US" sz="900" b="1" dirty="0">
                 <a:solidFill>
                   <a:srgbClr val="6EE7B7"/>
                 </a:solidFill>
@@ -1639,9 +1639,9 @@
                 <a:ea typeface="Arial" pitchFamily="34" charset="-122"/>
                 <a:cs typeface="Arial" pitchFamily="34" charset="-120"/>
               </a:rPr>
-              <a:t>PT TRI MUSTIKA CEMERLANG • DIVISI ESTIMASI &amp; PENGEMBANGAN LAHAN</a:t>
-            </a:r>
-            <a:endParaRPr lang="en-US" sz="850" dirty="0"/>
+              <a:t>PERKEBUNAN TMC (MEMBER OF RAI)</a:t>
+            </a:r>
+            <a:endParaRPr lang="en-US" sz="900" dirty="0"/>
           </a:p>
         </p:txBody>
       </p:sp>
@@ -2689,7 +2689,7 @@
               <a:buNone/>
             </a:pPr>
             <a:r>
-              <a:rPr lang="en-US" sz="800" dirty="0">
+              <a:rPr lang="en-US" sz="850" b="1" dirty="0">
                 <a:solidFill>
                   <a:srgbClr val="64748B"/>
                 </a:solidFill>
@@ -2697,9 +2697,9 @@
                 <a:ea typeface="Arial" pitchFamily="34" charset="-122"/>
                 <a:cs typeface="Arial" pitchFamily="34" charset="-120"/>
               </a:rPr>
-              <a:t>PT Tri Mustika Cemerlang (TMC) • Divisi Estimasi &amp; Pengembangan Kebun</a:t>
-            </a:r>
-            <a:endParaRPr lang="en-US" sz="800" dirty="0"/>
+              <a:t>PERKEBUNAN TMC (MEMBER OF RAI)</a:t>
+            </a:r>
+            <a:endParaRPr lang="en-US" sz="850" dirty="0"/>
           </a:p>
         </p:txBody>
       </p:sp>
@@ -5533,7 +5533,7 @@
               <a:buNone/>
             </a:pPr>
             <a:r>
-              <a:rPr lang="en-US" sz="800" dirty="0">
+              <a:rPr lang="en-US" sz="850" b="1" dirty="0">
                 <a:solidFill>
                   <a:srgbClr val="64748B"/>
                 </a:solidFill>
@@ -5541,9 +5541,9 @@
                 <a:ea typeface="Arial" pitchFamily="34" charset="-122"/>
                 <a:cs typeface="Arial" pitchFamily="34" charset="-120"/>
               </a:rPr>
-              <a:t>PT Tri Mustika Cemerlang (TMC) • Divisi Estimasi &amp; Pengembangan Kebun</a:t>
-            </a:r>
-            <a:endParaRPr lang="en-US" sz="800" dirty="0"/>
+              <a:t>PERKEBUNAN TMC (MEMBER OF RAI)</a:t>
+            </a:r>
+            <a:endParaRPr lang="en-US" sz="850" dirty="0"/>
           </a:p>
         </p:txBody>
       </p:sp>
@@ -9412,7 +9412,7 @@
               <a:buNone/>
             </a:pPr>
             <a:r>
-              <a:rPr lang="en-US" sz="800" dirty="0">
+              <a:rPr lang="en-US" sz="850" b="1" dirty="0">
                 <a:solidFill>
                   <a:srgbClr val="64748B"/>
                 </a:solidFill>
@@ -9420,9 +9420,9 @@
                 <a:ea typeface="Arial" pitchFamily="34" charset="-122"/>
                 <a:cs typeface="Arial" pitchFamily="34" charset="-120"/>
               </a:rPr>
-              <a:t>PT Tri Mustika Cemerlang (TMC) • Divisi Estimasi &amp; Pengembangan Kebun</a:t>
-            </a:r>
-            <a:endParaRPr lang="en-US" sz="800" dirty="0"/>
+              <a:t>PERKEBUNAN TMC (MEMBER OF RAI)</a:t>
+            </a:r>
+            <a:endParaRPr lang="en-US" sz="850" dirty="0"/>
           </a:p>
         </p:txBody>
       </p:sp>
@@ -10483,7 +10483,7 @@
               <a:buNone/>
             </a:pPr>
             <a:r>
-              <a:rPr lang="en-US" sz="800" dirty="0">
+              <a:rPr lang="en-US" sz="850" b="1" dirty="0">
                 <a:solidFill>
                   <a:srgbClr val="64748B"/>
                 </a:solidFill>
@@ -10491,9 +10491,9 @@
                 <a:ea typeface="Arial" pitchFamily="34" charset="-122"/>
                 <a:cs typeface="Arial" pitchFamily="34" charset="-120"/>
               </a:rPr>
-              <a:t>PT Tri Mustika Cemerlang (TMC) • Divisi Estimasi &amp; Pengembangan Kebun</a:t>
-            </a:r>
-            <a:endParaRPr lang="en-US" sz="800" dirty="0"/>
+              <a:t>PERKEBUNAN TMC (MEMBER OF RAI)</a:t>
+            </a:r>
+            <a:endParaRPr lang="en-US" sz="850" dirty="0"/>
           </a:p>
         </p:txBody>
       </p:sp>
@@ -11266,7 +11266,7 @@
               <a:buNone/>
             </a:pPr>
             <a:r>
-              <a:rPr lang="en-US" sz="800" dirty="0">
+              <a:rPr lang="en-US" sz="850" b="1" dirty="0">
                 <a:solidFill>
                   <a:srgbClr val="64748B"/>
                 </a:solidFill>
@@ -11274,9 +11274,9 @@
                 <a:ea typeface="Arial" pitchFamily="34" charset="-122"/>
                 <a:cs typeface="Arial" pitchFamily="34" charset="-120"/>
               </a:rPr>
-              <a:t>PT Tri Mustika Cemerlang (TMC) • Divisi Estimasi &amp; Pengembangan Kebun</a:t>
-            </a:r>
-            <a:endParaRPr lang="en-US" sz="800" dirty="0"/>
+              <a:t>PERKEBUNAN TMC (MEMBER OF RAI)</a:t>
+            </a:r>
+            <a:endParaRPr lang="en-US" sz="850" dirty="0"/>
           </a:p>
         </p:txBody>
       </p:sp>

--- a/PAPARAN_ESTIMASI_STRATEGIS_PORTOFOLIO_KEBUN_TMC.pptx
+++ b/PAPARAN_ESTIMASI_STRATEGIS_PORTOFOLIO_KEBUN_TMC.pptx
@@ -11,9 +11,10 @@
     <p:sldId id="259" r:id="rId5"/>
     <p:sldId id="260" r:id="rId6"/>
     <p:sldId id="261" r:id="rId7"/>
+    <p:sldId id="262" r:id="rId8"/>
   </p:sldIdLst>
   <p:notesMasterIdLst>
-    <p:notesMasterId r:id="rId8"/>
+    <p:notesMasterId r:id="rId9"/>
   </p:notesMasterIdLst>
   <p:sldSz cx="9144000" cy="5143500"/>
   <p:notesSz cx="5143500" cy="9144000"/>
@@ -971,6 +972,94 @@
             <a:fld id="{F7021451-1387-4CA6-816F-3879F97B5CBC}" type="slidenum">
               <a:rPr lang="en-US"/>
               <a:t>6</a:t>
+            </a:fld>
+            <a:endParaRPr lang="en-US"/>
+          </a:p>
+        </p:txBody>
+      </p:sp>
+    </p:spTree>
+    <p:extLst>
+      <p:ext uri="{BB962C8B-B14F-4D97-AF65-F5344CB8AC3E}">
+        <p14:creationId xmlns:p14="http://schemas.microsoft.com/office/powerpoint/2010/main" val="1024086991"/>
+      </p:ext>
+    </p:extLst>
+  </p:cSld>
+  <p:clrMapOvr>
+    <a:masterClrMapping/>
+  </p:clrMapOvr>
+</p:notes>
+</file>
+
+<file path=ppt/notesSlides/notesSlide7.xml><?xml version="1.0" encoding="utf-8"?>
+<p:notes xmlns:a="http://schemas.openxmlformats.org/drawingml/2006/main" xmlns:r="http://schemas.openxmlformats.org/officeDocument/2006/relationships" xmlns:p="http://schemas.openxmlformats.org/presentationml/2006/main">
+  <p:cSld>
+    <p:spTree>
+      <p:nvGrpSpPr>
+        <p:cNvPr id="1" name=""/>
+        <p:cNvGrpSpPr/>
+        <p:nvPr/>
+      </p:nvGrpSpPr>
+      <p:grpSpPr>
+        <a:xfrm>
+          <a:off x="0" y="0"/>
+          <a:ext cx="0" cy="0"/>
+          <a:chOff x="0" y="0"/>
+          <a:chExt cx="0" cy="0"/>
+        </a:xfrm>
+      </p:grpSpPr>
+      <p:sp>
+        <p:nvSpPr>
+          <p:cNvPr id="2" name="Slide Image Placeholder 1"/>
+          <p:cNvSpPr>
+            <a:spLocks noGrp="1" noRot="1" noChangeAspect="1"/>
+          </p:cNvSpPr>
+          <p:nvPr>
+            <p:ph type="sldImg"/>
+          </p:nvPr>
+        </p:nvSpPr>
+        <p:spPr/>
+      </p:sp>
+      <p:sp>
+        <p:nvSpPr>
+          <p:cNvPr id="3" name="Notes Placeholder 2"/>
+          <p:cNvSpPr>
+            <a:spLocks noGrp="1"/>
+          </p:cNvSpPr>
+          <p:nvPr>
+            <p:ph type="body" idx="1"/>
+          </p:nvPr>
+        </p:nvSpPr>
+        <p:spPr/>
+        <p:txBody>
+          <a:bodyPr/>
+          <a:lstStyle/>
+          <a:p>
+            <a:r>
+              <a:rPr lang="en-US" dirty="0"/>
+              <a:t/>
+            </a:r>
+            <a:endParaRPr lang="en-US" dirty="0"/>
+          </a:p>
+        </p:txBody>
+      </p:sp>
+      <p:sp>
+        <p:nvSpPr>
+          <p:cNvPr id="4" name="Slide Number Placeholder 3"/>
+          <p:cNvSpPr>
+            <a:spLocks noGrp="1"/>
+          </p:cNvSpPr>
+          <p:nvPr>
+            <p:ph type="sldNum" sz="quarter" idx="10"/>
+          </p:nvPr>
+        </p:nvSpPr>
+        <p:spPr/>
+        <p:txBody>
+          <a:bodyPr/>
+          <a:lstStyle/>
+          <a:p>
+            <a:fld id="{F7021451-1387-4CA6-816F-3879F97B5CBC}" type="slidenum">
+              <a:rPr lang="en-US"/>
+              <a:t>7</a:t>
             </a:fld>
             <a:endParaRPr lang="en-US"/>
           </a:p>
@@ -2736,7 +2825,7 @@
                 <a:ea typeface="Arial" pitchFamily="34" charset="-122"/>
                 <a:cs typeface="Arial" pitchFamily="34" charset="-120"/>
               </a:rPr>
-              <a:t>Slide 2 of 6</a:t>
+              <a:t>Slide 2 of 7</a:t>
             </a:r>
             <a:endParaRPr lang="en-US" sz="800" dirty="0"/>
           </a:p>
@@ -5580,7 +5669,7 @@
                 <a:ea typeface="Arial" pitchFamily="34" charset="-122"/>
                 <a:cs typeface="Arial" pitchFamily="34" charset="-120"/>
               </a:rPr>
-              <a:t>Slide 3 of 6</a:t>
+              <a:t>Slide 3 of 7</a:t>
             </a:r>
             <a:endParaRPr lang="en-US" sz="800" dirty="0"/>
           </a:p>
@@ -5683,7 +5772,7 @@
                 <a:ea typeface="Arial" pitchFamily="34" charset="-122"/>
                 <a:cs typeface="Arial" pitchFamily="34" charset="-120"/>
               </a:rPr>
-              <a:t>3. Matriks Komparasi Portofolio Kumulatif (2.379 Ha)</a:t>
+              <a:t>3. Skenario Alternatif: Pemenuhan Target 10% Tanpa Blok 2 (Hanya Blok 1 + Lahan Baru)</a:t>
             </a:r>
             <a:endParaRPr lang="en-US" sz="1800" dirty="0"/>
           </a:p>
@@ -5712,9 +5801,2854 @@
           </a:ln>
         </p:spPr>
       </p:sp>
+      <p:sp>
+        <p:nvSpPr>
+          <p:cNvPr id="5" name="Shape 3"/>
+          <p:cNvSpPr/>
+          <p:nvPr/>
+        </p:nvSpPr>
+        <p:spPr>
+          <a:xfrm>
+            <a:off x="731520" y="1371600"/>
+            <a:ext cx="3410712" cy="3566160"/>
+          </a:xfrm>
+          <a:prstGeom prst="roundRect">
+            <a:avLst>
+              <a:gd name="adj" fmla="val 2145"/>
+            </a:avLst>
+          </a:prstGeom>
+          <a:solidFill>
+            <a:srgbClr val="FFFFFF"/>
+          </a:solidFill>
+          <a:ln w="25400">
+            <a:solidFill>
+              <a:srgbClr val="047857"/>
+            </a:solidFill>
+            <a:prstDash val="solid"/>
+          </a:ln>
+        </p:spPr>
+      </p:sp>
+      <p:sp>
+        <p:nvSpPr>
+          <p:cNvPr id="6" name="Shape 4"/>
+          <p:cNvSpPr/>
+          <p:nvPr/>
+        </p:nvSpPr>
+        <p:spPr>
+          <a:xfrm>
+            <a:off x="914400" y="1536192"/>
+            <a:ext cx="2103120" cy="256032"/>
+          </a:xfrm>
+          <a:prstGeom prst="roundRect">
+            <a:avLst>
+              <a:gd name="adj" fmla="val 21429"/>
+            </a:avLst>
+          </a:prstGeom>
+          <a:solidFill>
+            <a:srgbClr val="DCFCE7"/>
+          </a:solidFill>
+          <a:ln w="12700">
+            <a:solidFill>
+              <a:srgbClr val="DCFCE7"/>
+            </a:solidFill>
+            <a:prstDash val="solid"/>
+          </a:ln>
+        </p:spPr>
+      </p:sp>
+      <p:sp>
+        <p:nvSpPr>
+          <p:cNvPr id="7" name="Text 5"/>
+          <p:cNvSpPr/>
+          <p:nvPr/>
+        </p:nvSpPr>
+        <p:spPr>
+          <a:xfrm>
+            <a:off x="914400" y="1536192"/>
+            <a:ext cx="2103120" cy="256032"/>
+          </a:xfrm>
+          <a:prstGeom prst="rect">
+            <a:avLst/>
+          </a:prstGeom>
+          <a:noFill/>
+          <a:ln/>
+        </p:spPr>
+        <p:txBody>
+          <a:bodyPr wrap="square" rtlCol="0" anchor="ctr"/>
+          <a:lstStyle/>
+          <a:p>
+            <a:pPr algn="ctr" indent="0" marL="0">
+              <a:buNone/>
+            </a:pPr>
+            <a:r>
+              <a:rPr lang="en-US" sz="800" b="1" dirty="0">
+                <a:solidFill>
+                  <a:srgbClr val="15803D"/>
+                </a:solidFill>
+                <a:latin typeface="Arial" pitchFamily="34" charset="0"/>
+                <a:ea typeface="Arial" pitchFamily="34" charset="-122"/>
+                <a:cs typeface="Arial" pitchFamily="34" charset="-120"/>
+              </a:rPr>
+              <a:t>TAHAP 1: EKSISTING</a:t>
+            </a:r>
+            <a:endParaRPr lang="en-US" sz="800" dirty="0"/>
+          </a:p>
+        </p:txBody>
+      </p:sp>
+      <p:sp>
+        <p:nvSpPr>
+          <p:cNvPr id="8" name="Text 6"/>
+          <p:cNvSpPr/>
+          <p:nvPr/>
+        </p:nvSpPr>
+        <p:spPr>
+          <a:xfrm>
+            <a:off x="914400" y="1874520"/>
+            <a:ext cx="3044952" cy="365760"/>
+          </a:xfrm>
+          <a:prstGeom prst="rect">
+            <a:avLst/>
+          </a:prstGeom>
+          <a:noFill/>
+          <a:ln/>
+        </p:spPr>
+        <p:txBody>
+          <a:bodyPr wrap="square" rtlCol="0" anchor="ctr"/>
+          <a:lstStyle/>
+          <a:p>
+            <a:pPr indent="0" marL="0">
+              <a:buNone/>
+            </a:pPr>
+            <a:r>
+              <a:rPr lang="en-US" sz="1200" b="1" dirty="0">
+                <a:solidFill>
+                  <a:srgbClr val="0F172A"/>
+                </a:solidFill>
+                <a:latin typeface="Arial" pitchFamily="34" charset="0"/>
+                <a:ea typeface="Arial" pitchFamily="34" charset="-122"/>
+                <a:cs typeface="Arial" pitchFamily="34" charset="-120"/>
+              </a:rPr>
+              <a:t>Blok 1 (Kebun TMC)</a:t>
+            </a:r>
+            <a:endParaRPr lang="en-US" sz="1200" dirty="0"/>
+          </a:p>
+        </p:txBody>
+      </p:sp>
+      <p:sp>
+        <p:nvSpPr>
+          <p:cNvPr id="9" name="Text 7"/>
+          <p:cNvSpPr/>
+          <p:nvPr/>
+        </p:nvSpPr>
+        <p:spPr>
+          <a:xfrm>
+            <a:off x="914400" y="2240280"/>
+            <a:ext cx="1463040" cy="256032"/>
+          </a:xfrm>
+          <a:prstGeom prst="rect">
+            <a:avLst/>
+          </a:prstGeom>
+          <a:noFill/>
+          <a:ln/>
+        </p:spPr>
+        <p:txBody>
+          <a:bodyPr wrap="square" rtlCol="0" anchor="ctr"/>
+          <a:lstStyle/>
+          <a:p>
+            <a:pPr indent="0" marL="0">
+              <a:buNone/>
+            </a:pPr>
+            <a:r>
+              <a:rPr lang="en-US" sz="800" dirty="0">
+                <a:solidFill>
+                  <a:srgbClr val="64748B"/>
+                </a:solidFill>
+                <a:latin typeface="Arial" pitchFamily="34" charset="0"/>
+                <a:ea typeface="Arial" pitchFamily="34" charset="-122"/>
+                <a:cs typeface="Arial" pitchFamily="34" charset="-120"/>
+              </a:rPr>
+              <a:t>Status Lahan</a:t>
+            </a:r>
+            <a:endParaRPr lang="en-US" sz="800" dirty="0"/>
+          </a:p>
+        </p:txBody>
+      </p:sp>
+      <p:sp>
+        <p:nvSpPr>
+          <p:cNvPr id="10" name="Text 8"/>
+          <p:cNvSpPr/>
+          <p:nvPr/>
+        </p:nvSpPr>
+        <p:spPr>
+          <a:xfrm>
+            <a:off x="2377440" y="2240280"/>
+            <a:ext cx="1581912" cy="256032"/>
+          </a:xfrm>
+          <a:prstGeom prst="rect">
+            <a:avLst/>
+          </a:prstGeom>
+          <a:noFill/>
+          <a:ln/>
+        </p:spPr>
+        <p:txBody>
+          <a:bodyPr wrap="square" rtlCol="0" anchor="ctr"/>
+          <a:lstStyle/>
+          <a:p>
+            <a:pPr algn="r" indent="0" marL="0">
+              <a:buNone/>
+            </a:pPr>
+            <a:r>
+              <a:rPr lang="en-US" sz="800" b="1" dirty="0">
+                <a:solidFill>
+                  <a:srgbClr val="0F172A"/>
+                </a:solidFill>
+                <a:latin typeface="Arial" pitchFamily="34" charset="0"/>
+                <a:ea typeface="Arial" pitchFamily="34" charset="-122"/>
+                <a:cs typeface="Arial" pitchFamily="34" charset="-120"/>
+              </a:rPr>
+              <a:t>Eksisting (Milik Sendiri)</a:t>
+            </a:r>
+            <a:endParaRPr lang="en-US" sz="800" dirty="0"/>
+          </a:p>
+        </p:txBody>
+      </p:sp>
+      <p:sp>
+        <p:nvSpPr>
+          <p:cNvPr id="11" name="Text 9"/>
+          <p:cNvSpPr/>
+          <p:nvPr/>
+        </p:nvSpPr>
+        <p:spPr>
+          <a:xfrm>
+            <a:off x="914400" y="2523744"/>
+            <a:ext cx="1463040" cy="256032"/>
+          </a:xfrm>
+          <a:prstGeom prst="rect">
+            <a:avLst/>
+          </a:prstGeom>
+          <a:noFill/>
+          <a:ln/>
+        </p:spPr>
+        <p:txBody>
+          <a:bodyPr wrap="square" rtlCol="0" anchor="ctr"/>
+          <a:lstStyle/>
+          <a:p>
+            <a:pPr indent="0" marL="0">
+              <a:buNone/>
+            </a:pPr>
+            <a:r>
+              <a:rPr lang="en-US" sz="800" dirty="0">
+                <a:solidFill>
+                  <a:srgbClr val="64748B"/>
+                </a:solidFill>
+                <a:latin typeface="Arial" pitchFamily="34" charset="0"/>
+                <a:ea typeface="Arial" pitchFamily="34" charset="-122"/>
+                <a:cs typeface="Arial" pitchFamily="34" charset="-120"/>
+              </a:rPr>
+              <a:t>Luas Lahan</a:t>
+            </a:r>
+            <a:endParaRPr lang="en-US" sz="800" dirty="0"/>
+          </a:p>
+        </p:txBody>
+      </p:sp>
+      <p:sp>
+        <p:nvSpPr>
+          <p:cNvPr id="12" name="Text 10"/>
+          <p:cNvSpPr/>
+          <p:nvPr/>
+        </p:nvSpPr>
+        <p:spPr>
+          <a:xfrm>
+            <a:off x="2377440" y="2523744"/>
+            <a:ext cx="1581912" cy="256032"/>
+          </a:xfrm>
+          <a:prstGeom prst="rect">
+            <a:avLst/>
+          </a:prstGeom>
+          <a:noFill/>
+          <a:ln/>
+        </p:spPr>
+        <p:txBody>
+          <a:bodyPr wrap="square" rtlCol="0" anchor="ctr"/>
+          <a:lstStyle/>
+          <a:p>
+            <a:pPr algn="r" indent="0" marL="0">
+              <a:buNone/>
+            </a:pPr>
+            <a:r>
+              <a:rPr lang="en-US" sz="800" b="1" dirty="0">
+                <a:solidFill>
+                  <a:srgbClr val="0F172A"/>
+                </a:solidFill>
+                <a:latin typeface="Arial" pitchFamily="34" charset="0"/>
+                <a:ea typeface="Arial" pitchFamily="34" charset="-122"/>
+                <a:cs typeface="Arial" pitchFamily="34" charset="-120"/>
+              </a:rPr>
+              <a:t>200 Ha</a:t>
+            </a:r>
+            <a:endParaRPr lang="en-US" sz="800" dirty="0"/>
+          </a:p>
+        </p:txBody>
+      </p:sp>
+      <p:sp>
+        <p:nvSpPr>
+          <p:cNvPr id="13" name="Text 11"/>
+          <p:cNvSpPr/>
+          <p:nvPr/>
+        </p:nvSpPr>
+        <p:spPr>
+          <a:xfrm>
+            <a:off x="914400" y="2807208"/>
+            <a:ext cx="1463040" cy="256032"/>
+          </a:xfrm>
+          <a:prstGeom prst="rect">
+            <a:avLst/>
+          </a:prstGeom>
+          <a:noFill/>
+          <a:ln/>
+        </p:spPr>
+        <p:txBody>
+          <a:bodyPr wrap="square" rtlCol="0" anchor="ctr"/>
+          <a:lstStyle/>
+          <a:p>
+            <a:pPr indent="0" marL="0">
+              <a:buNone/>
+            </a:pPr>
+            <a:r>
+              <a:rPr lang="en-US" sz="800" dirty="0">
+                <a:solidFill>
+                  <a:srgbClr val="64748B"/>
+                </a:solidFill>
+                <a:latin typeface="Arial" pitchFamily="34" charset="0"/>
+                <a:ea typeface="Arial" pitchFamily="34" charset="-122"/>
+                <a:cs typeface="Arial" pitchFamily="34" charset="-120"/>
+              </a:rPr>
+              <a:t>Kerapatan</a:t>
+            </a:r>
+            <a:endParaRPr lang="en-US" sz="800" dirty="0"/>
+          </a:p>
+        </p:txBody>
+      </p:sp>
+      <p:sp>
+        <p:nvSpPr>
+          <p:cNvPr id="14" name="Text 12"/>
+          <p:cNvSpPr/>
+          <p:nvPr/>
+        </p:nvSpPr>
+        <p:spPr>
+          <a:xfrm>
+            <a:off x="2377440" y="2807208"/>
+            <a:ext cx="1581912" cy="256032"/>
+          </a:xfrm>
+          <a:prstGeom prst="rect">
+            <a:avLst/>
+          </a:prstGeom>
+          <a:noFill/>
+          <a:ln/>
+        </p:spPr>
+        <p:txBody>
+          <a:bodyPr wrap="square" rtlCol="0" anchor="ctr"/>
+          <a:lstStyle/>
+          <a:p>
+            <a:pPr algn="r" indent="0" marL="0">
+              <a:buNone/>
+            </a:pPr>
+            <a:r>
+              <a:rPr lang="en-US" sz="800" b="1" dirty="0">
+                <a:solidFill>
+                  <a:srgbClr val="0F172A"/>
+                </a:solidFill>
+                <a:latin typeface="Arial" pitchFamily="34" charset="0"/>
+                <a:ea typeface="Arial" pitchFamily="34" charset="-122"/>
+                <a:cs typeface="Arial" pitchFamily="34" charset="-120"/>
+              </a:rPr>
+              <a:t>50 Pohon / Ha</a:t>
+            </a:r>
+            <a:endParaRPr lang="en-US" sz="800" dirty="0"/>
+          </a:p>
+        </p:txBody>
+      </p:sp>
+      <p:sp>
+        <p:nvSpPr>
+          <p:cNvPr id="15" name="Text 13"/>
+          <p:cNvSpPr/>
+          <p:nvPr/>
+        </p:nvSpPr>
+        <p:spPr>
+          <a:xfrm>
+            <a:off x="914400" y="3090672"/>
+            <a:ext cx="1463040" cy="256032"/>
+          </a:xfrm>
+          <a:prstGeom prst="rect">
+            <a:avLst/>
+          </a:prstGeom>
+          <a:noFill/>
+          <a:ln/>
+        </p:spPr>
+        <p:txBody>
+          <a:bodyPr wrap="square" rtlCol="0" anchor="ctr"/>
+          <a:lstStyle/>
+          <a:p>
+            <a:pPr indent="0" marL="0">
+              <a:buNone/>
+            </a:pPr>
+            <a:r>
+              <a:rPr lang="en-US" sz="800" dirty="0">
+                <a:solidFill>
+                  <a:srgbClr val="64748B"/>
+                </a:solidFill>
+                <a:latin typeface="Arial" pitchFamily="34" charset="0"/>
+                <a:ea typeface="Arial" pitchFamily="34" charset="-122"/>
+                <a:cs typeface="Arial" pitchFamily="34" charset="-120"/>
+              </a:rPr>
+              <a:t>Populasi Pohon</a:t>
+            </a:r>
+            <a:endParaRPr lang="en-US" sz="800" dirty="0"/>
+          </a:p>
+        </p:txBody>
+      </p:sp>
+      <p:sp>
+        <p:nvSpPr>
+          <p:cNvPr id="16" name="Text 14"/>
+          <p:cNvSpPr/>
+          <p:nvPr/>
+        </p:nvSpPr>
+        <p:spPr>
+          <a:xfrm>
+            <a:off x="2377440" y="3090672"/>
+            <a:ext cx="1581912" cy="256032"/>
+          </a:xfrm>
+          <a:prstGeom prst="rect">
+            <a:avLst/>
+          </a:prstGeom>
+          <a:noFill/>
+          <a:ln/>
+        </p:spPr>
+        <p:txBody>
+          <a:bodyPr wrap="square" rtlCol="0" anchor="ctr"/>
+          <a:lstStyle/>
+          <a:p>
+            <a:pPr algn="r" indent="0" marL="0">
+              <a:buNone/>
+            </a:pPr>
+            <a:r>
+              <a:rPr lang="en-US" sz="800" b="1" dirty="0">
+                <a:solidFill>
+                  <a:srgbClr val="0F172A"/>
+                </a:solidFill>
+                <a:latin typeface="Arial" pitchFamily="34" charset="0"/>
+                <a:ea typeface="Arial" pitchFamily="34" charset="-122"/>
+                <a:cs typeface="Arial" pitchFamily="34" charset="-120"/>
+              </a:rPr>
+              <a:t>10.000 Pohon</a:t>
+            </a:r>
+            <a:endParaRPr lang="en-US" sz="800" dirty="0"/>
+          </a:p>
+        </p:txBody>
+      </p:sp>
+      <p:sp>
+        <p:nvSpPr>
+          <p:cNvPr id="17" name="Text 15"/>
+          <p:cNvSpPr/>
+          <p:nvPr/>
+        </p:nvSpPr>
+        <p:spPr>
+          <a:xfrm>
+            <a:off x="914400" y="3374136"/>
+            <a:ext cx="1463040" cy="256032"/>
+          </a:xfrm>
+          <a:prstGeom prst="rect">
+            <a:avLst/>
+          </a:prstGeom>
+          <a:noFill/>
+          <a:ln/>
+        </p:spPr>
+        <p:txBody>
+          <a:bodyPr wrap="square" rtlCol="0" anchor="ctr"/>
+          <a:lstStyle/>
+          <a:p>
+            <a:pPr indent="0" marL="0">
+              <a:buNone/>
+            </a:pPr>
+            <a:r>
+              <a:rPr lang="en-US" sz="800" dirty="0">
+                <a:solidFill>
+                  <a:srgbClr val="64748B"/>
+                </a:solidFill>
+                <a:latin typeface="Arial" pitchFamily="34" charset="0"/>
+                <a:ea typeface="Arial" pitchFamily="34" charset="-122"/>
+                <a:cs typeface="Arial" pitchFamily="34" charset="-120"/>
+              </a:rPr>
+              <a:t>Usia Rata-rata</a:t>
+            </a:r>
+            <a:endParaRPr lang="en-US" sz="800" dirty="0"/>
+          </a:p>
+        </p:txBody>
+      </p:sp>
+      <p:sp>
+        <p:nvSpPr>
+          <p:cNvPr id="18" name="Text 16"/>
+          <p:cNvSpPr/>
+          <p:nvPr/>
+        </p:nvSpPr>
+        <p:spPr>
+          <a:xfrm>
+            <a:off x="2377440" y="3374136"/>
+            <a:ext cx="1581912" cy="256032"/>
+          </a:xfrm>
+          <a:prstGeom prst="rect">
+            <a:avLst/>
+          </a:prstGeom>
+          <a:noFill/>
+          <a:ln/>
+        </p:spPr>
+        <p:txBody>
+          <a:bodyPr wrap="square" rtlCol="0" anchor="ctr"/>
+          <a:lstStyle/>
+          <a:p>
+            <a:pPr algn="r" indent="0" marL="0">
+              <a:buNone/>
+            </a:pPr>
+            <a:r>
+              <a:rPr lang="en-US" sz="800" b="1" dirty="0">
+                <a:solidFill>
+                  <a:srgbClr val="0F172A"/>
+                </a:solidFill>
+                <a:latin typeface="Arial" pitchFamily="34" charset="0"/>
+                <a:ea typeface="Arial" pitchFamily="34" charset="-122"/>
+                <a:cs typeface="Arial" pitchFamily="34" charset="-120"/>
+              </a:rPr>
+              <a:t>15 Thn (Puncak 100%)</a:t>
+            </a:r>
+            <a:endParaRPr lang="en-US" sz="800" dirty="0"/>
+          </a:p>
+        </p:txBody>
+      </p:sp>
+      <p:sp>
+        <p:nvSpPr>
+          <p:cNvPr id="19" name="Text 17"/>
+          <p:cNvSpPr/>
+          <p:nvPr/>
+        </p:nvSpPr>
+        <p:spPr>
+          <a:xfrm>
+            <a:off x="914400" y="3657600"/>
+            <a:ext cx="1463040" cy="256032"/>
+          </a:xfrm>
+          <a:prstGeom prst="rect">
+            <a:avLst/>
+          </a:prstGeom>
+          <a:noFill/>
+          <a:ln/>
+        </p:spPr>
+        <p:txBody>
+          <a:bodyPr wrap="square" rtlCol="0" anchor="ctr"/>
+          <a:lstStyle/>
+          <a:p>
+            <a:pPr indent="0" marL="0">
+              <a:buNone/>
+            </a:pPr>
+            <a:r>
+              <a:rPr lang="en-US" sz="800" dirty="0">
+                <a:solidFill>
+                  <a:srgbClr val="64748B"/>
+                </a:solidFill>
+                <a:latin typeface="Arial" pitchFamily="34" charset="0"/>
+                <a:ea typeface="Arial" pitchFamily="34" charset="-122"/>
+                <a:cs typeface="Arial" pitchFamily="34" charset="-120"/>
+              </a:rPr>
+              <a:t>Yield Panen</a:t>
+            </a:r>
+            <a:endParaRPr lang="en-US" sz="800" dirty="0"/>
+          </a:p>
+        </p:txBody>
+      </p:sp>
+      <p:sp>
+        <p:nvSpPr>
+          <p:cNvPr id="20" name="Text 18"/>
+          <p:cNvSpPr/>
+          <p:nvPr/>
+        </p:nvSpPr>
+        <p:spPr>
+          <a:xfrm>
+            <a:off x="2377440" y="3657600"/>
+            <a:ext cx="1581912" cy="256032"/>
+          </a:xfrm>
+          <a:prstGeom prst="rect">
+            <a:avLst/>
+          </a:prstGeom>
+          <a:noFill/>
+          <a:ln/>
+        </p:spPr>
+        <p:txBody>
+          <a:bodyPr wrap="square" rtlCol="0" anchor="ctr"/>
+          <a:lstStyle/>
+          <a:p>
+            <a:pPr algn="r" indent="0" marL="0">
+              <a:buNone/>
+            </a:pPr>
+            <a:r>
+              <a:rPr lang="en-US" sz="800" b="1" dirty="0">
+                <a:solidFill>
+                  <a:srgbClr val="0F172A"/>
+                </a:solidFill>
+                <a:latin typeface="Arial" pitchFamily="34" charset="0"/>
+                <a:ea typeface="Arial" pitchFamily="34" charset="-122"/>
+                <a:cs typeface="Arial" pitchFamily="34" charset="-120"/>
+              </a:rPr>
+              <a:t>20 Butir / Pohon</a:t>
+            </a:r>
+            <a:endParaRPr lang="en-US" sz="800" dirty="0"/>
+          </a:p>
+        </p:txBody>
+      </p:sp>
+      <p:sp>
+        <p:nvSpPr>
+          <p:cNvPr id="21" name="Text 19"/>
+          <p:cNvSpPr/>
+          <p:nvPr/>
+        </p:nvSpPr>
+        <p:spPr>
+          <a:xfrm>
+            <a:off x="914400" y="3941064"/>
+            <a:ext cx="1463040" cy="256032"/>
+          </a:xfrm>
+          <a:prstGeom prst="rect">
+            <a:avLst/>
+          </a:prstGeom>
+          <a:noFill/>
+          <a:ln/>
+        </p:spPr>
+        <p:txBody>
+          <a:bodyPr wrap="square" rtlCol="0" anchor="ctr"/>
+          <a:lstStyle/>
+          <a:p>
+            <a:pPr indent="0" marL="0">
+              <a:buNone/>
+            </a:pPr>
+            <a:r>
+              <a:rPr lang="en-US" sz="800" dirty="0">
+                <a:solidFill>
+                  <a:srgbClr val="64748B"/>
+                </a:solidFill>
+                <a:latin typeface="Arial" pitchFamily="34" charset="0"/>
+                <a:ea typeface="Arial" pitchFamily="34" charset="-122"/>
+                <a:cs typeface="Arial" pitchFamily="34" charset="-120"/>
+              </a:rPr>
+              <a:t>Hasil / 3 Bulan</a:t>
+            </a:r>
+            <a:endParaRPr lang="en-US" sz="800" dirty="0"/>
+          </a:p>
+        </p:txBody>
+      </p:sp>
+      <p:sp>
+        <p:nvSpPr>
+          <p:cNvPr id="22" name="Text 20"/>
+          <p:cNvSpPr/>
+          <p:nvPr/>
+        </p:nvSpPr>
+        <p:spPr>
+          <a:xfrm>
+            <a:off x="2377440" y="3941064"/>
+            <a:ext cx="1581912" cy="256032"/>
+          </a:xfrm>
+          <a:prstGeom prst="rect">
+            <a:avLst/>
+          </a:prstGeom>
+          <a:noFill/>
+          <a:ln/>
+        </p:spPr>
+        <p:txBody>
+          <a:bodyPr wrap="square" rtlCol="0" anchor="ctr"/>
+          <a:lstStyle/>
+          <a:p>
+            <a:pPr algn="r" indent="0" marL="0">
+              <a:buNone/>
+            </a:pPr>
+            <a:r>
+              <a:rPr lang="en-US" sz="800" b="1" dirty="0">
+                <a:solidFill>
+                  <a:srgbClr val="0F172A"/>
+                </a:solidFill>
+                <a:latin typeface="Arial" pitchFamily="34" charset="0"/>
+                <a:ea typeface="Arial" pitchFamily="34" charset="-122"/>
+                <a:cs typeface="Arial" pitchFamily="34" charset="-120"/>
+              </a:rPr>
+              <a:t>200.000 Butir</a:t>
+            </a:r>
+            <a:endParaRPr lang="en-US" sz="800" dirty="0"/>
+          </a:p>
+        </p:txBody>
+      </p:sp>
+      <p:sp>
+        <p:nvSpPr>
+          <p:cNvPr id="23" name="Text 21"/>
+          <p:cNvSpPr/>
+          <p:nvPr/>
+        </p:nvSpPr>
+        <p:spPr>
+          <a:xfrm>
+            <a:off x="914400" y="4224528"/>
+            <a:ext cx="1463040" cy="256032"/>
+          </a:xfrm>
+          <a:prstGeom prst="rect">
+            <a:avLst/>
+          </a:prstGeom>
+          <a:noFill/>
+          <a:ln/>
+        </p:spPr>
+        <p:txBody>
+          <a:bodyPr wrap="square" rtlCol="0" anchor="ctr"/>
+          <a:lstStyle/>
+          <a:p>
+            <a:pPr indent="0" marL="0">
+              <a:buNone/>
+            </a:pPr>
+            <a:r>
+              <a:rPr lang="en-US" sz="800" dirty="0">
+                <a:solidFill>
+                  <a:srgbClr val="64748B"/>
+                </a:solidFill>
+                <a:latin typeface="Arial" pitchFamily="34" charset="0"/>
+                <a:ea typeface="Arial" pitchFamily="34" charset="-122"/>
+                <a:cs typeface="Arial" pitchFamily="34" charset="-120"/>
+              </a:rPr>
+              <a:t>Pasokan Harian</a:t>
+            </a:r>
+            <a:endParaRPr lang="en-US" sz="800" dirty="0"/>
+          </a:p>
+        </p:txBody>
+      </p:sp>
+      <p:sp>
+        <p:nvSpPr>
+          <p:cNvPr id="24" name="Text 22"/>
+          <p:cNvSpPr/>
+          <p:nvPr/>
+        </p:nvSpPr>
+        <p:spPr>
+          <a:xfrm>
+            <a:off x="2377440" y="4224528"/>
+            <a:ext cx="1581912" cy="256032"/>
+          </a:xfrm>
+          <a:prstGeom prst="rect">
+            <a:avLst/>
+          </a:prstGeom>
+          <a:noFill/>
+          <a:ln/>
+        </p:spPr>
+        <p:txBody>
+          <a:bodyPr wrap="square" rtlCol="0" anchor="ctr"/>
+          <a:lstStyle/>
+          <a:p>
+            <a:pPr algn="r" indent="0" marL="0">
+              <a:buNone/>
+            </a:pPr>
+            <a:r>
+              <a:rPr lang="en-US" sz="800" b="1" dirty="0">
+                <a:solidFill>
+                  <a:srgbClr val="0F172A"/>
+                </a:solidFill>
+                <a:latin typeface="Arial" pitchFamily="34" charset="0"/>
+                <a:ea typeface="Arial" pitchFamily="34" charset="-122"/>
+                <a:cs typeface="Arial" pitchFamily="34" charset="-120"/>
+              </a:rPr>
+              <a:t>3.333 Butir / HK</a:t>
+            </a:r>
+            <a:endParaRPr lang="en-US" sz="800" dirty="0"/>
+          </a:p>
+        </p:txBody>
+      </p:sp>
+      <p:sp>
+        <p:nvSpPr>
+          <p:cNvPr id="25" name="Text 23"/>
+          <p:cNvSpPr/>
+          <p:nvPr/>
+        </p:nvSpPr>
+        <p:spPr>
+          <a:xfrm>
+            <a:off x="914400" y="4507992"/>
+            <a:ext cx="1463040" cy="256032"/>
+          </a:xfrm>
+          <a:prstGeom prst="rect">
+            <a:avLst/>
+          </a:prstGeom>
+          <a:noFill/>
+          <a:ln/>
+        </p:spPr>
+        <p:txBody>
+          <a:bodyPr wrap="square" rtlCol="0" anchor="ctr"/>
+          <a:lstStyle/>
+          <a:p>
+            <a:pPr indent="0" marL="0">
+              <a:buNone/>
+            </a:pPr>
+            <a:r>
+              <a:rPr lang="en-US" sz="800" dirty="0">
+                <a:solidFill>
+                  <a:srgbClr val="64748B"/>
+                </a:solidFill>
+                <a:latin typeface="Arial" pitchFamily="34" charset="0"/>
+                <a:ea typeface="Arial" pitchFamily="34" charset="-122"/>
+                <a:cs typeface="Arial" pitchFamily="34" charset="-120"/>
+              </a:rPr>
+              <a:t>Porsi Target 10%</a:t>
+            </a:r>
+            <a:endParaRPr lang="en-US" sz="800" dirty="0"/>
+          </a:p>
+        </p:txBody>
+      </p:sp>
+      <p:sp>
+        <p:nvSpPr>
+          <p:cNvPr id="26" name="Text 24"/>
+          <p:cNvSpPr/>
+          <p:nvPr/>
+        </p:nvSpPr>
+        <p:spPr>
+          <a:xfrm>
+            <a:off x="2377440" y="4507992"/>
+            <a:ext cx="1581912" cy="256032"/>
+          </a:xfrm>
+          <a:prstGeom prst="rect">
+            <a:avLst/>
+          </a:prstGeom>
+          <a:noFill/>
+          <a:ln/>
+        </p:spPr>
+        <p:txBody>
+          <a:bodyPr wrap="square" rtlCol="0" anchor="ctr"/>
+          <a:lstStyle/>
+          <a:p>
+            <a:pPr algn="r" indent="0" marL="0">
+              <a:buNone/>
+            </a:pPr>
+            <a:r>
+              <a:rPr lang="en-US" sz="800" b="1" dirty="0">
+                <a:solidFill>
+                  <a:srgbClr val="0F172A"/>
+                </a:solidFill>
+                <a:latin typeface="Arial" pitchFamily="34" charset="0"/>
+                <a:ea typeface="Arial" pitchFamily="34" charset="-122"/>
+                <a:cs typeface="Arial" pitchFamily="34" charset="-120"/>
+              </a:rPr>
+              <a:t>8,33% (Baru 0,83% Pabrik)</a:t>
+            </a:r>
+            <a:endParaRPr lang="en-US" sz="800" dirty="0"/>
+          </a:p>
+        </p:txBody>
+      </p:sp>
+      <p:sp>
+        <p:nvSpPr>
+          <p:cNvPr id="27" name="Shape 25"/>
+          <p:cNvSpPr/>
+          <p:nvPr/>
+        </p:nvSpPr>
+        <p:spPr>
+          <a:xfrm>
+            <a:off x="4370832" y="1371600"/>
+            <a:ext cx="3410712" cy="3566160"/>
+          </a:xfrm>
+          <a:prstGeom prst="roundRect">
+            <a:avLst>
+              <a:gd name="adj" fmla="val 2145"/>
+            </a:avLst>
+          </a:prstGeom>
+          <a:solidFill>
+            <a:srgbClr val="FFFDF5"/>
+          </a:solidFill>
+          <a:ln w="25400">
+            <a:solidFill>
+              <a:srgbClr val="D97706"/>
+            </a:solidFill>
+            <a:prstDash val="solid"/>
+          </a:ln>
+        </p:spPr>
+      </p:sp>
+      <p:sp>
+        <p:nvSpPr>
+          <p:cNvPr id="28" name="Shape 26"/>
+          <p:cNvSpPr/>
+          <p:nvPr/>
+        </p:nvSpPr>
+        <p:spPr>
+          <a:xfrm>
+            <a:off x="4553712" y="1536192"/>
+            <a:ext cx="2103120" cy="256032"/>
+          </a:xfrm>
+          <a:prstGeom prst="roundRect">
+            <a:avLst>
+              <a:gd name="adj" fmla="val 21429"/>
+            </a:avLst>
+          </a:prstGeom>
+          <a:solidFill>
+            <a:srgbClr val="FEF3C7"/>
+          </a:solidFill>
+          <a:ln w="12700">
+            <a:solidFill>
+              <a:srgbClr val="FEF3C7"/>
+            </a:solidFill>
+            <a:prstDash val="solid"/>
+          </a:ln>
+        </p:spPr>
+      </p:sp>
+      <p:sp>
+        <p:nvSpPr>
+          <p:cNvPr id="29" name="Text 27"/>
+          <p:cNvSpPr/>
+          <p:nvPr/>
+        </p:nvSpPr>
+        <p:spPr>
+          <a:xfrm>
+            <a:off x="4553712" y="1536192"/>
+            <a:ext cx="2103120" cy="256032"/>
+          </a:xfrm>
+          <a:prstGeom prst="rect">
+            <a:avLst/>
+          </a:prstGeom>
+          <a:noFill/>
+          <a:ln/>
+        </p:spPr>
+        <p:txBody>
+          <a:bodyPr wrap="square" rtlCol="0" anchor="ctr"/>
+          <a:lstStyle/>
+          <a:p>
+            <a:pPr algn="ctr" indent="0" marL="0">
+              <a:buNone/>
+            </a:pPr>
+            <a:r>
+              <a:rPr lang="en-US" sz="800" b="1" dirty="0">
+                <a:solidFill>
+                  <a:srgbClr val="B45309"/>
+                </a:solidFill>
+                <a:latin typeface="Arial" pitchFamily="34" charset="0"/>
+                <a:ea typeface="Arial" pitchFamily="34" charset="-122"/>
+                <a:cs typeface="Arial" pitchFamily="34" charset="-120"/>
+              </a:rPr>
+              <a:t>KEBUTUHAN LAHAN BARU</a:t>
+            </a:r>
+            <a:endParaRPr lang="en-US" sz="800" dirty="0"/>
+          </a:p>
+        </p:txBody>
+      </p:sp>
+      <p:sp>
+        <p:nvSpPr>
+          <p:cNvPr id="30" name="Text 28"/>
+          <p:cNvSpPr/>
+          <p:nvPr/>
+        </p:nvSpPr>
+        <p:spPr>
+          <a:xfrm>
+            <a:off x="4553712" y="1874520"/>
+            <a:ext cx="3044952" cy="365760"/>
+          </a:xfrm>
+          <a:prstGeom prst="rect">
+            <a:avLst/>
+          </a:prstGeom>
+          <a:noFill/>
+          <a:ln/>
+        </p:spPr>
+        <p:txBody>
+          <a:bodyPr wrap="square" rtlCol="0" anchor="ctr"/>
+          <a:lstStyle/>
+          <a:p>
+            <a:pPr indent="0" marL="0">
+              <a:buNone/>
+            </a:pPr>
+            <a:r>
+              <a:rPr lang="en-US" sz="1200" b="1" dirty="0">
+                <a:solidFill>
+                  <a:srgbClr val="0F172A"/>
+                </a:solidFill>
+                <a:latin typeface="Arial" pitchFamily="34" charset="0"/>
+                <a:ea typeface="Arial" pitchFamily="34" charset="-122"/>
+                <a:cs typeface="Arial" pitchFamily="34" charset="-120"/>
+              </a:rPr>
+              <a:t>Lahan Baru (Pengganti)</a:t>
+            </a:r>
+            <a:endParaRPr lang="en-US" sz="1200" dirty="0"/>
+          </a:p>
+        </p:txBody>
+      </p:sp>
+      <p:sp>
+        <p:nvSpPr>
+          <p:cNvPr id="31" name="Text 29"/>
+          <p:cNvSpPr/>
+          <p:nvPr/>
+        </p:nvSpPr>
+        <p:spPr>
+          <a:xfrm>
+            <a:off x="4553712" y="2240280"/>
+            <a:ext cx="1463040" cy="256032"/>
+          </a:xfrm>
+          <a:prstGeom prst="rect">
+            <a:avLst/>
+          </a:prstGeom>
+          <a:noFill/>
+          <a:ln/>
+        </p:spPr>
+        <p:txBody>
+          <a:bodyPr wrap="square" rtlCol="0" anchor="ctr"/>
+          <a:lstStyle/>
+          <a:p>
+            <a:pPr indent="0" marL="0">
+              <a:buNone/>
+            </a:pPr>
+            <a:r>
+              <a:rPr lang="en-US" sz="800" dirty="0">
+                <a:solidFill>
+                  <a:srgbClr val="64748B"/>
+                </a:solidFill>
+                <a:latin typeface="Arial" pitchFamily="34" charset="0"/>
+                <a:ea typeface="Arial" pitchFamily="34" charset="-122"/>
+                <a:cs typeface="Arial" pitchFamily="34" charset="-120"/>
+              </a:rPr>
+              <a:t>Status Lahan</a:t>
+            </a:r>
+            <a:endParaRPr lang="en-US" sz="800" dirty="0"/>
+          </a:p>
+        </p:txBody>
+      </p:sp>
+      <p:sp>
+        <p:nvSpPr>
+          <p:cNvPr id="32" name="Text 30"/>
+          <p:cNvSpPr/>
+          <p:nvPr/>
+        </p:nvSpPr>
+        <p:spPr>
+          <a:xfrm>
+            <a:off x="6016752" y="2240280"/>
+            <a:ext cx="1581912" cy="256032"/>
+          </a:xfrm>
+          <a:prstGeom prst="rect">
+            <a:avLst/>
+          </a:prstGeom>
+          <a:noFill/>
+          <a:ln/>
+        </p:spPr>
+        <p:txBody>
+          <a:bodyPr wrap="square" rtlCol="0" anchor="ctr"/>
+          <a:lstStyle/>
+          <a:p>
+            <a:pPr algn="r" indent="0" marL="0">
+              <a:buNone/>
+            </a:pPr>
+            <a:r>
+              <a:rPr lang="en-US" sz="800" b="1" dirty="0">
+                <a:solidFill>
+                  <a:srgbClr val="0F172A"/>
+                </a:solidFill>
+                <a:latin typeface="Arial" pitchFamily="34" charset="0"/>
+                <a:ea typeface="Arial" pitchFamily="34" charset="-122"/>
+                <a:cs typeface="Arial" pitchFamily="34" charset="-120"/>
+              </a:rPr>
+              <a:t>Ekspansi Baru (Tanpa Blok 2)</a:t>
+            </a:r>
+            <a:endParaRPr lang="en-US" sz="800" dirty="0"/>
+          </a:p>
+        </p:txBody>
+      </p:sp>
+      <p:sp>
+        <p:nvSpPr>
+          <p:cNvPr id="33" name="Text 31"/>
+          <p:cNvSpPr/>
+          <p:nvPr/>
+        </p:nvSpPr>
+        <p:spPr>
+          <a:xfrm>
+            <a:off x="4553712" y="2523744"/>
+            <a:ext cx="1463040" cy="256032"/>
+          </a:xfrm>
+          <a:prstGeom prst="rect">
+            <a:avLst/>
+          </a:prstGeom>
+          <a:noFill/>
+          <a:ln/>
+        </p:spPr>
+        <p:txBody>
+          <a:bodyPr wrap="square" rtlCol="0" anchor="ctr"/>
+          <a:lstStyle/>
+          <a:p>
+            <a:pPr indent="0" marL="0">
+              <a:buNone/>
+            </a:pPr>
+            <a:r>
+              <a:rPr lang="en-US" sz="800" dirty="0">
+                <a:solidFill>
+                  <a:srgbClr val="64748B"/>
+                </a:solidFill>
+                <a:latin typeface="Arial" pitchFamily="34" charset="0"/>
+                <a:ea typeface="Arial" pitchFamily="34" charset="-122"/>
+                <a:cs typeface="Arial" pitchFamily="34" charset="-120"/>
+              </a:rPr>
+              <a:t>Luas Lahan</a:t>
+            </a:r>
+            <a:endParaRPr lang="en-US" sz="800" dirty="0"/>
+          </a:p>
+        </p:txBody>
+      </p:sp>
+      <p:sp>
+        <p:nvSpPr>
+          <p:cNvPr id="34" name="Text 32"/>
+          <p:cNvSpPr/>
+          <p:nvPr/>
+        </p:nvSpPr>
+        <p:spPr>
+          <a:xfrm>
+            <a:off x="6016752" y="2523744"/>
+            <a:ext cx="1581912" cy="256032"/>
+          </a:xfrm>
+          <a:prstGeom prst="rect">
+            <a:avLst/>
+          </a:prstGeom>
+          <a:noFill/>
+          <a:ln/>
+        </p:spPr>
+        <p:txBody>
+          <a:bodyPr wrap="square" rtlCol="0" anchor="ctr"/>
+          <a:lstStyle/>
+          <a:p>
+            <a:pPr algn="r" indent="0" marL="0">
+              <a:buNone/>
+            </a:pPr>
+            <a:r>
+              <a:rPr lang="en-US" sz="800" b="1" dirty="0">
+                <a:solidFill>
+                  <a:srgbClr val="0F172A"/>
+                </a:solidFill>
+                <a:latin typeface="Arial" pitchFamily="34" charset="0"/>
+                <a:ea typeface="Arial" pitchFamily="34" charset="-122"/>
+                <a:cs typeface="Arial" pitchFamily="34" charset="-120"/>
+              </a:rPr>
+              <a:t>2.200 Ha</a:t>
+            </a:r>
+            <a:endParaRPr lang="en-US" sz="800" dirty="0"/>
+          </a:p>
+        </p:txBody>
+      </p:sp>
+      <p:sp>
+        <p:nvSpPr>
+          <p:cNvPr id="35" name="Text 33"/>
+          <p:cNvSpPr/>
+          <p:nvPr/>
+        </p:nvSpPr>
+        <p:spPr>
+          <a:xfrm>
+            <a:off x="4553712" y="2807208"/>
+            <a:ext cx="1463040" cy="256032"/>
+          </a:xfrm>
+          <a:prstGeom prst="rect">
+            <a:avLst/>
+          </a:prstGeom>
+          <a:noFill/>
+          <a:ln/>
+        </p:spPr>
+        <p:txBody>
+          <a:bodyPr wrap="square" rtlCol="0" anchor="ctr"/>
+          <a:lstStyle/>
+          <a:p>
+            <a:pPr indent="0" marL="0">
+              <a:buNone/>
+            </a:pPr>
+            <a:r>
+              <a:rPr lang="en-US" sz="800" dirty="0">
+                <a:solidFill>
+                  <a:srgbClr val="64748B"/>
+                </a:solidFill>
+                <a:latin typeface="Arial" pitchFamily="34" charset="0"/>
+                <a:ea typeface="Arial" pitchFamily="34" charset="-122"/>
+                <a:cs typeface="Arial" pitchFamily="34" charset="-120"/>
+              </a:rPr>
+              <a:t>Kerapatan</a:t>
+            </a:r>
+            <a:endParaRPr lang="en-US" sz="800" dirty="0"/>
+          </a:p>
+        </p:txBody>
+      </p:sp>
+      <p:sp>
+        <p:nvSpPr>
+          <p:cNvPr id="36" name="Text 34"/>
+          <p:cNvSpPr/>
+          <p:nvPr/>
+        </p:nvSpPr>
+        <p:spPr>
+          <a:xfrm>
+            <a:off x="6016752" y="2807208"/>
+            <a:ext cx="1581912" cy="256032"/>
+          </a:xfrm>
+          <a:prstGeom prst="rect">
+            <a:avLst/>
+          </a:prstGeom>
+          <a:noFill/>
+          <a:ln/>
+        </p:spPr>
+        <p:txBody>
+          <a:bodyPr wrap="square" rtlCol="0" anchor="ctr"/>
+          <a:lstStyle/>
+          <a:p>
+            <a:pPr algn="r" indent="0" marL="0">
+              <a:buNone/>
+            </a:pPr>
+            <a:r>
+              <a:rPr lang="en-US" sz="800" b="1" dirty="0">
+                <a:solidFill>
+                  <a:srgbClr val="0F172A"/>
+                </a:solidFill>
+                <a:latin typeface="Arial" pitchFamily="34" charset="0"/>
+                <a:ea typeface="Arial" pitchFamily="34" charset="-122"/>
+                <a:cs typeface="Arial" pitchFamily="34" charset="-120"/>
+              </a:rPr>
+              <a:t>50 Pohon / Ha</a:t>
+            </a:r>
+            <a:endParaRPr lang="en-US" sz="800" dirty="0"/>
+          </a:p>
+        </p:txBody>
+      </p:sp>
+      <p:sp>
+        <p:nvSpPr>
+          <p:cNvPr id="37" name="Text 35"/>
+          <p:cNvSpPr/>
+          <p:nvPr/>
+        </p:nvSpPr>
+        <p:spPr>
+          <a:xfrm>
+            <a:off x="4553712" y="3090672"/>
+            <a:ext cx="1463040" cy="256032"/>
+          </a:xfrm>
+          <a:prstGeom prst="rect">
+            <a:avLst/>
+          </a:prstGeom>
+          <a:noFill/>
+          <a:ln/>
+        </p:spPr>
+        <p:txBody>
+          <a:bodyPr wrap="square" rtlCol="0" anchor="ctr"/>
+          <a:lstStyle/>
+          <a:p>
+            <a:pPr indent="0" marL="0">
+              <a:buNone/>
+            </a:pPr>
+            <a:r>
+              <a:rPr lang="en-US" sz="800" dirty="0">
+                <a:solidFill>
+                  <a:srgbClr val="64748B"/>
+                </a:solidFill>
+                <a:latin typeface="Arial" pitchFamily="34" charset="0"/>
+                <a:ea typeface="Arial" pitchFamily="34" charset="-122"/>
+                <a:cs typeface="Arial" pitchFamily="34" charset="-120"/>
+              </a:rPr>
+              <a:t>Populasi Pohon</a:t>
+            </a:r>
+            <a:endParaRPr lang="en-US" sz="800" dirty="0"/>
+          </a:p>
+        </p:txBody>
+      </p:sp>
+      <p:sp>
+        <p:nvSpPr>
+          <p:cNvPr id="38" name="Text 36"/>
+          <p:cNvSpPr/>
+          <p:nvPr/>
+        </p:nvSpPr>
+        <p:spPr>
+          <a:xfrm>
+            <a:off x="6016752" y="3090672"/>
+            <a:ext cx="1581912" cy="256032"/>
+          </a:xfrm>
+          <a:prstGeom prst="rect">
+            <a:avLst/>
+          </a:prstGeom>
+          <a:noFill/>
+          <a:ln/>
+        </p:spPr>
+        <p:txBody>
+          <a:bodyPr wrap="square" rtlCol="0" anchor="ctr"/>
+          <a:lstStyle/>
+          <a:p>
+            <a:pPr algn="r" indent="0" marL="0">
+              <a:buNone/>
+            </a:pPr>
+            <a:r>
+              <a:rPr lang="en-US" sz="800" b="1" dirty="0">
+                <a:solidFill>
+                  <a:srgbClr val="0F172A"/>
+                </a:solidFill>
+                <a:latin typeface="Arial" pitchFamily="34" charset="0"/>
+                <a:ea typeface="Arial" pitchFamily="34" charset="-122"/>
+                <a:cs typeface="Arial" pitchFamily="34" charset="-120"/>
+              </a:rPr>
+              <a:t>110.000 Pohon</a:t>
+            </a:r>
+            <a:endParaRPr lang="en-US" sz="800" dirty="0"/>
+          </a:p>
+        </p:txBody>
+      </p:sp>
+      <p:sp>
+        <p:nvSpPr>
+          <p:cNvPr id="39" name="Text 37"/>
+          <p:cNvSpPr/>
+          <p:nvPr/>
+        </p:nvSpPr>
+        <p:spPr>
+          <a:xfrm>
+            <a:off x="4553712" y="3374136"/>
+            <a:ext cx="1463040" cy="256032"/>
+          </a:xfrm>
+          <a:prstGeom prst="rect">
+            <a:avLst/>
+          </a:prstGeom>
+          <a:noFill/>
+          <a:ln/>
+        </p:spPr>
+        <p:txBody>
+          <a:bodyPr wrap="square" rtlCol="0" anchor="ctr"/>
+          <a:lstStyle/>
+          <a:p>
+            <a:pPr indent="0" marL="0">
+              <a:buNone/>
+            </a:pPr>
+            <a:r>
+              <a:rPr lang="en-US" sz="800" dirty="0">
+                <a:solidFill>
+                  <a:srgbClr val="64748B"/>
+                </a:solidFill>
+                <a:latin typeface="Arial" pitchFamily="34" charset="0"/>
+                <a:ea typeface="Arial" pitchFamily="34" charset="-122"/>
+                <a:cs typeface="Arial" pitchFamily="34" charset="-120"/>
+              </a:rPr>
+              <a:t>Usia Rata-rata</a:t>
+            </a:r>
+            <a:endParaRPr lang="en-US" sz="800" dirty="0"/>
+          </a:p>
+        </p:txBody>
+      </p:sp>
+      <p:sp>
+        <p:nvSpPr>
+          <p:cNvPr id="40" name="Text 38"/>
+          <p:cNvSpPr/>
+          <p:nvPr/>
+        </p:nvSpPr>
+        <p:spPr>
+          <a:xfrm>
+            <a:off x="6016752" y="3374136"/>
+            <a:ext cx="1581912" cy="256032"/>
+          </a:xfrm>
+          <a:prstGeom prst="rect">
+            <a:avLst/>
+          </a:prstGeom>
+          <a:noFill/>
+          <a:ln/>
+        </p:spPr>
+        <p:txBody>
+          <a:bodyPr wrap="square" rtlCol="0" anchor="ctr"/>
+          <a:lstStyle/>
+          <a:p>
+            <a:pPr algn="r" indent="0" marL="0">
+              <a:buNone/>
+            </a:pPr>
+            <a:r>
+              <a:rPr lang="en-US" sz="800" b="1" dirty="0">
+                <a:solidFill>
+                  <a:srgbClr val="0F172A"/>
+                </a:solidFill>
+                <a:latin typeface="Arial" pitchFamily="34" charset="0"/>
+                <a:ea typeface="Arial" pitchFamily="34" charset="-122"/>
+                <a:cs typeface="Arial" pitchFamily="34" charset="-120"/>
+              </a:rPr>
+              <a:t>15 Thn (Puncak 100%)</a:t>
+            </a:r>
+            <a:endParaRPr lang="en-US" sz="800" dirty="0"/>
+          </a:p>
+        </p:txBody>
+      </p:sp>
+      <p:sp>
+        <p:nvSpPr>
+          <p:cNvPr id="41" name="Text 39"/>
+          <p:cNvSpPr/>
+          <p:nvPr/>
+        </p:nvSpPr>
+        <p:spPr>
+          <a:xfrm>
+            <a:off x="4553712" y="3657600"/>
+            <a:ext cx="1463040" cy="256032"/>
+          </a:xfrm>
+          <a:prstGeom prst="rect">
+            <a:avLst/>
+          </a:prstGeom>
+          <a:noFill/>
+          <a:ln/>
+        </p:spPr>
+        <p:txBody>
+          <a:bodyPr wrap="square" rtlCol="0" anchor="ctr"/>
+          <a:lstStyle/>
+          <a:p>
+            <a:pPr indent="0" marL="0">
+              <a:buNone/>
+            </a:pPr>
+            <a:r>
+              <a:rPr lang="en-US" sz="800" dirty="0">
+                <a:solidFill>
+                  <a:srgbClr val="64748B"/>
+                </a:solidFill>
+                <a:latin typeface="Arial" pitchFamily="34" charset="0"/>
+                <a:ea typeface="Arial" pitchFamily="34" charset="-122"/>
+                <a:cs typeface="Arial" pitchFamily="34" charset="-120"/>
+              </a:rPr>
+              <a:t>Yield Panen</a:t>
+            </a:r>
+            <a:endParaRPr lang="en-US" sz="800" dirty="0"/>
+          </a:p>
+        </p:txBody>
+      </p:sp>
+      <p:sp>
+        <p:nvSpPr>
+          <p:cNvPr id="42" name="Text 40"/>
+          <p:cNvSpPr/>
+          <p:nvPr/>
+        </p:nvSpPr>
+        <p:spPr>
+          <a:xfrm>
+            <a:off x="6016752" y="3657600"/>
+            <a:ext cx="1581912" cy="256032"/>
+          </a:xfrm>
+          <a:prstGeom prst="rect">
+            <a:avLst/>
+          </a:prstGeom>
+          <a:noFill/>
+          <a:ln/>
+        </p:spPr>
+        <p:txBody>
+          <a:bodyPr wrap="square" rtlCol="0" anchor="ctr"/>
+          <a:lstStyle/>
+          <a:p>
+            <a:pPr algn="r" indent="0" marL="0">
+              <a:buNone/>
+            </a:pPr>
+            <a:r>
+              <a:rPr lang="en-US" sz="800" b="1" dirty="0">
+                <a:solidFill>
+                  <a:srgbClr val="0F172A"/>
+                </a:solidFill>
+                <a:latin typeface="Arial" pitchFamily="34" charset="0"/>
+                <a:ea typeface="Arial" pitchFamily="34" charset="-122"/>
+                <a:cs typeface="Arial" pitchFamily="34" charset="-120"/>
+              </a:rPr>
+              <a:t>20 Butir / Pohon</a:t>
+            </a:r>
+            <a:endParaRPr lang="en-US" sz="800" dirty="0"/>
+          </a:p>
+        </p:txBody>
+      </p:sp>
+      <p:sp>
+        <p:nvSpPr>
+          <p:cNvPr id="43" name="Text 41"/>
+          <p:cNvSpPr/>
+          <p:nvPr/>
+        </p:nvSpPr>
+        <p:spPr>
+          <a:xfrm>
+            <a:off x="4553712" y="3941064"/>
+            <a:ext cx="1463040" cy="256032"/>
+          </a:xfrm>
+          <a:prstGeom prst="rect">
+            <a:avLst/>
+          </a:prstGeom>
+          <a:noFill/>
+          <a:ln/>
+        </p:spPr>
+        <p:txBody>
+          <a:bodyPr wrap="square" rtlCol="0" anchor="ctr"/>
+          <a:lstStyle/>
+          <a:p>
+            <a:pPr indent="0" marL="0">
+              <a:buNone/>
+            </a:pPr>
+            <a:r>
+              <a:rPr lang="en-US" sz="800" dirty="0">
+                <a:solidFill>
+                  <a:srgbClr val="64748B"/>
+                </a:solidFill>
+                <a:latin typeface="Arial" pitchFamily="34" charset="0"/>
+                <a:ea typeface="Arial" pitchFamily="34" charset="-122"/>
+                <a:cs typeface="Arial" pitchFamily="34" charset="-120"/>
+              </a:rPr>
+              <a:t>Hasil / 3 Bulan</a:t>
+            </a:r>
+            <a:endParaRPr lang="en-US" sz="800" dirty="0"/>
+          </a:p>
+        </p:txBody>
+      </p:sp>
+      <p:sp>
+        <p:nvSpPr>
+          <p:cNvPr id="44" name="Text 42"/>
+          <p:cNvSpPr/>
+          <p:nvPr/>
+        </p:nvSpPr>
+        <p:spPr>
+          <a:xfrm>
+            <a:off x="6016752" y="3941064"/>
+            <a:ext cx="1581912" cy="256032"/>
+          </a:xfrm>
+          <a:prstGeom prst="rect">
+            <a:avLst/>
+          </a:prstGeom>
+          <a:noFill/>
+          <a:ln/>
+        </p:spPr>
+        <p:txBody>
+          <a:bodyPr wrap="square" rtlCol="0" anchor="ctr"/>
+          <a:lstStyle/>
+          <a:p>
+            <a:pPr algn="r" indent="0" marL="0">
+              <a:buNone/>
+            </a:pPr>
+            <a:r>
+              <a:rPr lang="en-US" sz="800" b="1" dirty="0">
+                <a:solidFill>
+                  <a:srgbClr val="0F172A"/>
+                </a:solidFill>
+                <a:latin typeface="Arial" pitchFamily="34" charset="0"/>
+                <a:ea typeface="Arial" pitchFamily="34" charset="-122"/>
+                <a:cs typeface="Arial" pitchFamily="34" charset="-120"/>
+              </a:rPr>
+              <a:t>2.200.000 Butir</a:t>
+            </a:r>
+            <a:endParaRPr lang="en-US" sz="800" dirty="0"/>
+          </a:p>
+        </p:txBody>
+      </p:sp>
+      <p:sp>
+        <p:nvSpPr>
+          <p:cNvPr id="45" name="Text 43"/>
+          <p:cNvSpPr/>
+          <p:nvPr/>
+        </p:nvSpPr>
+        <p:spPr>
+          <a:xfrm>
+            <a:off x="4553712" y="4224528"/>
+            <a:ext cx="1463040" cy="256032"/>
+          </a:xfrm>
+          <a:prstGeom prst="rect">
+            <a:avLst/>
+          </a:prstGeom>
+          <a:noFill/>
+          <a:ln/>
+        </p:spPr>
+        <p:txBody>
+          <a:bodyPr wrap="square" rtlCol="0" anchor="ctr"/>
+          <a:lstStyle/>
+          <a:p>
+            <a:pPr indent="0" marL="0">
+              <a:buNone/>
+            </a:pPr>
+            <a:r>
+              <a:rPr lang="en-US" sz="800" dirty="0">
+                <a:solidFill>
+                  <a:srgbClr val="64748B"/>
+                </a:solidFill>
+                <a:latin typeface="Arial" pitchFamily="34" charset="0"/>
+                <a:ea typeface="Arial" pitchFamily="34" charset="-122"/>
+                <a:cs typeface="Arial" pitchFamily="34" charset="-120"/>
+              </a:rPr>
+              <a:t>Pasokan Harian</a:t>
+            </a:r>
+            <a:endParaRPr lang="en-US" sz="800" dirty="0"/>
+          </a:p>
+        </p:txBody>
+      </p:sp>
+      <p:sp>
+        <p:nvSpPr>
+          <p:cNvPr id="46" name="Text 44"/>
+          <p:cNvSpPr/>
+          <p:nvPr/>
+        </p:nvSpPr>
+        <p:spPr>
+          <a:xfrm>
+            <a:off x="6016752" y="4224528"/>
+            <a:ext cx="1581912" cy="256032"/>
+          </a:xfrm>
+          <a:prstGeom prst="rect">
+            <a:avLst/>
+          </a:prstGeom>
+          <a:noFill/>
+          <a:ln/>
+        </p:spPr>
+        <p:txBody>
+          <a:bodyPr wrap="square" rtlCol="0" anchor="ctr"/>
+          <a:lstStyle/>
+          <a:p>
+            <a:pPr algn="r" indent="0" marL="0">
+              <a:buNone/>
+            </a:pPr>
+            <a:r>
+              <a:rPr lang="en-US" sz="800" b="1" dirty="0">
+                <a:solidFill>
+                  <a:srgbClr val="0F172A"/>
+                </a:solidFill>
+                <a:latin typeface="Arial" pitchFamily="34" charset="0"/>
+                <a:ea typeface="Arial" pitchFamily="34" charset="-122"/>
+                <a:cs typeface="Arial" pitchFamily="34" charset="-120"/>
+              </a:rPr>
+              <a:t>36.667 Butir / HK</a:t>
+            </a:r>
+            <a:endParaRPr lang="en-US" sz="800" dirty="0"/>
+          </a:p>
+        </p:txBody>
+      </p:sp>
+      <p:sp>
+        <p:nvSpPr>
+          <p:cNvPr id="47" name="Text 45"/>
+          <p:cNvSpPr/>
+          <p:nvPr/>
+        </p:nvSpPr>
+        <p:spPr>
+          <a:xfrm>
+            <a:off x="4553712" y="4507992"/>
+            <a:ext cx="1463040" cy="256032"/>
+          </a:xfrm>
+          <a:prstGeom prst="rect">
+            <a:avLst/>
+          </a:prstGeom>
+          <a:noFill/>
+          <a:ln/>
+        </p:spPr>
+        <p:txBody>
+          <a:bodyPr wrap="square" rtlCol="0" anchor="ctr"/>
+          <a:lstStyle/>
+          <a:p>
+            <a:pPr indent="0" marL="0">
+              <a:buNone/>
+            </a:pPr>
+            <a:r>
+              <a:rPr lang="en-US" sz="800" dirty="0">
+                <a:solidFill>
+                  <a:srgbClr val="64748B"/>
+                </a:solidFill>
+                <a:latin typeface="Arial" pitchFamily="34" charset="0"/>
+                <a:ea typeface="Arial" pitchFamily="34" charset="-122"/>
+                <a:cs typeface="Arial" pitchFamily="34" charset="-120"/>
+              </a:rPr>
+              <a:t>Porsi Target 10%</a:t>
+            </a:r>
+            <a:endParaRPr lang="en-US" sz="800" dirty="0"/>
+          </a:p>
+        </p:txBody>
+      </p:sp>
+      <p:sp>
+        <p:nvSpPr>
+          <p:cNvPr id="48" name="Text 46"/>
+          <p:cNvSpPr/>
+          <p:nvPr/>
+        </p:nvSpPr>
+        <p:spPr>
+          <a:xfrm>
+            <a:off x="6016752" y="4507992"/>
+            <a:ext cx="1581912" cy="256032"/>
+          </a:xfrm>
+          <a:prstGeom prst="rect">
+            <a:avLst/>
+          </a:prstGeom>
+          <a:noFill/>
+          <a:ln/>
+        </p:spPr>
+        <p:txBody>
+          <a:bodyPr wrap="square" rtlCol="0" anchor="ctr"/>
+          <a:lstStyle/>
+          <a:p>
+            <a:pPr algn="r" indent="0" marL="0">
+              <a:buNone/>
+            </a:pPr>
+            <a:r>
+              <a:rPr lang="en-US" sz="800" b="1" dirty="0">
+                <a:solidFill>
+                  <a:srgbClr val="0F172A"/>
+                </a:solidFill>
+                <a:latin typeface="Arial" pitchFamily="34" charset="0"/>
+                <a:ea typeface="Arial" pitchFamily="34" charset="-122"/>
+                <a:cs typeface="Arial" pitchFamily="34" charset="-120"/>
+              </a:rPr>
+              <a:t>91,67% (Penutup Defisit)</a:t>
+            </a:r>
+            <a:endParaRPr lang="en-US" sz="800" dirty="0"/>
+          </a:p>
+        </p:txBody>
+      </p:sp>
+      <p:sp>
+        <p:nvSpPr>
+          <p:cNvPr id="49" name="Shape 47"/>
+          <p:cNvSpPr/>
+          <p:nvPr/>
+        </p:nvSpPr>
+        <p:spPr>
+          <a:xfrm>
+            <a:off x="8010144" y="1371600"/>
+            <a:ext cx="3410712" cy="3566160"/>
+          </a:xfrm>
+          <a:prstGeom prst="roundRect">
+            <a:avLst>
+              <a:gd name="adj" fmla="val 2145"/>
+            </a:avLst>
+          </a:prstGeom>
+          <a:solidFill>
+            <a:srgbClr val="F0FDF4"/>
+          </a:solidFill>
+          <a:ln w="25400">
+            <a:solidFill>
+              <a:srgbClr val="064E3B"/>
+            </a:solidFill>
+            <a:prstDash val="solid"/>
+          </a:ln>
+        </p:spPr>
+      </p:sp>
+      <p:sp>
+        <p:nvSpPr>
+          <p:cNvPr id="50" name="Shape 48"/>
+          <p:cNvSpPr/>
+          <p:nvPr/>
+        </p:nvSpPr>
+        <p:spPr>
+          <a:xfrm>
+            <a:off x="8193024" y="1536192"/>
+            <a:ext cx="2103120" cy="256032"/>
+          </a:xfrm>
+          <a:prstGeom prst="roundRect">
+            <a:avLst>
+              <a:gd name="adj" fmla="val 21429"/>
+            </a:avLst>
+          </a:prstGeom>
+          <a:solidFill>
+            <a:srgbClr val="D1FAE5"/>
+          </a:solidFill>
+          <a:ln w="12700">
+            <a:solidFill>
+              <a:srgbClr val="D1FAE5"/>
+            </a:solidFill>
+            <a:prstDash val="solid"/>
+          </a:ln>
+        </p:spPr>
+      </p:sp>
+      <p:sp>
+        <p:nvSpPr>
+          <p:cNvPr id="51" name="Text 49"/>
+          <p:cNvSpPr/>
+          <p:nvPr/>
+        </p:nvSpPr>
+        <p:spPr>
+          <a:xfrm>
+            <a:off x="8193024" y="1536192"/>
+            <a:ext cx="2103120" cy="256032"/>
+          </a:xfrm>
+          <a:prstGeom prst="rect">
+            <a:avLst/>
+          </a:prstGeom>
+          <a:noFill/>
+          <a:ln/>
+        </p:spPr>
+        <p:txBody>
+          <a:bodyPr wrap="square" rtlCol="0" anchor="ctr"/>
+          <a:lstStyle/>
+          <a:p>
+            <a:pPr algn="ctr" indent="0" marL="0">
+              <a:buNone/>
+            </a:pPr>
+            <a:r>
+              <a:rPr lang="en-US" sz="800" b="1" dirty="0">
+                <a:solidFill>
+                  <a:srgbClr val="065F46"/>
+                </a:solidFill>
+                <a:latin typeface="Arial" pitchFamily="34" charset="0"/>
+                <a:ea typeface="Arial" pitchFamily="34" charset="-122"/>
+                <a:cs typeface="Arial" pitchFamily="34" charset="-120"/>
+              </a:rPr>
+              <a:t>TOTAL PORTOFOLIO MANDIRI</a:t>
+            </a:r>
+            <a:endParaRPr lang="en-US" sz="800" dirty="0"/>
+          </a:p>
+        </p:txBody>
+      </p:sp>
+      <p:sp>
+        <p:nvSpPr>
+          <p:cNvPr id="52" name="Text 50"/>
+          <p:cNvSpPr/>
+          <p:nvPr/>
+        </p:nvSpPr>
+        <p:spPr>
+          <a:xfrm>
+            <a:off x="8193024" y="1874520"/>
+            <a:ext cx="3044952" cy="365760"/>
+          </a:xfrm>
+          <a:prstGeom prst="rect">
+            <a:avLst/>
+          </a:prstGeom>
+          <a:noFill/>
+          <a:ln/>
+        </p:spPr>
+        <p:txBody>
+          <a:bodyPr wrap="square" rtlCol="0" anchor="ctr"/>
+          <a:lstStyle/>
+          <a:p>
+            <a:pPr indent="0" marL="0">
+              <a:buNone/>
+            </a:pPr>
+            <a:r>
+              <a:rPr lang="en-US" sz="1200" b="1" dirty="0">
+                <a:solidFill>
+                  <a:srgbClr val="0F172A"/>
+                </a:solidFill>
+                <a:latin typeface="Arial" pitchFamily="34" charset="0"/>
+                <a:ea typeface="Arial" pitchFamily="34" charset="-122"/>
+                <a:cs typeface="Arial" pitchFamily="34" charset="-120"/>
+              </a:rPr>
+              <a:t>Total Portofolio (2 Blok)</a:t>
+            </a:r>
+            <a:endParaRPr lang="en-US" sz="1200" dirty="0"/>
+          </a:p>
+        </p:txBody>
+      </p:sp>
+      <p:sp>
+        <p:nvSpPr>
+          <p:cNvPr id="53" name="Text 51"/>
+          <p:cNvSpPr/>
+          <p:nvPr/>
+        </p:nvSpPr>
+        <p:spPr>
+          <a:xfrm>
+            <a:off x="8193024" y="2240280"/>
+            <a:ext cx="1463040" cy="256032"/>
+          </a:xfrm>
+          <a:prstGeom prst="rect">
+            <a:avLst/>
+          </a:prstGeom>
+          <a:noFill/>
+          <a:ln/>
+        </p:spPr>
+        <p:txBody>
+          <a:bodyPr wrap="square" rtlCol="0" anchor="ctr"/>
+          <a:lstStyle/>
+          <a:p>
+            <a:pPr indent="0" marL="0">
+              <a:buNone/>
+            </a:pPr>
+            <a:r>
+              <a:rPr lang="en-US" sz="800" dirty="0">
+                <a:solidFill>
+                  <a:srgbClr val="64748B"/>
+                </a:solidFill>
+                <a:latin typeface="Arial" pitchFamily="34" charset="0"/>
+                <a:ea typeface="Arial" pitchFamily="34" charset="-122"/>
+                <a:cs typeface="Arial" pitchFamily="34" charset="-120"/>
+              </a:rPr>
+              <a:t>Status Portofolio</a:t>
+            </a:r>
+            <a:endParaRPr lang="en-US" sz="800" dirty="0"/>
+          </a:p>
+        </p:txBody>
+      </p:sp>
+      <p:sp>
+        <p:nvSpPr>
+          <p:cNvPr id="54" name="Text 52"/>
+          <p:cNvSpPr/>
+          <p:nvPr/>
+        </p:nvSpPr>
+        <p:spPr>
+          <a:xfrm>
+            <a:off x="9656064" y="2240280"/>
+            <a:ext cx="1581912" cy="256032"/>
+          </a:xfrm>
+          <a:prstGeom prst="rect">
+            <a:avLst/>
+          </a:prstGeom>
+          <a:noFill/>
+          <a:ln/>
+        </p:spPr>
+        <p:txBody>
+          <a:bodyPr wrap="square" rtlCol="0" anchor="ctr"/>
+          <a:lstStyle/>
+          <a:p>
+            <a:pPr algn="r" indent="0" marL="0">
+              <a:buNone/>
+            </a:pPr>
+            <a:r>
+              <a:rPr lang="en-US" sz="800" b="1" dirty="0">
+                <a:solidFill>
+                  <a:srgbClr val="0F172A"/>
+                </a:solidFill>
+                <a:latin typeface="Arial" pitchFamily="34" charset="0"/>
+                <a:ea typeface="Arial" pitchFamily="34" charset="-122"/>
+                <a:cs typeface="Arial" pitchFamily="34" charset="-120"/>
+              </a:rPr>
+              <a:t>Target 10% Terpenuhi Penuh</a:t>
+            </a:r>
+            <a:endParaRPr lang="en-US" sz="800" dirty="0"/>
+          </a:p>
+        </p:txBody>
+      </p:sp>
+      <p:sp>
+        <p:nvSpPr>
+          <p:cNvPr id="55" name="Text 53"/>
+          <p:cNvSpPr/>
+          <p:nvPr/>
+        </p:nvSpPr>
+        <p:spPr>
+          <a:xfrm>
+            <a:off x="8193024" y="2523744"/>
+            <a:ext cx="1463040" cy="256032"/>
+          </a:xfrm>
+          <a:prstGeom prst="rect">
+            <a:avLst/>
+          </a:prstGeom>
+          <a:noFill/>
+          <a:ln/>
+        </p:spPr>
+        <p:txBody>
+          <a:bodyPr wrap="square" rtlCol="0" anchor="ctr"/>
+          <a:lstStyle/>
+          <a:p>
+            <a:pPr indent="0" marL="0">
+              <a:buNone/>
+            </a:pPr>
+            <a:r>
+              <a:rPr lang="en-US" sz="800" dirty="0">
+                <a:solidFill>
+                  <a:srgbClr val="64748B"/>
+                </a:solidFill>
+                <a:latin typeface="Arial" pitchFamily="34" charset="0"/>
+                <a:ea typeface="Arial" pitchFamily="34" charset="-122"/>
+                <a:cs typeface="Arial" pitchFamily="34" charset="-120"/>
+              </a:rPr>
+              <a:t>Total Luas Lahan</a:t>
+            </a:r>
+            <a:endParaRPr lang="en-US" sz="800" dirty="0"/>
+          </a:p>
+        </p:txBody>
+      </p:sp>
+      <p:sp>
+        <p:nvSpPr>
+          <p:cNvPr id="56" name="Text 54"/>
+          <p:cNvSpPr/>
+          <p:nvPr/>
+        </p:nvSpPr>
+        <p:spPr>
+          <a:xfrm>
+            <a:off x="9656064" y="2523744"/>
+            <a:ext cx="1581912" cy="256032"/>
+          </a:xfrm>
+          <a:prstGeom prst="rect">
+            <a:avLst/>
+          </a:prstGeom>
+          <a:noFill/>
+          <a:ln/>
+        </p:spPr>
+        <p:txBody>
+          <a:bodyPr wrap="square" rtlCol="0" anchor="ctr"/>
+          <a:lstStyle/>
+          <a:p>
+            <a:pPr algn="r" indent="0" marL="0">
+              <a:buNone/>
+            </a:pPr>
+            <a:r>
+              <a:rPr lang="en-US" sz="800" b="1" dirty="0">
+                <a:solidFill>
+                  <a:srgbClr val="0F172A"/>
+                </a:solidFill>
+                <a:latin typeface="Arial" pitchFamily="34" charset="0"/>
+                <a:ea typeface="Arial" pitchFamily="34" charset="-122"/>
+                <a:cs typeface="Arial" pitchFamily="34" charset="-120"/>
+              </a:rPr>
+              <a:t>2.400 Ha</a:t>
+            </a:r>
+            <a:endParaRPr lang="en-US" sz="800" dirty="0"/>
+          </a:p>
+        </p:txBody>
+      </p:sp>
+      <p:sp>
+        <p:nvSpPr>
+          <p:cNvPr id="57" name="Text 55"/>
+          <p:cNvSpPr/>
+          <p:nvPr/>
+        </p:nvSpPr>
+        <p:spPr>
+          <a:xfrm>
+            <a:off x="8193024" y="2807208"/>
+            <a:ext cx="1463040" cy="256032"/>
+          </a:xfrm>
+          <a:prstGeom prst="rect">
+            <a:avLst/>
+          </a:prstGeom>
+          <a:noFill/>
+          <a:ln/>
+        </p:spPr>
+        <p:txBody>
+          <a:bodyPr wrap="square" rtlCol="0" anchor="ctr"/>
+          <a:lstStyle/>
+          <a:p>
+            <a:pPr indent="0" marL="0">
+              <a:buNone/>
+            </a:pPr>
+            <a:r>
+              <a:rPr lang="en-US" sz="800" dirty="0">
+                <a:solidFill>
+                  <a:srgbClr val="64748B"/>
+                </a:solidFill>
+                <a:latin typeface="Arial" pitchFamily="34" charset="0"/>
+                <a:ea typeface="Arial" pitchFamily="34" charset="-122"/>
+                <a:cs typeface="Arial" pitchFamily="34" charset="-120"/>
+              </a:rPr>
+              <a:t>Kerapatan Rata-rata</a:t>
+            </a:r>
+            <a:endParaRPr lang="en-US" sz="800" dirty="0"/>
+          </a:p>
+        </p:txBody>
+      </p:sp>
+      <p:sp>
+        <p:nvSpPr>
+          <p:cNvPr id="58" name="Text 56"/>
+          <p:cNvSpPr/>
+          <p:nvPr/>
+        </p:nvSpPr>
+        <p:spPr>
+          <a:xfrm>
+            <a:off x="9656064" y="2807208"/>
+            <a:ext cx="1581912" cy="256032"/>
+          </a:xfrm>
+          <a:prstGeom prst="rect">
+            <a:avLst/>
+          </a:prstGeom>
+          <a:noFill/>
+          <a:ln/>
+        </p:spPr>
+        <p:txBody>
+          <a:bodyPr wrap="square" rtlCol="0" anchor="ctr"/>
+          <a:lstStyle/>
+          <a:p>
+            <a:pPr algn="r" indent="0" marL="0">
+              <a:buNone/>
+            </a:pPr>
+            <a:r>
+              <a:rPr lang="en-US" sz="800" b="1" dirty="0">
+                <a:solidFill>
+                  <a:srgbClr val="0F172A"/>
+                </a:solidFill>
+                <a:latin typeface="Arial" pitchFamily="34" charset="0"/>
+                <a:ea typeface="Arial" pitchFamily="34" charset="-122"/>
+                <a:cs typeface="Arial" pitchFamily="34" charset="-120"/>
+              </a:rPr>
+              <a:t>50 Pohon / Ha</a:t>
+            </a:r>
+            <a:endParaRPr lang="en-US" sz="800" dirty="0"/>
+          </a:p>
+        </p:txBody>
+      </p:sp>
+      <p:sp>
+        <p:nvSpPr>
+          <p:cNvPr id="59" name="Text 57"/>
+          <p:cNvSpPr/>
+          <p:nvPr/>
+        </p:nvSpPr>
+        <p:spPr>
+          <a:xfrm>
+            <a:off x="8193024" y="3090672"/>
+            <a:ext cx="1463040" cy="256032"/>
+          </a:xfrm>
+          <a:prstGeom prst="rect">
+            <a:avLst/>
+          </a:prstGeom>
+          <a:noFill/>
+          <a:ln/>
+        </p:spPr>
+        <p:txBody>
+          <a:bodyPr wrap="square" rtlCol="0" anchor="ctr"/>
+          <a:lstStyle/>
+          <a:p>
+            <a:pPr indent="0" marL="0">
+              <a:buNone/>
+            </a:pPr>
+            <a:r>
+              <a:rPr lang="en-US" sz="800" dirty="0">
+                <a:solidFill>
+                  <a:srgbClr val="64748B"/>
+                </a:solidFill>
+                <a:latin typeface="Arial" pitchFamily="34" charset="0"/>
+                <a:ea typeface="Arial" pitchFamily="34" charset="-122"/>
+                <a:cs typeface="Arial" pitchFamily="34" charset="-120"/>
+              </a:rPr>
+              <a:t>Total Populasi Pohon</a:t>
+            </a:r>
+            <a:endParaRPr lang="en-US" sz="800" dirty="0"/>
+          </a:p>
+        </p:txBody>
+      </p:sp>
+      <p:sp>
+        <p:nvSpPr>
+          <p:cNvPr id="60" name="Text 58"/>
+          <p:cNvSpPr/>
+          <p:nvPr/>
+        </p:nvSpPr>
+        <p:spPr>
+          <a:xfrm>
+            <a:off x="9656064" y="3090672"/>
+            <a:ext cx="1581912" cy="256032"/>
+          </a:xfrm>
+          <a:prstGeom prst="rect">
+            <a:avLst/>
+          </a:prstGeom>
+          <a:noFill/>
+          <a:ln/>
+        </p:spPr>
+        <p:txBody>
+          <a:bodyPr wrap="square" rtlCol="0" anchor="ctr"/>
+          <a:lstStyle/>
+          <a:p>
+            <a:pPr algn="r" indent="0" marL="0">
+              <a:buNone/>
+            </a:pPr>
+            <a:r>
+              <a:rPr lang="en-US" sz="800" b="1" dirty="0">
+                <a:solidFill>
+                  <a:srgbClr val="0F172A"/>
+                </a:solidFill>
+                <a:latin typeface="Arial" pitchFamily="34" charset="0"/>
+                <a:ea typeface="Arial" pitchFamily="34" charset="-122"/>
+                <a:cs typeface="Arial" pitchFamily="34" charset="-120"/>
+              </a:rPr>
+              <a:t>120.000 Pohon</a:t>
+            </a:r>
+            <a:endParaRPr lang="en-US" sz="800" dirty="0"/>
+          </a:p>
+        </p:txBody>
+      </p:sp>
+      <p:sp>
+        <p:nvSpPr>
+          <p:cNvPr id="61" name="Text 59"/>
+          <p:cNvSpPr/>
+          <p:nvPr/>
+        </p:nvSpPr>
+        <p:spPr>
+          <a:xfrm>
+            <a:off x="8193024" y="3374136"/>
+            <a:ext cx="1463040" cy="256032"/>
+          </a:xfrm>
+          <a:prstGeom prst="rect">
+            <a:avLst/>
+          </a:prstGeom>
+          <a:noFill/>
+          <a:ln/>
+        </p:spPr>
+        <p:txBody>
+          <a:bodyPr wrap="square" rtlCol="0" anchor="ctr"/>
+          <a:lstStyle/>
+          <a:p>
+            <a:pPr indent="0" marL="0">
+              <a:buNone/>
+            </a:pPr>
+            <a:r>
+              <a:rPr lang="en-US" sz="800" dirty="0">
+                <a:solidFill>
+                  <a:srgbClr val="64748B"/>
+                </a:solidFill>
+                <a:latin typeface="Arial" pitchFamily="34" charset="0"/>
+                <a:ea typeface="Arial" pitchFamily="34" charset="-122"/>
+                <a:cs typeface="Arial" pitchFamily="34" charset="-120"/>
+              </a:rPr>
+              <a:t>Usia Rata-rata</a:t>
+            </a:r>
+            <a:endParaRPr lang="en-US" sz="800" dirty="0"/>
+          </a:p>
+        </p:txBody>
+      </p:sp>
+      <p:sp>
+        <p:nvSpPr>
+          <p:cNvPr id="62" name="Text 60"/>
+          <p:cNvSpPr/>
+          <p:nvPr/>
+        </p:nvSpPr>
+        <p:spPr>
+          <a:xfrm>
+            <a:off x="9656064" y="3374136"/>
+            <a:ext cx="1581912" cy="256032"/>
+          </a:xfrm>
+          <a:prstGeom prst="rect">
+            <a:avLst/>
+          </a:prstGeom>
+          <a:noFill/>
+          <a:ln/>
+        </p:spPr>
+        <p:txBody>
+          <a:bodyPr wrap="square" rtlCol="0" anchor="ctr"/>
+          <a:lstStyle/>
+          <a:p>
+            <a:pPr algn="r" indent="0" marL="0">
+              <a:buNone/>
+            </a:pPr>
+            <a:r>
+              <a:rPr lang="en-US" sz="800" b="1" dirty="0">
+                <a:solidFill>
+                  <a:srgbClr val="0F172A"/>
+                </a:solidFill>
+                <a:latin typeface="Arial" pitchFamily="34" charset="0"/>
+                <a:ea typeface="Arial" pitchFamily="34" charset="-122"/>
+                <a:cs typeface="Arial" pitchFamily="34" charset="-120"/>
+              </a:rPr>
+              <a:t>15 Thn (Puncak 100%)</a:t>
+            </a:r>
+            <a:endParaRPr lang="en-US" sz="800" dirty="0"/>
+          </a:p>
+        </p:txBody>
+      </p:sp>
+      <p:sp>
+        <p:nvSpPr>
+          <p:cNvPr id="63" name="Text 61"/>
+          <p:cNvSpPr/>
+          <p:nvPr/>
+        </p:nvSpPr>
+        <p:spPr>
+          <a:xfrm>
+            <a:off x="8193024" y="3657600"/>
+            <a:ext cx="1463040" cy="256032"/>
+          </a:xfrm>
+          <a:prstGeom prst="rect">
+            <a:avLst/>
+          </a:prstGeom>
+          <a:noFill/>
+          <a:ln/>
+        </p:spPr>
+        <p:txBody>
+          <a:bodyPr wrap="square" rtlCol="0" anchor="ctr"/>
+          <a:lstStyle/>
+          <a:p>
+            <a:pPr indent="0" marL="0">
+              <a:buNone/>
+            </a:pPr>
+            <a:r>
+              <a:rPr lang="en-US" sz="800" dirty="0">
+                <a:solidFill>
+                  <a:srgbClr val="64748B"/>
+                </a:solidFill>
+                <a:latin typeface="Arial" pitchFamily="34" charset="0"/>
+                <a:ea typeface="Arial" pitchFamily="34" charset="-122"/>
+                <a:cs typeface="Arial" pitchFamily="34" charset="-120"/>
+              </a:rPr>
+              <a:t>Yield Panen</a:t>
+            </a:r>
+            <a:endParaRPr lang="en-US" sz="800" dirty="0"/>
+          </a:p>
+        </p:txBody>
+      </p:sp>
+      <p:sp>
+        <p:nvSpPr>
+          <p:cNvPr id="64" name="Text 62"/>
+          <p:cNvSpPr/>
+          <p:nvPr/>
+        </p:nvSpPr>
+        <p:spPr>
+          <a:xfrm>
+            <a:off x="9656064" y="3657600"/>
+            <a:ext cx="1581912" cy="256032"/>
+          </a:xfrm>
+          <a:prstGeom prst="rect">
+            <a:avLst/>
+          </a:prstGeom>
+          <a:noFill/>
+          <a:ln/>
+        </p:spPr>
+        <p:txBody>
+          <a:bodyPr wrap="square" rtlCol="0" anchor="ctr"/>
+          <a:lstStyle/>
+          <a:p>
+            <a:pPr algn="r" indent="0" marL="0">
+              <a:buNone/>
+            </a:pPr>
+            <a:r>
+              <a:rPr lang="en-US" sz="800" b="1" dirty="0">
+                <a:solidFill>
+                  <a:srgbClr val="0F172A"/>
+                </a:solidFill>
+                <a:latin typeface="Arial" pitchFamily="34" charset="0"/>
+                <a:ea typeface="Arial" pitchFamily="34" charset="-122"/>
+                <a:cs typeface="Arial" pitchFamily="34" charset="-120"/>
+              </a:rPr>
+              <a:t>20 Butir / Pohon</a:t>
+            </a:r>
+            <a:endParaRPr lang="en-US" sz="800" dirty="0"/>
+          </a:p>
+        </p:txBody>
+      </p:sp>
+      <p:sp>
+        <p:nvSpPr>
+          <p:cNvPr id="65" name="Text 63"/>
+          <p:cNvSpPr/>
+          <p:nvPr/>
+        </p:nvSpPr>
+        <p:spPr>
+          <a:xfrm>
+            <a:off x="8193024" y="3941064"/>
+            <a:ext cx="1463040" cy="256032"/>
+          </a:xfrm>
+          <a:prstGeom prst="rect">
+            <a:avLst/>
+          </a:prstGeom>
+          <a:noFill/>
+          <a:ln/>
+        </p:spPr>
+        <p:txBody>
+          <a:bodyPr wrap="square" rtlCol="0" anchor="ctr"/>
+          <a:lstStyle/>
+          <a:p>
+            <a:pPr indent="0" marL="0">
+              <a:buNone/>
+            </a:pPr>
+            <a:r>
+              <a:rPr lang="en-US" sz="800" dirty="0">
+                <a:solidFill>
+                  <a:srgbClr val="64748B"/>
+                </a:solidFill>
+                <a:latin typeface="Arial" pitchFamily="34" charset="0"/>
+                <a:ea typeface="Arial" pitchFamily="34" charset="-122"/>
+                <a:cs typeface="Arial" pitchFamily="34" charset="-120"/>
+              </a:rPr>
+              <a:t>Hasil / 3 Bulan</a:t>
+            </a:r>
+            <a:endParaRPr lang="en-US" sz="800" dirty="0"/>
+          </a:p>
+        </p:txBody>
+      </p:sp>
+      <p:sp>
+        <p:nvSpPr>
+          <p:cNvPr id="66" name="Text 64"/>
+          <p:cNvSpPr/>
+          <p:nvPr/>
+        </p:nvSpPr>
+        <p:spPr>
+          <a:xfrm>
+            <a:off x="9656064" y="3941064"/>
+            <a:ext cx="1581912" cy="256032"/>
+          </a:xfrm>
+          <a:prstGeom prst="rect">
+            <a:avLst/>
+          </a:prstGeom>
+          <a:noFill/>
+          <a:ln/>
+        </p:spPr>
+        <p:txBody>
+          <a:bodyPr wrap="square" rtlCol="0" anchor="ctr"/>
+          <a:lstStyle/>
+          <a:p>
+            <a:pPr algn="r" indent="0" marL="0">
+              <a:buNone/>
+            </a:pPr>
+            <a:r>
+              <a:rPr lang="en-US" sz="800" b="1" dirty="0">
+                <a:solidFill>
+                  <a:srgbClr val="0F172A"/>
+                </a:solidFill>
+                <a:latin typeface="Arial" pitchFamily="34" charset="0"/>
+                <a:ea typeface="Arial" pitchFamily="34" charset="-122"/>
+                <a:cs typeface="Arial" pitchFamily="34" charset="-120"/>
+              </a:rPr>
+              <a:t>2.400.000 Butir</a:t>
+            </a:r>
+            <a:endParaRPr lang="en-US" sz="800" dirty="0"/>
+          </a:p>
+        </p:txBody>
+      </p:sp>
+      <p:sp>
+        <p:nvSpPr>
+          <p:cNvPr id="67" name="Text 65"/>
+          <p:cNvSpPr/>
+          <p:nvPr/>
+        </p:nvSpPr>
+        <p:spPr>
+          <a:xfrm>
+            <a:off x="8193024" y="4224528"/>
+            <a:ext cx="1463040" cy="256032"/>
+          </a:xfrm>
+          <a:prstGeom prst="rect">
+            <a:avLst/>
+          </a:prstGeom>
+          <a:noFill/>
+          <a:ln/>
+        </p:spPr>
+        <p:txBody>
+          <a:bodyPr wrap="square" rtlCol="0" anchor="ctr"/>
+          <a:lstStyle/>
+          <a:p>
+            <a:pPr indent="0" marL="0">
+              <a:buNone/>
+            </a:pPr>
+            <a:r>
+              <a:rPr lang="en-US" sz="800" dirty="0">
+                <a:solidFill>
+                  <a:srgbClr val="64748B"/>
+                </a:solidFill>
+                <a:latin typeface="Arial" pitchFamily="34" charset="0"/>
+                <a:ea typeface="Arial" pitchFamily="34" charset="-122"/>
+                <a:cs typeface="Arial" pitchFamily="34" charset="-120"/>
+              </a:rPr>
+              <a:t>Pasokan Harian</a:t>
+            </a:r>
+            <a:endParaRPr lang="en-US" sz="800" dirty="0"/>
+          </a:p>
+        </p:txBody>
+      </p:sp>
+      <p:sp>
+        <p:nvSpPr>
+          <p:cNvPr id="68" name="Text 66"/>
+          <p:cNvSpPr/>
+          <p:nvPr/>
+        </p:nvSpPr>
+        <p:spPr>
+          <a:xfrm>
+            <a:off x="9656064" y="4224528"/>
+            <a:ext cx="1581912" cy="256032"/>
+          </a:xfrm>
+          <a:prstGeom prst="rect">
+            <a:avLst/>
+          </a:prstGeom>
+          <a:noFill/>
+          <a:ln/>
+        </p:spPr>
+        <p:txBody>
+          <a:bodyPr wrap="square" rtlCol="0" anchor="ctr"/>
+          <a:lstStyle/>
+          <a:p>
+            <a:pPr algn="r" indent="0" marL="0">
+              <a:buNone/>
+            </a:pPr>
+            <a:r>
+              <a:rPr lang="en-US" sz="800" b="1" dirty="0">
+                <a:solidFill>
+                  <a:srgbClr val="0F172A"/>
+                </a:solidFill>
+                <a:latin typeface="Arial" pitchFamily="34" charset="0"/>
+                <a:ea typeface="Arial" pitchFamily="34" charset="-122"/>
+                <a:cs typeface="Arial" pitchFamily="34" charset="-120"/>
+              </a:rPr>
+              <a:t>40.000 Butir / HK</a:t>
+            </a:r>
+            <a:endParaRPr lang="en-US" sz="800" dirty="0"/>
+          </a:p>
+        </p:txBody>
+      </p:sp>
+      <p:sp>
+        <p:nvSpPr>
+          <p:cNvPr id="69" name="Text 67"/>
+          <p:cNvSpPr/>
+          <p:nvPr/>
+        </p:nvSpPr>
+        <p:spPr>
+          <a:xfrm>
+            <a:off x="8193024" y="4507992"/>
+            <a:ext cx="1463040" cy="256032"/>
+          </a:xfrm>
+          <a:prstGeom prst="rect">
+            <a:avLst/>
+          </a:prstGeom>
+          <a:noFill/>
+          <a:ln/>
+        </p:spPr>
+        <p:txBody>
+          <a:bodyPr wrap="square" rtlCol="0" anchor="ctr"/>
+          <a:lstStyle/>
+          <a:p>
+            <a:pPr indent="0" marL="0">
+              <a:buNone/>
+            </a:pPr>
+            <a:r>
+              <a:rPr lang="en-US" sz="800" dirty="0">
+                <a:solidFill>
+                  <a:srgbClr val="64748B"/>
+                </a:solidFill>
+                <a:latin typeface="Arial" pitchFamily="34" charset="0"/>
+                <a:ea typeface="Arial" pitchFamily="34" charset="-122"/>
+                <a:cs typeface="Arial" pitchFamily="34" charset="-120"/>
+              </a:rPr>
+              <a:t>Porsi Target 10%</a:t>
+            </a:r>
+            <a:endParaRPr lang="en-US" sz="800" dirty="0"/>
+          </a:p>
+        </p:txBody>
+      </p:sp>
+      <p:sp>
+        <p:nvSpPr>
+          <p:cNvPr id="70" name="Text 68"/>
+          <p:cNvSpPr/>
+          <p:nvPr/>
+        </p:nvSpPr>
+        <p:spPr>
+          <a:xfrm>
+            <a:off x="9656064" y="4507992"/>
+            <a:ext cx="1581912" cy="256032"/>
+          </a:xfrm>
+          <a:prstGeom prst="rect">
+            <a:avLst/>
+          </a:prstGeom>
+          <a:noFill/>
+          <a:ln/>
+        </p:spPr>
+        <p:txBody>
+          <a:bodyPr wrap="square" rtlCol="0" anchor="ctr"/>
+          <a:lstStyle/>
+          <a:p>
+            <a:pPr algn="r" indent="0" marL="0">
+              <a:buNone/>
+            </a:pPr>
+            <a:r>
+              <a:rPr lang="en-US" sz="800" b="1" dirty="0">
+                <a:solidFill>
+                  <a:srgbClr val="0F172A"/>
+                </a:solidFill>
+                <a:latin typeface="Arial" pitchFamily="34" charset="0"/>
+                <a:ea typeface="Arial" pitchFamily="34" charset="-122"/>
+                <a:cs typeface="Arial" pitchFamily="34" charset="-120"/>
+              </a:rPr>
+              <a:t>100,00% (TUNTAS)</a:t>
+            </a:r>
+            <a:endParaRPr lang="en-US" sz="800" dirty="0"/>
+          </a:p>
+        </p:txBody>
+      </p:sp>
+      <p:sp>
+        <p:nvSpPr>
+          <p:cNvPr id="71" name="Shape 69"/>
+          <p:cNvSpPr/>
+          <p:nvPr/>
+        </p:nvSpPr>
+        <p:spPr>
+          <a:xfrm>
+            <a:off x="731520" y="5074920"/>
+            <a:ext cx="10698480" cy="1143000"/>
+          </a:xfrm>
+          <a:prstGeom prst="roundRect">
+            <a:avLst>
+              <a:gd name="adj" fmla="val 6400"/>
+            </a:avLst>
+          </a:prstGeom>
+          <a:solidFill>
+            <a:srgbClr val="EFF6FF"/>
+          </a:solidFill>
+          <a:ln w="19050">
+            <a:solidFill>
+              <a:srgbClr val="93C5FD"/>
+            </a:solidFill>
+            <a:prstDash val="solid"/>
+          </a:ln>
+        </p:spPr>
+      </p:sp>
+      <p:sp>
+        <p:nvSpPr>
+          <p:cNvPr id="72" name="Text 70"/>
+          <p:cNvSpPr/>
+          <p:nvPr/>
+        </p:nvSpPr>
+        <p:spPr>
+          <a:xfrm>
+            <a:off x="1005840" y="5166360"/>
+            <a:ext cx="10149840" cy="960120"/>
+          </a:xfrm>
+          <a:prstGeom prst="rect">
+            <a:avLst/>
+          </a:prstGeom>
+          <a:noFill/>
+          <a:ln/>
+        </p:spPr>
+        <p:txBody>
+          <a:bodyPr wrap="square" rtlCol="0" anchor="ctr"/>
+          <a:lstStyle/>
+          <a:p>
+            <a:pPr indent="0" marL="0">
+              <a:buNone/>
+            </a:pPr>
+            <a:r>
+              <a:rPr lang="en-US" sz="1000" b="1" dirty="0">
+                <a:solidFill>
+                  <a:srgbClr val="1D4ED8"/>
+                </a:solidFill>
+                <a:latin typeface="Arial" pitchFamily="34" charset="0"/>
+                <a:ea typeface="Arial" pitchFamily="34" charset="-122"/>
+                <a:cs typeface="Arial" pitchFamily="34" charset="-120"/>
+              </a:rPr>
+              <a:t>KOMPARASI STRATEGIS (DENGAN BLOK 2 VS TANPA BLOK 2):
+</a:t>
+            </a:r>
+            <a:pPr indent="0" marL="0">
+              <a:buNone/>
+            </a:pPr>
+            <a:r>
+              <a:rPr lang="en-US" sz="850" b="1" dirty="0">
+                <a:solidFill>
+                  <a:srgbClr val="0F172A"/>
+                </a:solidFill>
+                <a:latin typeface="Arial" pitchFamily="34" charset="0"/>
+                <a:ea typeface="Arial" pitchFamily="34" charset="-122"/>
+                <a:cs typeface="Arial" pitchFamily="34" charset="-120"/>
+              </a:rPr>
+              <a:t>• Skenario 3 Blok (Dengan Deal Binjeita 135 Ha @ 58 pohn/Ha): </a:t>
+            </a:r>
+            <a:pPr indent="0" marL="0">
+              <a:buNone/>
+            </a:pPr>
+            <a:r>
+              <a:rPr lang="en-US" sz="850" dirty="0">
+                <a:solidFill>
+                  <a:srgbClr val="334155"/>
+                </a:solidFill>
+                <a:latin typeface="Arial" pitchFamily="34" charset="0"/>
+                <a:ea typeface="Arial" pitchFamily="34" charset="-122"/>
+                <a:cs typeface="Arial" pitchFamily="34" charset="-120"/>
+              </a:rPr>
+              <a:t>Kebutuhan lahan baru 2.044 Ha (Total portofolio 2.379 Ha / 120.030 pohon menghasilkan 2.400.600 butir).
+</a:t>
+            </a:r>
+            <a:pPr indent="0" marL="0">
+              <a:buNone/>
+            </a:pPr>
+            <a:r>
+              <a:rPr lang="en-US" sz="850" b="1" dirty="0">
+                <a:solidFill>
+                  <a:srgbClr val="0F172A"/>
+                </a:solidFill>
+                <a:latin typeface="Arial" pitchFamily="34" charset="0"/>
+                <a:ea typeface="Arial" pitchFamily="34" charset="-122"/>
+                <a:cs typeface="Arial" pitchFamily="34" charset="-120"/>
+              </a:rPr>
+              <a:t>• Skenario 2 Blok (Tanpa Deal Binjeita / Murni Blok 1 + Lahan Baru): </a:t>
+            </a:r>
+            <a:pPr indent="0" marL="0">
+              <a:buNone/>
+            </a:pPr>
+            <a:r>
+              <a:rPr lang="en-US" sz="850" dirty="0">
+                <a:solidFill>
+                  <a:srgbClr val="334155"/>
+                </a:solidFill>
+                <a:latin typeface="Arial" pitchFamily="34" charset="0"/>
+                <a:ea typeface="Arial" pitchFamily="34" charset="-122"/>
+                <a:cs typeface="Arial" pitchFamily="34" charset="-120"/>
+              </a:rPr>
+              <a:t>Kebutuhan lahan baru bertambah 156 Ha menjadi 2.200 Ha (Total portofolio 2.400 Ha / 120.000 pohon menghasilkan 2.400.000 butir).
+</a:t>
+            </a:r>
+            <a:pPr indent="0" marL="0">
+              <a:buNone/>
+            </a:pPr>
+            <a:r>
+              <a:rPr lang="en-US" sz="850" b="1" i="1" dirty="0">
+                <a:solidFill>
+                  <a:srgbClr val="15803D"/>
+                </a:solidFill>
+                <a:latin typeface="Arial" pitchFamily="34" charset="0"/>
+                <a:ea typeface="Arial" pitchFamily="34" charset="-122"/>
+                <a:cs typeface="Arial" pitchFamily="34" charset="-120"/>
+              </a:rPr>
+              <a:t>Kedua skenario sama-sama mencapai 100% target pasokan kebun mandiri (40.000 butir/HK).</a:t>
+            </a:r>
+            <a:endParaRPr lang="en-US" sz="1000" dirty="0"/>
+          </a:p>
+        </p:txBody>
+      </p:sp>
+      <p:sp>
+        <p:nvSpPr>
+          <p:cNvPr id="73" name="Text 71"/>
+          <p:cNvSpPr/>
+          <p:nvPr/>
+        </p:nvSpPr>
+        <p:spPr>
+          <a:xfrm>
+            <a:off x="731520" y="6400800"/>
+            <a:ext cx="7772400" cy="274320"/>
+          </a:xfrm>
+          <a:prstGeom prst="rect">
+            <a:avLst/>
+          </a:prstGeom>
+          <a:noFill/>
+          <a:ln/>
+        </p:spPr>
+        <p:txBody>
+          <a:bodyPr wrap="square" rtlCol="0" anchor="ctr"/>
+          <a:lstStyle/>
+          <a:p>
+            <a:pPr indent="0" marL="0">
+              <a:buNone/>
+            </a:pPr>
+            <a:r>
+              <a:rPr lang="en-US" sz="850" b="1" dirty="0">
+                <a:solidFill>
+                  <a:srgbClr val="64748B"/>
+                </a:solidFill>
+                <a:latin typeface="Arial" pitchFamily="34" charset="0"/>
+                <a:ea typeface="Arial" pitchFamily="34" charset="-122"/>
+                <a:cs typeface="Arial" pitchFamily="34" charset="-120"/>
+              </a:rPr>
+              <a:t>PERKEBUNAN TMC (MEMBER OF RAI)</a:t>
+            </a:r>
+            <a:endParaRPr lang="en-US" sz="850" dirty="0"/>
+          </a:p>
+        </p:txBody>
+      </p:sp>
+      <p:sp>
+        <p:nvSpPr>
+          <p:cNvPr id="74" name="Text 72"/>
+          <p:cNvSpPr/>
+          <p:nvPr/>
+        </p:nvSpPr>
+        <p:spPr>
+          <a:xfrm>
+            <a:off x="8686800" y="6400800"/>
+            <a:ext cx="2743200" cy="274320"/>
+          </a:xfrm>
+          <a:prstGeom prst="rect">
+            <a:avLst/>
+          </a:prstGeom>
+          <a:noFill/>
+          <a:ln/>
+        </p:spPr>
+        <p:txBody>
+          <a:bodyPr wrap="square" rtlCol="0" anchor="ctr"/>
+          <a:lstStyle/>
+          <a:p>
+            <a:pPr algn="r" indent="0" marL="0">
+              <a:buNone/>
+            </a:pPr>
+            <a:r>
+              <a:rPr lang="en-US" sz="800" dirty="0">
+                <a:solidFill>
+                  <a:srgbClr val="64748B"/>
+                </a:solidFill>
+                <a:latin typeface="Arial" pitchFamily="34" charset="0"/>
+                <a:ea typeface="Arial" pitchFamily="34" charset="-122"/>
+                <a:cs typeface="Arial" pitchFamily="34" charset="-120"/>
+              </a:rPr>
+              <a:t>Slide 4 of 7</a:t>
+            </a:r>
+            <a:endParaRPr lang="en-US" sz="800" dirty="0"/>
+          </a:p>
+        </p:txBody>
+      </p:sp>
+    </p:spTree>
+  </p:cSld>
+  <p:clrMapOvr>
+    <a:masterClrMapping/>
+  </p:clrMapOvr>
+</p:sld>
+</file>
+
+<file path=ppt/slides/slide5.xml><?xml version="1.0" encoding="utf-8"?>
+<p:sld xmlns:a="http://schemas.openxmlformats.org/drawingml/2006/main" xmlns:r="http://schemas.openxmlformats.org/officeDocument/2006/relationships" xmlns:p="http://schemas.openxmlformats.org/presentationml/2006/main">
+  <p:cSld name="Slide 5">
+    <p:spTree>
+      <p:nvGrpSpPr>
+        <p:cNvPr id="1" name=""/>
+        <p:cNvGrpSpPr/>
+        <p:nvPr/>
+      </p:nvGrpSpPr>
+      <p:grpSpPr>
+        <a:xfrm>
+          <a:off x="0" y="0"/>
+          <a:ext cx="0" cy="0"/>
+          <a:chOff x="0" y="0"/>
+          <a:chExt cx="0" cy="0"/>
+        </a:xfrm>
+      </p:grpSpPr>
+      <p:sp>
+        <p:nvSpPr>
+          <p:cNvPr id="2" name="Text 0"/>
+          <p:cNvSpPr/>
+          <p:nvPr/>
+        </p:nvSpPr>
+        <p:spPr>
+          <a:xfrm>
+            <a:off x="731520" y="411480"/>
+            <a:ext cx="10515600" cy="274320"/>
+          </a:xfrm>
+          <a:prstGeom prst="rect">
+            <a:avLst/>
+          </a:prstGeom>
+          <a:noFill/>
+          <a:ln/>
+        </p:spPr>
+        <p:txBody>
+          <a:bodyPr wrap="square" rtlCol="0" anchor="ctr"/>
+          <a:lstStyle/>
+          <a:p>
+            <a:pPr indent="0" marL="0">
+              <a:buNone/>
+            </a:pPr>
+            <a:r>
+              <a:rPr lang="en-US" sz="900" b="1" dirty="0">
+                <a:solidFill>
+                  <a:srgbClr val="047857"/>
+                </a:solidFill>
+                <a:latin typeface="Arial" pitchFamily="34" charset="0"/>
+                <a:ea typeface="Arial" pitchFamily="34" charset="-122"/>
+                <a:cs typeface="Arial" pitchFamily="34" charset="-120"/>
+              </a:rPr>
+              <a:t>PORTOFOLIO KEBUN TMC</a:t>
+            </a:r>
+            <a:endParaRPr lang="en-US" sz="900" dirty="0"/>
+          </a:p>
+        </p:txBody>
+      </p:sp>
+      <p:sp>
+        <p:nvSpPr>
+          <p:cNvPr id="3" name="Text 1"/>
+          <p:cNvSpPr/>
+          <p:nvPr/>
+        </p:nvSpPr>
+        <p:spPr>
+          <a:xfrm>
+            <a:off x="731520" y="658368"/>
+            <a:ext cx="10515600" cy="502920"/>
+          </a:xfrm>
+          <a:prstGeom prst="rect">
+            <a:avLst/>
+          </a:prstGeom>
+          <a:noFill/>
+          <a:ln/>
+        </p:spPr>
+        <p:txBody>
+          <a:bodyPr wrap="square" rtlCol="0" anchor="ctr"/>
+          <a:lstStyle/>
+          <a:p>
+            <a:pPr indent="0" marL="0">
+              <a:buNone/>
+            </a:pPr>
+            <a:r>
+              <a:rPr lang="en-US" sz="1800" b="1" dirty="0">
+                <a:solidFill>
+                  <a:srgbClr val="0F172A"/>
+                </a:solidFill>
+                <a:latin typeface="Arial" pitchFamily="34" charset="0"/>
+                <a:ea typeface="Arial" pitchFamily="34" charset="-122"/>
+                <a:cs typeface="Arial" pitchFamily="34" charset="-120"/>
+              </a:rPr>
+              <a:t>4. Matriks Komparasi Portofolio Kumulatif (2.379 Ha)</a:t>
+            </a:r>
+            <a:endParaRPr lang="en-US" sz="1800" dirty="0"/>
+          </a:p>
+        </p:txBody>
+      </p:sp>
+      <p:sp>
+        <p:nvSpPr>
+          <p:cNvPr id="4" name="Shape 2"/>
+          <p:cNvSpPr/>
+          <p:nvPr/>
+        </p:nvSpPr>
+        <p:spPr>
+          <a:xfrm>
+            <a:off x="731520" y="1188720"/>
+            <a:ext cx="10698480" cy="0"/>
+          </a:xfrm>
+          <a:prstGeom prst="line">
+            <a:avLst/>
+          </a:prstGeom>
+          <a:noFill/>
+          <a:ln w="12700">
+            <a:solidFill>
+              <a:srgbClr val="CBD5E1"/>
+            </a:solidFill>
+            <a:prstDash val="solid"/>
+          </a:ln>
+        </p:spPr>
+      </p:sp>
       <p:graphicFrame>
         <p:nvGraphicFramePr>
-          <p:cNvPr id="5" name="Table 0"/>
+          <p:cNvPr id="6" name="Table 0"/>
           <p:cNvGraphicFramePr>
             <a:graphicFrameLocks noGrp="1"/>
           </p:cNvGraphicFramePr>
@@ -9459,1078 +12393,7 @@
                 <a:ea typeface="Arial" pitchFamily="34" charset="-122"/>
                 <a:cs typeface="Arial" pitchFamily="34" charset="-120"/>
               </a:rPr>
-              <a:t>Slide 4 of 6</a:t>
-            </a:r>
-            <a:endParaRPr lang="en-US" sz="800" dirty="0"/>
-          </a:p>
-        </p:txBody>
-      </p:sp>
-    </p:spTree>
-  </p:cSld>
-  <p:clrMapOvr>
-    <a:masterClrMapping/>
-  </p:clrMapOvr>
-</p:sld>
-</file>
-
-<file path=ppt/slides/slide5.xml><?xml version="1.0" encoding="utf-8"?>
-<p:sld xmlns:a="http://schemas.openxmlformats.org/drawingml/2006/main" xmlns:r="http://schemas.openxmlformats.org/officeDocument/2006/relationships" xmlns:p="http://schemas.openxmlformats.org/presentationml/2006/main">
-  <p:cSld name="Slide 5">
-    <p:spTree>
-      <p:nvGrpSpPr>
-        <p:cNvPr id="1" name=""/>
-        <p:cNvGrpSpPr/>
-        <p:nvPr/>
-      </p:nvGrpSpPr>
-      <p:grpSpPr>
-        <a:xfrm>
-          <a:off x="0" y="0"/>
-          <a:ext cx="0" cy="0"/>
-          <a:chOff x="0" y="0"/>
-          <a:chExt cx="0" cy="0"/>
-        </a:xfrm>
-      </p:grpSpPr>
-      <p:sp>
-        <p:nvSpPr>
-          <p:cNvPr id="2" name="Text 0"/>
-          <p:cNvSpPr/>
-          <p:nvPr/>
-        </p:nvSpPr>
-        <p:spPr>
-          <a:xfrm>
-            <a:off x="731520" y="411480"/>
-            <a:ext cx="10515600" cy="274320"/>
-          </a:xfrm>
-          <a:prstGeom prst="rect">
-            <a:avLst/>
-          </a:prstGeom>
-          <a:noFill/>
-          <a:ln/>
-        </p:spPr>
-        <p:txBody>
-          <a:bodyPr wrap="square" rtlCol="0" anchor="ctr"/>
-          <a:lstStyle/>
-          <a:p>
-            <a:pPr indent="0" marL="0">
-              <a:buNone/>
-            </a:pPr>
-            <a:r>
-              <a:rPr lang="en-US" sz="900" b="1" dirty="0">
-                <a:solidFill>
-                  <a:srgbClr val="047857"/>
-                </a:solidFill>
-                <a:latin typeface="Arial" pitchFamily="34" charset="0"/>
-                <a:ea typeface="Arial" pitchFamily="34" charset="-122"/>
-                <a:cs typeface="Arial" pitchFamily="34" charset="-120"/>
-              </a:rPr>
-              <a:t>PORTOFOLIO KEBUN TMC</a:t>
-            </a:r>
-            <a:endParaRPr lang="en-US" sz="900" dirty="0"/>
-          </a:p>
-        </p:txBody>
-      </p:sp>
-      <p:sp>
-        <p:nvSpPr>
-          <p:cNvPr id="3" name="Text 1"/>
-          <p:cNvSpPr/>
-          <p:nvPr/>
-        </p:nvSpPr>
-        <p:spPr>
-          <a:xfrm>
-            <a:off x="731520" y="658368"/>
-            <a:ext cx="10515600" cy="502920"/>
-          </a:xfrm>
-          <a:prstGeom prst="rect">
-            <a:avLst/>
-          </a:prstGeom>
-          <a:noFill/>
-          <a:ln/>
-        </p:spPr>
-        <p:txBody>
-          <a:bodyPr wrap="square" rtlCol="0" anchor="ctr"/>
-          <a:lstStyle/>
-          <a:p>
-            <a:pPr indent="0" marL="0">
-              <a:buNone/>
-            </a:pPr>
-            <a:r>
-              <a:rPr lang="en-US" sz="1800" b="1" dirty="0">
-                <a:solidFill>
-                  <a:srgbClr val="0F172A"/>
-                </a:solidFill>
-                <a:latin typeface="Arial" pitchFamily="34" charset="0"/>
-                <a:ea typeface="Arial" pitchFamily="34" charset="-122"/>
-                <a:cs typeface="Arial" pitchFamily="34" charset="-120"/>
-              </a:rPr>
-              <a:t>4. Neraca Alokasi Pasokan Pabrik (Siklus &amp; Tahunan)</a:t>
-            </a:r>
-            <a:endParaRPr lang="en-US" sz="1800" dirty="0"/>
-          </a:p>
-        </p:txBody>
-      </p:sp>
-      <p:sp>
-        <p:nvSpPr>
-          <p:cNvPr id="4" name="Shape 2"/>
-          <p:cNvSpPr/>
-          <p:nvPr/>
-        </p:nvSpPr>
-        <p:spPr>
-          <a:xfrm>
-            <a:off x="731520" y="1188720"/>
-            <a:ext cx="10698480" cy="0"/>
-          </a:xfrm>
-          <a:prstGeom prst="line">
-            <a:avLst/>
-          </a:prstGeom>
-          <a:noFill/>
-          <a:ln w="12700">
-            <a:solidFill>
-              <a:srgbClr val="CBD5E1"/>
-            </a:solidFill>
-            <a:prstDash val="solid"/>
-          </a:ln>
-        </p:spPr>
-      </p:sp>
-      <p:sp>
-        <p:nvSpPr>
-          <p:cNvPr id="5" name="Shape 3"/>
-          <p:cNvSpPr/>
-          <p:nvPr/>
-        </p:nvSpPr>
-        <p:spPr>
-          <a:xfrm>
-            <a:off x="731520" y="1371600"/>
-            <a:ext cx="5212080" cy="3200400"/>
-          </a:xfrm>
-          <a:prstGeom prst="roundRect">
-            <a:avLst>
-              <a:gd name="adj" fmla="val 2286"/>
-            </a:avLst>
-          </a:prstGeom>
-          <a:solidFill>
-            <a:srgbClr val="F8FAFC"/>
-          </a:solidFill>
-          <a:ln w="12700">
-            <a:solidFill>
-              <a:srgbClr val="CBD5E1"/>
-            </a:solidFill>
-            <a:prstDash val="solid"/>
-          </a:ln>
-        </p:spPr>
-      </p:sp>
-      <p:sp>
-        <p:nvSpPr>
-          <p:cNvPr id="6" name="Text 4"/>
-          <p:cNvSpPr/>
-          <p:nvPr/>
-        </p:nvSpPr>
-        <p:spPr>
-          <a:xfrm>
-            <a:off x="914400" y="1536192"/>
-            <a:ext cx="4846320" cy="320040"/>
-          </a:xfrm>
-          <a:prstGeom prst="rect">
-            <a:avLst/>
-          </a:prstGeom>
-          <a:noFill/>
-          <a:ln/>
-        </p:spPr>
-        <p:txBody>
-          <a:bodyPr wrap="square" rtlCol="0" anchor="ctr"/>
-          <a:lstStyle/>
-          <a:p>
-            <a:pPr indent="0" marL="0">
-              <a:buNone/>
-            </a:pPr>
-            <a:r>
-              <a:rPr lang="en-US" sz="1000" b="1" dirty="0">
-                <a:solidFill>
-                  <a:srgbClr val="0F172A"/>
-                </a:solidFill>
-                <a:latin typeface="Arial" pitchFamily="34" charset="0"/>
-                <a:ea typeface="Arial" pitchFamily="34" charset="-122"/>
-                <a:cs typeface="Arial" pitchFamily="34" charset="-120"/>
-              </a:rPr>
-              <a:t>ALOKASI PASOKAN / 3 BULAN (SIKLUS PANEN)</a:t>
-            </a:r>
-            <a:endParaRPr lang="en-US" sz="1000" dirty="0"/>
-          </a:p>
-        </p:txBody>
-      </p:sp>
-      <p:sp>
-        <p:nvSpPr>
-          <p:cNvPr id="7" name="Shape 5"/>
-          <p:cNvSpPr/>
-          <p:nvPr/>
-        </p:nvSpPr>
-        <p:spPr>
-          <a:xfrm>
-            <a:off x="914400" y="1965960"/>
-            <a:ext cx="4846320" cy="1051560"/>
-          </a:xfrm>
-          <a:prstGeom prst="roundRect">
-            <a:avLst>
-              <a:gd name="adj" fmla="val 5217"/>
-            </a:avLst>
-          </a:prstGeom>
-          <a:solidFill>
-            <a:srgbClr val="ECFDF5"/>
-          </a:solidFill>
-          <a:ln w="12700">
-            <a:solidFill>
-              <a:srgbClr val="A7F3D0"/>
-            </a:solidFill>
-            <a:prstDash val="solid"/>
-          </a:ln>
-        </p:spPr>
-      </p:sp>
-      <p:sp>
-        <p:nvSpPr>
-          <p:cNvPr id="8" name="Text 6"/>
-          <p:cNvSpPr/>
-          <p:nvPr/>
-        </p:nvSpPr>
-        <p:spPr>
-          <a:xfrm>
-            <a:off x="1051560" y="2057400"/>
-            <a:ext cx="4572000" cy="274320"/>
-          </a:xfrm>
-          <a:prstGeom prst="rect">
-            <a:avLst/>
-          </a:prstGeom>
-          <a:noFill/>
-          <a:ln/>
-        </p:spPr>
-        <p:txBody>
-          <a:bodyPr wrap="square" rtlCol="0" anchor="ctr"/>
-          <a:lstStyle/>
-          <a:p>
-            <a:pPr indent="0" marL="0">
-              <a:buNone/>
-            </a:pPr>
-            <a:r>
-              <a:rPr lang="en-US" sz="900" b="1" dirty="0">
-                <a:solidFill>
-                  <a:srgbClr val="064E3B"/>
-                </a:solidFill>
-                <a:latin typeface="Arial" pitchFamily="34" charset="0"/>
-                <a:ea typeface="Arial" pitchFamily="34" charset="-122"/>
-                <a:cs typeface="Arial" pitchFamily="34" charset="-120"/>
-              </a:rPr>
-              <a:t>KEBUN MANDIRI TMC (3 BLOK): 10,00%</a:t>
-            </a:r>
-            <a:endParaRPr lang="en-US" sz="900" dirty="0"/>
-          </a:p>
-        </p:txBody>
-      </p:sp>
-      <p:sp>
-        <p:nvSpPr>
-          <p:cNvPr id="9" name="Text 7"/>
-          <p:cNvSpPr/>
-          <p:nvPr/>
-        </p:nvSpPr>
-        <p:spPr>
-          <a:xfrm>
-            <a:off x="1051560" y="2359152"/>
-            <a:ext cx="4572000" cy="502920"/>
-          </a:xfrm>
-          <a:prstGeom prst="rect">
-            <a:avLst/>
-          </a:prstGeom>
-          <a:noFill/>
-          <a:ln/>
-        </p:spPr>
-        <p:txBody>
-          <a:bodyPr wrap="square" rtlCol="0" anchor="ctr"/>
-          <a:lstStyle/>
-          <a:p>
-            <a:pPr indent="0" marL="0">
-              <a:buNone/>
-            </a:pPr>
-            <a:r>
-              <a:rPr lang="en-US" sz="1300" b="1" dirty="0">
-                <a:solidFill>
-                  <a:srgbClr val="047857"/>
-                </a:solidFill>
-                <a:latin typeface="Arial" pitchFamily="34" charset="0"/>
-                <a:ea typeface="Arial" pitchFamily="34" charset="-122"/>
-                <a:cs typeface="Arial" pitchFamily="34" charset="-120"/>
-              </a:rPr>
-              <a:t>2.400.600 Butir / 3 Bulan (40.010 Butir / HK)</a:t>
-            </a:r>
-            <a:endParaRPr lang="en-US" sz="1300" dirty="0"/>
-          </a:p>
-        </p:txBody>
-      </p:sp>
-      <p:sp>
-        <p:nvSpPr>
-          <p:cNvPr id="10" name="Shape 8"/>
-          <p:cNvSpPr/>
-          <p:nvPr/>
-        </p:nvSpPr>
-        <p:spPr>
-          <a:xfrm>
-            <a:off x="914400" y="3154680"/>
-            <a:ext cx="4846320" cy="1051560"/>
-          </a:xfrm>
-          <a:prstGeom prst="roundRect">
-            <a:avLst>
-              <a:gd name="adj" fmla="val 5217"/>
-            </a:avLst>
-          </a:prstGeom>
-          <a:solidFill>
-            <a:srgbClr val="FFFBEB"/>
-          </a:solidFill>
-          <a:ln w="12700">
-            <a:solidFill>
-              <a:srgbClr val="FDE68A"/>
-            </a:solidFill>
-            <a:prstDash val="solid"/>
-          </a:ln>
-        </p:spPr>
-      </p:sp>
-      <p:sp>
-        <p:nvSpPr>
-          <p:cNvPr id="11" name="Text 9"/>
-          <p:cNvSpPr/>
-          <p:nvPr/>
-        </p:nvSpPr>
-        <p:spPr>
-          <a:xfrm>
-            <a:off x="1051560" y="3246120"/>
-            <a:ext cx="4572000" cy="274320"/>
-          </a:xfrm>
-          <a:prstGeom prst="rect">
-            <a:avLst/>
-          </a:prstGeom>
-          <a:noFill/>
-          <a:ln/>
-        </p:spPr>
-        <p:txBody>
-          <a:bodyPr wrap="square" rtlCol="0" anchor="ctr"/>
-          <a:lstStyle/>
-          <a:p>
-            <a:pPr indent="0" marL="0">
-              <a:buNone/>
-            </a:pPr>
-            <a:r>
-              <a:rPr lang="en-US" sz="900" b="1" dirty="0">
-                <a:solidFill>
-                  <a:srgbClr val="92400E"/>
-                </a:solidFill>
-                <a:latin typeface="Arial" pitchFamily="34" charset="0"/>
-                <a:ea typeface="Arial" pitchFamily="34" charset="-122"/>
-                <a:cs typeface="Arial" pitchFamily="34" charset="-120"/>
-              </a:rPr>
-              <a:t>PEMBELIAN DARI PETANI LUAR: 90,00%</a:t>
-            </a:r>
-            <a:endParaRPr lang="en-US" sz="900" dirty="0"/>
-          </a:p>
-        </p:txBody>
-      </p:sp>
-      <p:sp>
-        <p:nvSpPr>
-          <p:cNvPr id="12" name="Text 10"/>
-          <p:cNvSpPr/>
-          <p:nvPr/>
-        </p:nvSpPr>
-        <p:spPr>
-          <a:xfrm>
-            <a:off x="1051560" y="3547872"/>
-            <a:ext cx="4572000" cy="502920"/>
-          </a:xfrm>
-          <a:prstGeom prst="rect">
-            <a:avLst/>
-          </a:prstGeom>
-          <a:noFill/>
-          <a:ln/>
-        </p:spPr>
-        <p:txBody>
-          <a:bodyPr wrap="square" rtlCol="0" anchor="ctr"/>
-          <a:lstStyle/>
-          <a:p>
-            <a:pPr indent="0" marL="0">
-              <a:buNone/>
-            </a:pPr>
-            <a:r>
-              <a:rPr lang="en-US" sz="1300" b="1" dirty="0">
-                <a:solidFill>
-                  <a:srgbClr val="D97706"/>
-                </a:solidFill>
-                <a:latin typeface="Arial" pitchFamily="34" charset="0"/>
-                <a:ea typeface="Arial" pitchFamily="34" charset="-122"/>
-                <a:cs typeface="Arial" pitchFamily="34" charset="-120"/>
-              </a:rPr>
-              <a:t>21.599.400 Butir / 3 Bulan (359.990 Butir / HK)</a:t>
-            </a:r>
-            <a:endParaRPr lang="en-US" sz="1300" dirty="0"/>
-          </a:p>
-        </p:txBody>
-      </p:sp>
-      <p:sp>
-        <p:nvSpPr>
-          <p:cNvPr id="13" name="Shape 11"/>
-          <p:cNvSpPr/>
-          <p:nvPr/>
-        </p:nvSpPr>
-        <p:spPr>
-          <a:xfrm>
-            <a:off x="6217920" y="1371600"/>
-            <a:ext cx="5212080" cy="3200400"/>
-          </a:xfrm>
-          <a:prstGeom prst="roundRect">
-            <a:avLst>
-              <a:gd name="adj" fmla="val 2286"/>
-            </a:avLst>
-          </a:prstGeom>
-          <a:solidFill>
-            <a:srgbClr val="F8FAFC"/>
-          </a:solidFill>
-          <a:ln w="12700">
-            <a:solidFill>
-              <a:srgbClr val="CBD5E1"/>
-            </a:solidFill>
-            <a:prstDash val="solid"/>
-          </a:ln>
-        </p:spPr>
-      </p:sp>
-      <p:sp>
-        <p:nvSpPr>
-          <p:cNvPr id="14" name="Text 12"/>
-          <p:cNvSpPr/>
-          <p:nvPr/>
-        </p:nvSpPr>
-        <p:spPr>
-          <a:xfrm>
-            <a:off x="6400800" y="1536192"/>
-            <a:ext cx="4846320" cy="320040"/>
-          </a:xfrm>
-          <a:prstGeom prst="rect">
-            <a:avLst/>
-          </a:prstGeom>
-          <a:noFill/>
-          <a:ln/>
-        </p:spPr>
-        <p:txBody>
-          <a:bodyPr wrap="square" rtlCol="0" anchor="ctr"/>
-          <a:lstStyle/>
-          <a:p>
-            <a:pPr indent="0" marL="0">
-              <a:buNone/>
-            </a:pPr>
-            <a:r>
-              <a:rPr lang="en-US" sz="1000" b="1" dirty="0">
-                <a:solidFill>
-                  <a:srgbClr val="0F172A"/>
-                </a:solidFill>
-                <a:latin typeface="Arial" pitchFamily="34" charset="0"/>
-                <a:ea typeface="Arial" pitchFamily="34" charset="-122"/>
-                <a:cs typeface="Arial" pitchFamily="34" charset="-120"/>
-              </a:rPr>
-              <a:t>ALOKASI PASOKAN TAHUNAN (4x SIKLUS PANEN)</a:t>
-            </a:r>
-            <a:endParaRPr lang="en-US" sz="1000" dirty="0"/>
-          </a:p>
-        </p:txBody>
-      </p:sp>
-      <p:sp>
-        <p:nvSpPr>
-          <p:cNvPr id="15" name="Shape 13"/>
-          <p:cNvSpPr/>
-          <p:nvPr/>
-        </p:nvSpPr>
-        <p:spPr>
-          <a:xfrm>
-            <a:off x="6400800" y="1965960"/>
-            <a:ext cx="4846320" cy="1051560"/>
-          </a:xfrm>
-          <a:prstGeom prst="roundRect">
-            <a:avLst>
-              <a:gd name="adj" fmla="val 5217"/>
-            </a:avLst>
-          </a:prstGeom>
-          <a:solidFill>
-            <a:srgbClr val="ECFDF5"/>
-          </a:solidFill>
-          <a:ln w="12700">
-            <a:solidFill>
-              <a:srgbClr val="A7F3D0"/>
-            </a:solidFill>
-            <a:prstDash val="solid"/>
-          </a:ln>
-        </p:spPr>
-      </p:sp>
-      <p:sp>
-        <p:nvSpPr>
-          <p:cNvPr id="16" name="Text 14"/>
-          <p:cNvSpPr/>
-          <p:nvPr/>
-        </p:nvSpPr>
-        <p:spPr>
-          <a:xfrm>
-            <a:off x="6537960" y="2057400"/>
-            <a:ext cx="4572000" cy="274320"/>
-          </a:xfrm>
-          <a:prstGeom prst="rect">
-            <a:avLst/>
-          </a:prstGeom>
-          <a:noFill/>
-          <a:ln/>
-        </p:spPr>
-        <p:txBody>
-          <a:bodyPr wrap="square" rtlCol="0" anchor="ctr"/>
-          <a:lstStyle/>
-          <a:p>
-            <a:pPr indent="0" marL="0">
-              <a:buNone/>
-            </a:pPr>
-            <a:r>
-              <a:rPr lang="en-US" sz="900" b="1" dirty="0">
-                <a:solidFill>
-                  <a:srgbClr val="064E3B"/>
-                </a:solidFill>
-                <a:latin typeface="Arial" pitchFamily="34" charset="0"/>
-                <a:ea typeface="Arial" pitchFamily="34" charset="-122"/>
-                <a:cs typeface="Arial" pitchFamily="34" charset="-120"/>
-              </a:rPr>
-              <a:t>TOTAL MANDIRI TAHUNAN: 10,00%</a:t>
-            </a:r>
-            <a:endParaRPr lang="en-US" sz="900" dirty="0"/>
-          </a:p>
-        </p:txBody>
-      </p:sp>
-      <p:sp>
-        <p:nvSpPr>
-          <p:cNvPr id="17" name="Text 15"/>
-          <p:cNvSpPr/>
-          <p:nvPr/>
-        </p:nvSpPr>
-        <p:spPr>
-          <a:xfrm>
-            <a:off x="6537960" y="2359152"/>
-            <a:ext cx="4572000" cy="502920"/>
-          </a:xfrm>
-          <a:prstGeom prst="rect">
-            <a:avLst/>
-          </a:prstGeom>
-          <a:noFill/>
-          <a:ln/>
-        </p:spPr>
-        <p:txBody>
-          <a:bodyPr wrap="square" rtlCol="0" anchor="ctr"/>
-          <a:lstStyle/>
-          <a:p>
-            <a:pPr indent="0" marL="0">
-              <a:buNone/>
-            </a:pPr>
-            <a:r>
-              <a:rPr lang="en-US" sz="1300" b="1" dirty="0">
-                <a:solidFill>
-                  <a:srgbClr val="047857"/>
-                </a:solidFill>
-                <a:latin typeface="Arial" pitchFamily="34" charset="0"/>
-                <a:ea typeface="Arial" pitchFamily="34" charset="-122"/>
-                <a:cs typeface="Arial" pitchFamily="34" charset="-120"/>
-              </a:rPr>
-              <a:t>9.602.400 Butir / Tahun (Buffer Pasokan)</a:t>
-            </a:r>
-            <a:endParaRPr lang="en-US" sz="1300" dirty="0"/>
-          </a:p>
-        </p:txBody>
-      </p:sp>
-      <p:sp>
-        <p:nvSpPr>
-          <p:cNvPr id="18" name="Shape 16"/>
-          <p:cNvSpPr/>
-          <p:nvPr/>
-        </p:nvSpPr>
-        <p:spPr>
-          <a:xfrm>
-            <a:off x="6400800" y="3154680"/>
-            <a:ext cx="4846320" cy="1051560"/>
-          </a:xfrm>
-          <a:prstGeom prst="roundRect">
-            <a:avLst>
-              <a:gd name="adj" fmla="val 5217"/>
-            </a:avLst>
-          </a:prstGeom>
-          <a:solidFill>
-            <a:srgbClr val="FFFBEB"/>
-          </a:solidFill>
-          <a:ln w="12700">
-            <a:solidFill>
-              <a:srgbClr val="FDE68A"/>
-            </a:solidFill>
-            <a:prstDash val="solid"/>
-          </a:ln>
-        </p:spPr>
-      </p:sp>
-      <p:sp>
-        <p:nvSpPr>
-          <p:cNvPr id="19" name="Text 17"/>
-          <p:cNvSpPr/>
-          <p:nvPr/>
-        </p:nvSpPr>
-        <p:spPr>
-          <a:xfrm>
-            <a:off x="6537960" y="3246120"/>
-            <a:ext cx="4572000" cy="274320"/>
-          </a:xfrm>
-          <a:prstGeom prst="rect">
-            <a:avLst/>
-          </a:prstGeom>
-          <a:noFill/>
-          <a:ln/>
-        </p:spPr>
-        <p:txBody>
-          <a:bodyPr wrap="square" rtlCol="0" anchor="ctr"/>
-          <a:lstStyle/>
-          <a:p>
-            <a:pPr indent="0" marL="0">
-              <a:buNone/>
-            </a:pPr>
-            <a:r>
-              <a:rPr lang="en-US" sz="900" b="1" dirty="0">
-                <a:solidFill>
-                  <a:srgbClr val="92400E"/>
-                </a:solidFill>
-                <a:latin typeface="Arial" pitchFamily="34" charset="0"/>
-                <a:ea typeface="Arial" pitchFamily="34" charset="-122"/>
-                <a:cs typeface="Arial" pitchFamily="34" charset="-120"/>
-              </a:rPr>
-              <a:t>TOTAL BELI LUAR TAHUNAN: 90,00%</a:t>
-            </a:r>
-            <a:endParaRPr lang="en-US" sz="900" dirty="0"/>
-          </a:p>
-        </p:txBody>
-      </p:sp>
-      <p:sp>
-        <p:nvSpPr>
-          <p:cNvPr id="20" name="Text 18"/>
-          <p:cNvSpPr/>
-          <p:nvPr/>
-        </p:nvSpPr>
-        <p:spPr>
-          <a:xfrm>
-            <a:off x="6537960" y="3547872"/>
-            <a:ext cx="4572000" cy="502920"/>
-          </a:xfrm>
-          <a:prstGeom prst="rect">
-            <a:avLst/>
-          </a:prstGeom>
-          <a:noFill/>
-          <a:ln/>
-        </p:spPr>
-        <p:txBody>
-          <a:bodyPr wrap="square" rtlCol="0" anchor="ctr"/>
-          <a:lstStyle/>
-          <a:p>
-            <a:pPr indent="0" marL="0">
-              <a:buNone/>
-            </a:pPr>
-            <a:r>
-              <a:rPr lang="en-US" sz="1300" b="1" dirty="0">
-                <a:solidFill>
-                  <a:srgbClr val="D97706"/>
-                </a:solidFill>
-                <a:latin typeface="Arial" pitchFamily="34" charset="0"/>
-                <a:ea typeface="Arial" pitchFamily="34" charset="-122"/>
-                <a:cs typeface="Arial" pitchFamily="34" charset="-120"/>
-              </a:rPr>
-              <a:t>86.397.600 Butir / Tahun (Mitra Petani)</a:t>
-            </a:r>
-            <a:endParaRPr lang="en-US" sz="1300" dirty="0"/>
-          </a:p>
-        </p:txBody>
-      </p:sp>
-      <p:sp>
-        <p:nvSpPr>
-          <p:cNvPr id="21" name="Shape 19"/>
-          <p:cNvSpPr/>
-          <p:nvPr/>
-        </p:nvSpPr>
-        <p:spPr>
-          <a:xfrm>
-            <a:off x="731520" y="4754880"/>
-            <a:ext cx="3410712" cy="1508760"/>
-          </a:xfrm>
-          <a:prstGeom prst="roundRect">
-            <a:avLst>
-              <a:gd name="adj" fmla="val 4848"/>
-            </a:avLst>
-          </a:prstGeom>
-          <a:solidFill>
-            <a:srgbClr val="FFFFFF"/>
-          </a:solidFill>
-          <a:ln w="12700">
-            <a:solidFill>
-              <a:srgbClr val="CBD5E1"/>
-            </a:solidFill>
-            <a:prstDash val="solid"/>
-          </a:ln>
-        </p:spPr>
-      </p:sp>
-      <p:sp>
-        <p:nvSpPr>
-          <p:cNvPr id="22" name="Text 20"/>
-          <p:cNvSpPr/>
-          <p:nvPr/>
-        </p:nvSpPr>
-        <p:spPr>
-          <a:xfrm>
-            <a:off x="868680" y="4892040"/>
-            <a:ext cx="3136392" cy="320040"/>
-          </a:xfrm>
-          <a:prstGeom prst="rect">
-            <a:avLst/>
-          </a:prstGeom>
-          <a:noFill/>
-          <a:ln/>
-        </p:spPr>
-        <p:txBody>
-          <a:bodyPr wrap="square" rtlCol="0" anchor="ctr"/>
-          <a:lstStyle/>
-          <a:p>
-            <a:pPr indent="0" marL="0">
-              <a:buNone/>
-            </a:pPr>
-            <a:r>
-              <a:rPr lang="en-US" sz="900" b="1" dirty="0">
-                <a:solidFill>
-                  <a:srgbClr val="064E3B"/>
-                </a:solidFill>
-                <a:latin typeface="Arial" pitchFamily="34" charset="0"/>
-                <a:ea typeface="Arial" pitchFamily="34" charset="-122"/>
-                <a:cs typeface="Arial" pitchFamily="34" charset="-120"/>
-              </a:rPr>
-              <a:t>1. KONTROL MUTU &amp; GRADING</a:t>
-            </a:r>
-            <a:endParaRPr lang="en-US" sz="900" dirty="0"/>
-          </a:p>
-        </p:txBody>
-      </p:sp>
-      <p:sp>
-        <p:nvSpPr>
-          <p:cNvPr id="23" name="Text 21"/>
-          <p:cNvSpPr/>
-          <p:nvPr/>
-        </p:nvSpPr>
-        <p:spPr>
-          <a:xfrm>
-            <a:off x="868680" y="5257800"/>
-            <a:ext cx="3136392" cy="868680"/>
-          </a:xfrm>
-          <a:prstGeom prst="rect">
-            <a:avLst/>
-          </a:prstGeom>
-          <a:noFill/>
-          <a:ln/>
-        </p:spPr>
-        <p:txBody>
-          <a:bodyPr wrap="square" rtlCol="0" anchor="ctr"/>
-          <a:lstStyle/>
-          <a:p>
-            <a:pPr indent="0" marL="0">
-              <a:buNone/>
-            </a:pPr>
-            <a:r>
-              <a:rPr lang="en-US" sz="850" dirty="0">
-                <a:solidFill>
-                  <a:srgbClr val="334155"/>
-                </a:solidFill>
-                <a:latin typeface="Arial" pitchFamily="34" charset="0"/>
-                <a:ea typeface="Arial" pitchFamily="34" charset="-122"/>
-                <a:cs typeface="Arial" pitchFamily="34" charset="-120"/>
-              </a:rPr>
-              <a:t>Bahan baku dari kebun sendiri terjamin umur petik optimal dan ukuran butir seragam.</a:t>
-            </a:r>
-            <a:endParaRPr lang="en-US" sz="850" dirty="0"/>
-          </a:p>
-        </p:txBody>
-      </p:sp>
-      <p:sp>
-        <p:nvSpPr>
-          <p:cNvPr id="24" name="Shape 22"/>
-          <p:cNvSpPr/>
-          <p:nvPr/>
-        </p:nvSpPr>
-        <p:spPr>
-          <a:xfrm>
-            <a:off x="4370832" y="4754880"/>
-            <a:ext cx="3410712" cy="1508760"/>
-          </a:xfrm>
-          <a:prstGeom prst="roundRect">
-            <a:avLst>
-              <a:gd name="adj" fmla="val 4848"/>
-            </a:avLst>
-          </a:prstGeom>
-          <a:solidFill>
-            <a:srgbClr val="FFFFFF"/>
-          </a:solidFill>
-          <a:ln w="12700">
-            <a:solidFill>
-              <a:srgbClr val="CBD5E1"/>
-            </a:solidFill>
-            <a:prstDash val="solid"/>
-          </a:ln>
-        </p:spPr>
-      </p:sp>
-      <p:sp>
-        <p:nvSpPr>
-          <p:cNvPr id="25" name="Text 23"/>
-          <p:cNvSpPr/>
-          <p:nvPr/>
-        </p:nvSpPr>
-        <p:spPr>
-          <a:xfrm>
-            <a:off x="4507992" y="4892040"/>
-            <a:ext cx="3136392" cy="320040"/>
-          </a:xfrm>
-          <a:prstGeom prst="rect">
-            <a:avLst/>
-          </a:prstGeom>
-          <a:noFill/>
-          <a:ln/>
-        </p:spPr>
-        <p:txBody>
-          <a:bodyPr wrap="square" rtlCol="0" anchor="ctr"/>
-          <a:lstStyle/>
-          <a:p>
-            <a:pPr indent="0" marL="0">
-              <a:buNone/>
-            </a:pPr>
-            <a:r>
-              <a:rPr lang="en-US" sz="900" b="1" dirty="0">
-                <a:solidFill>
-                  <a:srgbClr val="064E3B"/>
-                </a:solidFill>
-                <a:latin typeface="Arial" pitchFamily="34" charset="0"/>
-                <a:ea typeface="Arial" pitchFamily="34" charset="-122"/>
-                <a:cs typeface="Arial" pitchFamily="34" charset="-120"/>
-              </a:rPr>
-              <a:t>2. MITIGASI FLUKTUASI HARGA</a:t>
-            </a:r>
-            <a:endParaRPr lang="en-US" sz="900" dirty="0"/>
-          </a:p>
-        </p:txBody>
-      </p:sp>
-      <p:sp>
-        <p:nvSpPr>
-          <p:cNvPr id="26" name="Text 24"/>
-          <p:cNvSpPr/>
-          <p:nvPr/>
-        </p:nvSpPr>
-        <p:spPr>
-          <a:xfrm>
-            <a:off x="4507992" y="5257800"/>
-            <a:ext cx="3136392" cy="868680"/>
-          </a:xfrm>
-          <a:prstGeom prst="rect">
-            <a:avLst/>
-          </a:prstGeom>
-          <a:noFill/>
-          <a:ln/>
-        </p:spPr>
-        <p:txBody>
-          <a:bodyPr wrap="square" rtlCol="0" anchor="ctr"/>
-          <a:lstStyle/>
-          <a:p>
-            <a:pPr indent="0" marL="0">
-              <a:buNone/>
-            </a:pPr>
-            <a:r>
-              <a:rPr lang="en-US" sz="850" dirty="0">
-                <a:solidFill>
-                  <a:srgbClr val="334155"/>
-                </a:solidFill>
-                <a:latin typeface="Arial" pitchFamily="34" charset="0"/>
-                <a:ea typeface="Arial" pitchFamily="34" charset="-122"/>
-                <a:cs typeface="Arial" pitchFamily="34" charset="-120"/>
-              </a:rPr>
-              <a:t>Menurunkan sensitivitas biaya produksi saat lonjakan harga kelapa di pasar bebas.</a:t>
-            </a:r>
-            <a:endParaRPr lang="en-US" sz="850" dirty="0"/>
-          </a:p>
-        </p:txBody>
-      </p:sp>
-      <p:sp>
-        <p:nvSpPr>
-          <p:cNvPr id="27" name="Shape 25"/>
-          <p:cNvSpPr/>
-          <p:nvPr/>
-        </p:nvSpPr>
-        <p:spPr>
-          <a:xfrm>
-            <a:off x="8010144" y="4754880"/>
-            <a:ext cx="3410712" cy="1508760"/>
-          </a:xfrm>
-          <a:prstGeom prst="roundRect">
-            <a:avLst>
-              <a:gd name="adj" fmla="val 4848"/>
-            </a:avLst>
-          </a:prstGeom>
-          <a:solidFill>
-            <a:srgbClr val="FFFFFF"/>
-          </a:solidFill>
-          <a:ln w="12700">
-            <a:solidFill>
-              <a:srgbClr val="CBD5E1"/>
-            </a:solidFill>
-            <a:prstDash val="solid"/>
-          </a:ln>
-        </p:spPr>
-      </p:sp>
-      <p:sp>
-        <p:nvSpPr>
-          <p:cNvPr id="28" name="Text 26"/>
-          <p:cNvSpPr/>
-          <p:nvPr/>
-        </p:nvSpPr>
-        <p:spPr>
-          <a:xfrm>
-            <a:off x="8147304" y="4892040"/>
-            <a:ext cx="3136392" cy="320040"/>
-          </a:xfrm>
-          <a:prstGeom prst="rect">
-            <a:avLst/>
-          </a:prstGeom>
-          <a:noFill/>
-          <a:ln/>
-        </p:spPr>
-        <p:txBody>
-          <a:bodyPr wrap="square" rtlCol="0" anchor="ctr"/>
-          <a:lstStyle/>
-          <a:p>
-            <a:pPr indent="0" marL="0">
-              <a:buNone/>
-            </a:pPr>
-            <a:r>
-              <a:rPr lang="en-US" sz="900" b="1" dirty="0">
-                <a:solidFill>
-                  <a:srgbClr val="064E3B"/>
-                </a:solidFill>
-                <a:latin typeface="Arial" pitchFamily="34" charset="0"/>
-                <a:ea typeface="Arial" pitchFamily="34" charset="-122"/>
-                <a:cs typeface="Arial" pitchFamily="34" charset="-120"/>
-              </a:rPr>
-              <a:t>3. BUFFER KELANGKAAN PASOKAN</a:t>
-            </a:r>
-            <a:endParaRPr lang="en-US" sz="900" dirty="0"/>
-          </a:p>
-        </p:txBody>
-      </p:sp>
-      <p:sp>
-        <p:nvSpPr>
-          <p:cNvPr id="29" name="Text 27"/>
-          <p:cNvSpPr/>
-          <p:nvPr/>
-        </p:nvSpPr>
-        <p:spPr>
-          <a:xfrm>
-            <a:off x="8147304" y="5257800"/>
-            <a:ext cx="3136392" cy="868680"/>
-          </a:xfrm>
-          <a:prstGeom prst="rect">
-            <a:avLst/>
-          </a:prstGeom>
-          <a:noFill/>
-          <a:ln/>
-        </p:spPr>
-        <p:txBody>
-          <a:bodyPr wrap="square" rtlCol="0" anchor="ctr"/>
-          <a:lstStyle/>
-          <a:p>
-            <a:pPr indent="0" marL="0">
-              <a:buNone/>
-            </a:pPr>
-            <a:r>
-              <a:rPr lang="en-US" sz="850" dirty="0">
-                <a:solidFill>
-                  <a:srgbClr val="334155"/>
-                </a:solidFill>
-                <a:latin typeface="Arial" pitchFamily="34" charset="0"/>
-                <a:ea typeface="Arial" pitchFamily="34" charset="-122"/>
-                <a:cs typeface="Arial" pitchFamily="34" charset="-120"/>
-              </a:rPr>
-              <a:t>Pabrik tetap dapat beroperasi secara kontinyu saat terjadi kendala panen di petani mitra.</a:t>
-            </a:r>
-            <a:endParaRPr lang="en-US" sz="850" dirty="0"/>
-          </a:p>
-        </p:txBody>
-      </p:sp>
-      <p:sp>
-        <p:nvSpPr>
-          <p:cNvPr id="30" name="Text 28"/>
-          <p:cNvSpPr/>
-          <p:nvPr/>
-        </p:nvSpPr>
-        <p:spPr>
-          <a:xfrm>
-            <a:off x="731520" y="6400800"/>
-            <a:ext cx="7772400" cy="274320"/>
-          </a:xfrm>
-          <a:prstGeom prst="rect">
-            <a:avLst/>
-          </a:prstGeom>
-          <a:noFill/>
-          <a:ln/>
-        </p:spPr>
-        <p:txBody>
-          <a:bodyPr wrap="square" rtlCol="0" anchor="ctr"/>
-          <a:lstStyle/>
-          <a:p>
-            <a:pPr indent="0" marL="0">
-              <a:buNone/>
-            </a:pPr>
-            <a:r>
-              <a:rPr lang="en-US" sz="850" b="1" dirty="0">
-                <a:solidFill>
-                  <a:srgbClr val="64748B"/>
-                </a:solidFill>
-                <a:latin typeface="Arial" pitchFamily="34" charset="0"/>
-                <a:ea typeface="Arial" pitchFamily="34" charset="-122"/>
-                <a:cs typeface="Arial" pitchFamily="34" charset="-120"/>
-              </a:rPr>
-              <a:t>PERKEBUNAN TMC (MEMBER OF RAI)</a:t>
-            </a:r>
-            <a:endParaRPr lang="en-US" sz="850" dirty="0"/>
-          </a:p>
-        </p:txBody>
-      </p:sp>
-      <p:sp>
-        <p:nvSpPr>
-          <p:cNvPr id="31" name="Text 29"/>
-          <p:cNvSpPr/>
-          <p:nvPr/>
-        </p:nvSpPr>
-        <p:spPr>
-          <a:xfrm>
-            <a:off x="8686800" y="6400800"/>
-            <a:ext cx="2743200" cy="274320"/>
-          </a:xfrm>
-          <a:prstGeom prst="rect">
-            <a:avLst/>
-          </a:prstGeom>
-          <a:noFill/>
-          <a:ln/>
-        </p:spPr>
-        <p:txBody>
-          <a:bodyPr wrap="square" rtlCol="0" anchor="ctr"/>
-          <a:lstStyle/>
-          <a:p>
-            <a:pPr algn="r" indent="0" marL="0">
-              <a:buNone/>
-            </a:pPr>
-            <a:r>
-              <a:rPr lang="en-US" sz="800" dirty="0">
-                <a:solidFill>
-                  <a:srgbClr val="64748B"/>
-                </a:solidFill>
-                <a:latin typeface="Arial" pitchFamily="34" charset="0"/>
-                <a:ea typeface="Arial" pitchFamily="34" charset="-122"/>
-                <a:cs typeface="Arial" pitchFamily="34" charset="-120"/>
-              </a:rPr>
-              <a:t>Slide 5 of 6</a:t>
+              <a:t>Slide 5 of 7</a:t>
             </a:r>
             <a:endParaRPr lang="en-US" sz="800" dirty="0"/>
           </a:p>
@@ -10633,7 +12496,7 @@
                 <a:ea typeface="Arial" pitchFamily="34" charset="-122"/>
                 <a:cs typeface="Arial" pitchFamily="34" charset="-120"/>
               </a:rPr>
-              <a:t>5. Kesimpulan Portofolio &amp; Rekomendasi Investasi</a:t>
+              <a:t>5. Neraca Alokasi Pasokan Pabrik (Siklus &amp; Tahunan)</a:t>
             </a:r>
             <a:endParaRPr lang="en-US" sz="1800" dirty="0"/>
           </a:p>
@@ -10670,12 +12533,564 @@
         </p:nvSpPr>
         <p:spPr>
           <a:xfrm>
-            <a:off x="731520" y="1417320"/>
-            <a:ext cx="10698480" cy="1234440"/>
+            <a:off x="731520" y="1371600"/>
+            <a:ext cx="5212080" cy="3200400"/>
           </a:xfrm>
           <a:prstGeom prst="roundRect">
             <a:avLst>
-              <a:gd name="adj" fmla="val 5926"/>
+              <a:gd name="adj" fmla="val 2286"/>
+            </a:avLst>
+          </a:prstGeom>
+          <a:solidFill>
+            <a:srgbClr val="F8FAFC"/>
+          </a:solidFill>
+          <a:ln w="12700">
+            <a:solidFill>
+              <a:srgbClr val="CBD5E1"/>
+            </a:solidFill>
+            <a:prstDash val="solid"/>
+          </a:ln>
+        </p:spPr>
+      </p:sp>
+      <p:sp>
+        <p:nvSpPr>
+          <p:cNvPr id="6" name="Text 4"/>
+          <p:cNvSpPr/>
+          <p:nvPr/>
+        </p:nvSpPr>
+        <p:spPr>
+          <a:xfrm>
+            <a:off x="914400" y="1536192"/>
+            <a:ext cx="4846320" cy="320040"/>
+          </a:xfrm>
+          <a:prstGeom prst="rect">
+            <a:avLst/>
+          </a:prstGeom>
+          <a:noFill/>
+          <a:ln/>
+        </p:spPr>
+        <p:txBody>
+          <a:bodyPr wrap="square" rtlCol="0" anchor="ctr"/>
+          <a:lstStyle/>
+          <a:p>
+            <a:pPr indent="0" marL="0">
+              <a:buNone/>
+            </a:pPr>
+            <a:r>
+              <a:rPr lang="en-US" sz="1000" b="1" dirty="0">
+                <a:solidFill>
+                  <a:srgbClr val="0F172A"/>
+                </a:solidFill>
+                <a:latin typeface="Arial" pitchFamily="34" charset="0"/>
+                <a:ea typeface="Arial" pitchFamily="34" charset="-122"/>
+                <a:cs typeface="Arial" pitchFamily="34" charset="-120"/>
+              </a:rPr>
+              <a:t>ALOKASI PASOKAN / 3 BULAN (SIKLUS PANEN)</a:t>
+            </a:r>
+            <a:endParaRPr lang="en-US" sz="1000" dirty="0"/>
+          </a:p>
+        </p:txBody>
+      </p:sp>
+      <p:sp>
+        <p:nvSpPr>
+          <p:cNvPr id="7" name="Shape 5"/>
+          <p:cNvSpPr/>
+          <p:nvPr/>
+        </p:nvSpPr>
+        <p:spPr>
+          <a:xfrm>
+            <a:off x="914400" y="1965960"/>
+            <a:ext cx="4846320" cy="1051560"/>
+          </a:xfrm>
+          <a:prstGeom prst="roundRect">
+            <a:avLst>
+              <a:gd name="adj" fmla="val 5217"/>
+            </a:avLst>
+          </a:prstGeom>
+          <a:solidFill>
+            <a:srgbClr val="ECFDF5"/>
+          </a:solidFill>
+          <a:ln w="12700">
+            <a:solidFill>
+              <a:srgbClr val="A7F3D0"/>
+            </a:solidFill>
+            <a:prstDash val="solid"/>
+          </a:ln>
+        </p:spPr>
+      </p:sp>
+      <p:sp>
+        <p:nvSpPr>
+          <p:cNvPr id="8" name="Text 6"/>
+          <p:cNvSpPr/>
+          <p:nvPr/>
+        </p:nvSpPr>
+        <p:spPr>
+          <a:xfrm>
+            <a:off x="1051560" y="2057400"/>
+            <a:ext cx="4572000" cy="274320"/>
+          </a:xfrm>
+          <a:prstGeom prst="rect">
+            <a:avLst/>
+          </a:prstGeom>
+          <a:noFill/>
+          <a:ln/>
+        </p:spPr>
+        <p:txBody>
+          <a:bodyPr wrap="square" rtlCol="0" anchor="ctr"/>
+          <a:lstStyle/>
+          <a:p>
+            <a:pPr indent="0" marL="0">
+              <a:buNone/>
+            </a:pPr>
+            <a:r>
+              <a:rPr lang="en-US" sz="900" b="1" dirty="0">
+                <a:solidFill>
+                  <a:srgbClr val="064E3B"/>
+                </a:solidFill>
+                <a:latin typeface="Arial" pitchFamily="34" charset="0"/>
+                <a:ea typeface="Arial" pitchFamily="34" charset="-122"/>
+                <a:cs typeface="Arial" pitchFamily="34" charset="-120"/>
+              </a:rPr>
+              <a:t>KEBUN MANDIRI TMC (3 BLOK): 10,00%</a:t>
+            </a:r>
+            <a:endParaRPr lang="en-US" sz="900" dirty="0"/>
+          </a:p>
+        </p:txBody>
+      </p:sp>
+      <p:sp>
+        <p:nvSpPr>
+          <p:cNvPr id="9" name="Text 7"/>
+          <p:cNvSpPr/>
+          <p:nvPr/>
+        </p:nvSpPr>
+        <p:spPr>
+          <a:xfrm>
+            <a:off x="1051560" y="2359152"/>
+            <a:ext cx="4572000" cy="502920"/>
+          </a:xfrm>
+          <a:prstGeom prst="rect">
+            <a:avLst/>
+          </a:prstGeom>
+          <a:noFill/>
+          <a:ln/>
+        </p:spPr>
+        <p:txBody>
+          <a:bodyPr wrap="square" rtlCol="0" anchor="ctr"/>
+          <a:lstStyle/>
+          <a:p>
+            <a:pPr indent="0" marL="0">
+              <a:buNone/>
+            </a:pPr>
+            <a:r>
+              <a:rPr lang="en-US" sz="1300" b="1" dirty="0">
+                <a:solidFill>
+                  <a:srgbClr val="047857"/>
+                </a:solidFill>
+                <a:latin typeface="Arial" pitchFamily="34" charset="0"/>
+                <a:ea typeface="Arial" pitchFamily="34" charset="-122"/>
+                <a:cs typeface="Arial" pitchFamily="34" charset="-120"/>
+              </a:rPr>
+              <a:t>2.400.600 Butir / 3 Bulan (40.010 Butir / HK)</a:t>
+            </a:r>
+            <a:endParaRPr lang="en-US" sz="1300" dirty="0"/>
+          </a:p>
+        </p:txBody>
+      </p:sp>
+      <p:sp>
+        <p:nvSpPr>
+          <p:cNvPr id="10" name="Shape 8"/>
+          <p:cNvSpPr/>
+          <p:nvPr/>
+        </p:nvSpPr>
+        <p:spPr>
+          <a:xfrm>
+            <a:off x="914400" y="3154680"/>
+            <a:ext cx="4846320" cy="1051560"/>
+          </a:xfrm>
+          <a:prstGeom prst="roundRect">
+            <a:avLst>
+              <a:gd name="adj" fmla="val 5217"/>
+            </a:avLst>
+          </a:prstGeom>
+          <a:solidFill>
+            <a:srgbClr val="FFFBEB"/>
+          </a:solidFill>
+          <a:ln w="12700">
+            <a:solidFill>
+              <a:srgbClr val="FDE68A"/>
+            </a:solidFill>
+            <a:prstDash val="solid"/>
+          </a:ln>
+        </p:spPr>
+      </p:sp>
+      <p:sp>
+        <p:nvSpPr>
+          <p:cNvPr id="11" name="Text 9"/>
+          <p:cNvSpPr/>
+          <p:nvPr/>
+        </p:nvSpPr>
+        <p:spPr>
+          <a:xfrm>
+            <a:off x="1051560" y="3246120"/>
+            <a:ext cx="4572000" cy="274320"/>
+          </a:xfrm>
+          <a:prstGeom prst="rect">
+            <a:avLst/>
+          </a:prstGeom>
+          <a:noFill/>
+          <a:ln/>
+        </p:spPr>
+        <p:txBody>
+          <a:bodyPr wrap="square" rtlCol="0" anchor="ctr"/>
+          <a:lstStyle/>
+          <a:p>
+            <a:pPr indent="0" marL="0">
+              <a:buNone/>
+            </a:pPr>
+            <a:r>
+              <a:rPr lang="en-US" sz="900" b="1" dirty="0">
+                <a:solidFill>
+                  <a:srgbClr val="92400E"/>
+                </a:solidFill>
+                <a:latin typeface="Arial" pitchFamily="34" charset="0"/>
+                <a:ea typeface="Arial" pitchFamily="34" charset="-122"/>
+                <a:cs typeface="Arial" pitchFamily="34" charset="-120"/>
+              </a:rPr>
+              <a:t>PEMBELIAN DARI PETANI LUAR: 90,00%</a:t>
+            </a:r>
+            <a:endParaRPr lang="en-US" sz="900" dirty="0"/>
+          </a:p>
+        </p:txBody>
+      </p:sp>
+      <p:sp>
+        <p:nvSpPr>
+          <p:cNvPr id="12" name="Text 10"/>
+          <p:cNvSpPr/>
+          <p:nvPr/>
+        </p:nvSpPr>
+        <p:spPr>
+          <a:xfrm>
+            <a:off x="1051560" y="3547872"/>
+            <a:ext cx="4572000" cy="502920"/>
+          </a:xfrm>
+          <a:prstGeom prst="rect">
+            <a:avLst/>
+          </a:prstGeom>
+          <a:noFill/>
+          <a:ln/>
+        </p:spPr>
+        <p:txBody>
+          <a:bodyPr wrap="square" rtlCol="0" anchor="ctr"/>
+          <a:lstStyle/>
+          <a:p>
+            <a:pPr indent="0" marL="0">
+              <a:buNone/>
+            </a:pPr>
+            <a:r>
+              <a:rPr lang="en-US" sz="1300" b="1" dirty="0">
+                <a:solidFill>
+                  <a:srgbClr val="D97706"/>
+                </a:solidFill>
+                <a:latin typeface="Arial" pitchFamily="34" charset="0"/>
+                <a:ea typeface="Arial" pitchFamily="34" charset="-122"/>
+                <a:cs typeface="Arial" pitchFamily="34" charset="-120"/>
+              </a:rPr>
+              <a:t>21.599.400 Butir / 3 Bulan (359.990 Butir / HK)</a:t>
+            </a:r>
+            <a:endParaRPr lang="en-US" sz="1300" dirty="0"/>
+          </a:p>
+        </p:txBody>
+      </p:sp>
+      <p:sp>
+        <p:nvSpPr>
+          <p:cNvPr id="13" name="Shape 11"/>
+          <p:cNvSpPr/>
+          <p:nvPr/>
+        </p:nvSpPr>
+        <p:spPr>
+          <a:xfrm>
+            <a:off x="6217920" y="1371600"/>
+            <a:ext cx="5212080" cy="3200400"/>
+          </a:xfrm>
+          <a:prstGeom prst="roundRect">
+            <a:avLst>
+              <a:gd name="adj" fmla="val 2286"/>
+            </a:avLst>
+          </a:prstGeom>
+          <a:solidFill>
+            <a:srgbClr val="F8FAFC"/>
+          </a:solidFill>
+          <a:ln w="12700">
+            <a:solidFill>
+              <a:srgbClr val="CBD5E1"/>
+            </a:solidFill>
+            <a:prstDash val="solid"/>
+          </a:ln>
+        </p:spPr>
+      </p:sp>
+      <p:sp>
+        <p:nvSpPr>
+          <p:cNvPr id="14" name="Text 12"/>
+          <p:cNvSpPr/>
+          <p:nvPr/>
+        </p:nvSpPr>
+        <p:spPr>
+          <a:xfrm>
+            <a:off x="6400800" y="1536192"/>
+            <a:ext cx="4846320" cy="320040"/>
+          </a:xfrm>
+          <a:prstGeom prst="rect">
+            <a:avLst/>
+          </a:prstGeom>
+          <a:noFill/>
+          <a:ln/>
+        </p:spPr>
+        <p:txBody>
+          <a:bodyPr wrap="square" rtlCol="0" anchor="ctr"/>
+          <a:lstStyle/>
+          <a:p>
+            <a:pPr indent="0" marL="0">
+              <a:buNone/>
+            </a:pPr>
+            <a:r>
+              <a:rPr lang="en-US" sz="1000" b="1" dirty="0">
+                <a:solidFill>
+                  <a:srgbClr val="0F172A"/>
+                </a:solidFill>
+                <a:latin typeface="Arial" pitchFamily="34" charset="0"/>
+                <a:ea typeface="Arial" pitchFamily="34" charset="-122"/>
+                <a:cs typeface="Arial" pitchFamily="34" charset="-120"/>
+              </a:rPr>
+              <a:t>ALOKASI PASOKAN TAHUNAN (4x SIKLUS PANEN)</a:t>
+            </a:r>
+            <a:endParaRPr lang="en-US" sz="1000" dirty="0"/>
+          </a:p>
+        </p:txBody>
+      </p:sp>
+      <p:sp>
+        <p:nvSpPr>
+          <p:cNvPr id="15" name="Shape 13"/>
+          <p:cNvSpPr/>
+          <p:nvPr/>
+        </p:nvSpPr>
+        <p:spPr>
+          <a:xfrm>
+            <a:off x="6400800" y="1965960"/>
+            <a:ext cx="4846320" cy="1051560"/>
+          </a:xfrm>
+          <a:prstGeom prst="roundRect">
+            <a:avLst>
+              <a:gd name="adj" fmla="val 5217"/>
+            </a:avLst>
+          </a:prstGeom>
+          <a:solidFill>
+            <a:srgbClr val="ECFDF5"/>
+          </a:solidFill>
+          <a:ln w="12700">
+            <a:solidFill>
+              <a:srgbClr val="A7F3D0"/>
+            </a:solidFill>
+            <a:prstDash val="solid"/>
+          </a:ln>
+        </p:spPr>
+      </p:sp>
+      <p:sp>
+        <p:nvSpPr>
+          <p:cNvPr id="16" name="Text 14"/>
+          <p:cNvSpPr/>
+          <p:nvPr/>
+        </p:nvSpPr>
+        <p:spPr>
+          <a:xfrm>
+            <a:off x="6537960" y="2057400"/>
+            <a:ext cx="4572000" cy="274320"/>
+          </a:xfrm>
+          <a:prstGeom prst="rect">
+            <a:avLst/>
+          </a:prstGeom>
+          <a:noFill/>
+          <a:ln/>
+        </p:spPr>
+        <p:txBody>
+          <a:bodyPr wrap="square" rtlCol="0" anchor="ctr"/>
+          <a:lstStyle/>
+          <a:p>
+            <a:pPr indent="0" marL="0">
+              <a:buNone/>
+            </a:pPr>
+            <a:r>
+              <a:rPr lang="en-US" sz="900" b="1" dirty="0">
+                <a:solidFill>
+                  <a:srgbClr val="064E3B"/>
+                </a:solidFill>
+                <a:latin typeface="Arial" pitchFamily="34" charset="0"/>
+                <a:ea typeface="Arial" pitchFamily="34" charset="-122"/>
+                <a:cs typeface="Arial" pitchFamily="34" charset="-120"/>
+              </a:rPr>
+              <a:t>TOTAL MANDIRI TAHUNAN: 10,00%</a:t>
+            </a:r>
+            <a:endParaRPr lang="en-US" sz="900" dirty="0"/>
+          </a:p>
+        </p:txBody>
+      </p:sp>
+      <p:sp>
+        <p:nvSpPr>
+          <p:cNvPr id="17" name="Text 15"/>
+          <p:cNvSpPr/>
+          <p:nvPr/>
+        </p:nvSpPr>
+        <p:spPr>
+          <a:xfrm>
+            <a:off x="6537960" y="2359152"/>
+            <a:ext cx="4572000" cy="502920"/>
+          </a:xfrm>
+          <a:prstGeom prst="rect">
+            <a:avLst/>
+          </a:prstGeom>
+          <a:noFill/>
+          <a:ln/>
+        </p:spPr>
+        <p:txBody>
+          <a:bodyPr wrap="square" rtlCol="0" anchor="ctr"/>
+          <a:lstStyle/>
+          <a:p>
+            <a:pPr indent="0" marL="0">
+              <a:buNone/>
+            </a:pPr>
+            <a:r>
+              <a:rPr lang="en-US" sz="1300" b="1" dirty="0">
+                <a:solidFill>
+                  <a:srgbClr val="047857"/>
+                </a:solidFill>
+                <a:latin typeface="Arial" pitchFamily="34" charset="0"/>
+                <a:ea typeface="Arial" pitchFamily="34" charset="-122"/>
+                <a:cs typeface="Arial" pitchFamily="34" charset="-120"/>
+              </a:rPr>
+              <a:t>9.602.400 Butir / Tahun (Buffer Pasokan)</a:t>
+            </a:r>
+            <a:endParaRPr lang="en-US" sz="1300" dirty="0"/>
+          </a:p>
+        </p:txBody>
+      </p:sp>
+      <p:sp>
+        <p:nvSpPr>
+          <p:cNvPr id="18" name="Shape 16"/>
+          <p:cNvSpPr/>
+          <p:nvPr/>
+        </p:nvSpPr>
+        <p:spPr>
+          <a:xfrm>
+            <a:off x="6400800" y="3154680"/>
+            <a:ext cx="4846320" cy="1051560"/>
+          </a:xfrm>
+          <a:prstGeom prst="roundRect">
+            <a:avLst>
+              <a:gd name="adj" fmla="val 5217"/>
+            </a:avLst>
+          </a:prstGeom>
+          <a:solidFill>
+            <a:srgbClr val="FFFBEB"/>
+          </a:solidFill>
+          <a:ln w="12700">
+            <a:solidFill>
+              <a:srgbClr val="FDE68A"/>
+            </a:solidFill>
+            <a:prstDash val="solid"/>
+          </a:ln>
+        </p:spPr>
+      </p:sp>
+      <p:sp>
+        <p:nvSpPr>
+          <p:cNvPr id="19" name="Text 17"/>
+          <p:cNvSpPr/>
+          <p:nvPr/>
+        </p:nvSpPr>
+        <p:spPr>
+          <a:xfrm>
+            <a:off x="6537960" y="3246120"/>
+            <a:ext cx="4572000" cy="274320"/>
+          </a:xfrm>
+          <a:prstGeom prst="rect">
+            <a:avLst/>
+          </a:prstGeom>
+          <a:noFill/>
+          <a:ln/>
+        </p:spPr>
+        <p:txBody>
+          <a:bodyPr wrap="square" rtlCol="0" anchor="ctr"/>
+          <a:lstStyle/>
+          <a:p>
+            <a:pPr indent="0" marL="0">
+              <a:buNone/>
+            </a:pPr>
+            <a:r>
+              <a:rPr lang="en-US" sz="900" b="1" dirty="0">
+                <a:solidFill>
+                  <a:srgbClr val="92400E"/>
+                </a:solidFill>
+                <a:latin typeface="Arial" pitchFamily="34" charset="0"/>
+                <a:ea typeface="Arial" pitchFamily="34" charset="-122"/>
+                <a:cs typeface="Arial" pitchFamily="34" charset="-120"/>
+              </a:rPr>
+              <a:t>TOTAL BELI LUAR TAHUNAN: 90,00%</a:t>
+            </a:r>
+            <a:endParaRPr lang="en-US" sz="900" dirty="0"/>
+          </a:p>
+        </p:txBody>
+      </p:sp>
+      <p:sp>
+        <p:nvSpPr>
+          <p:cNvPr id="20" name="Text 18"/>
+          <p:cNvSpPr/>
+          <p:nvPr/>
+        </p:nvSpPr>
+        <p:spPr>
+          <a:xfrm>
+            <a:off x="6537960" y="3547872"/>
+            <a:ext cx="4572000" cy="502920"/>
+          </a:xfrm>
+          <a:prstGeom prst="rect">
+            <a:avLst/>
+          </a:prstGeom>
+          <a:noFill/>
+          <a:ln/>
+        </p:spPr>
+        <p:txBody>
+          <a:bodyPr wrap="square" rtlCol="0" anchor="ctr"/>
+          <a:lstStyle/>
+          <a:p>
+            <a:pPr indent="0" marL="0">
+              <a:buNone/>
+            </a:pPr>
+            <a:r>
+              <a:rPr lang="en-US" sz="1300" b="1" dirty="0">
+                <a:solidFill>
+                  <a:srgbClr val="D97706"/>
+                </a:solidFill>
+                <a:latin typeface="Arial" pitchFamily="34" charset="0"/>
+                <a:ea typeface="Arial" pitchFamily="34" charset="-122"/>
+                <a:cs typeface="Arial" pitchFamily="34" charset="-120"/>
+              </a:rPr>
+              <a:t>86.397.600 Butir / Tahun (Mitra Petani)</a:t>
+            </a:r>
+            <a:endParaRPr lang="en-US" sz="1300" dirty="0"/>
+          </a:p>
+        </p:txBody>
+      </p:sp>
+      <p:sp>
+        <p:nvSpPr>
+          <p:cNvPr id="21" name="Shape 19"/>
+          <p:cNvSpPr/>
+          <p:nvPr/>
+        </p:nvSpPr>
+        <p:spPr>
+          <a:xfrm>
+            <a:off x="731520" y="4754880"/>
+            <a:ext cx="3410712" cy="1508760"/>
+          </a:xfrm>
+          <a:prstGeom prst="roundRect">
+            <a:avLst>
+              <a:gd name="adj" fmla="val 4848"/>
             </a:avLst>
           </a:prstGeom>
           <a:solidFill>
@@ -10691,6 +13106,525 @@
       </p:sp>
       <p:sp>
         <p:nvSpPr>
+          <p:cNvPr id="22" name="Text 20"/>
+          <p:cNvSpPr/>
+          <p:nvPr/>
+        </p:nvSpPr>
+        <p:spPr>
+          <a:xfrm>
+            <a:off x="868680" y="4892040"/>
+            <a:ext cx="3136392" cy="320040"/>
+          </a:xfrm>
+          <a:prstGeom prst="rect">
+            <a:avLst/>
+          </a:prstGeom>
+          <a:noFill/>
+          <a:ln/>
+        </p:spPr>
+        <p:txBody>
+          <a:bodyPr wrap="square" rtlCol="0" anchor="ctr"/>
+          <a:lstStyle/>
+          <a:p>
+            <a:pPr indent="0" marL="0">
+              <a:buNone/>
+            </a:pPr>
+            <a:r>
+              <a:rPr lang="en-US" sz="900" b="1" dirty="0">
+                <a:solidFill>
+                  <a:srgbClr val="064E3B"/>
+                </a:solidFill>
+                <a:latin typeface="Arial" pitchFamily="34" charset="0"/>
+                <a:ea typeface="Arial" pitchFamily="34" charset="-122"/>
+                <a:cs typeface="Arial" pitchFamily="34" charset="-120"/>
+              </a:rPr>
+              <a:t>1. KONTROL MUTU &amp; GRADING</a:t>
+            </a:r>
+            <a:endParaRPr lang="en-US" sz="900" dirty="0"/>
+          </a:p>
+        </p:txBody>
+      </p:sp>
+      <p:sp>
+        <p:nvSpPr>
+          <p:cNvPr id="23" name="Text 21"/>
+          <p:cNvSpPr/>
+          <p:nvPr/>
+        </p:nvSpPr>
+        <p:spPr>
+          <a:xfrm>
+            <a:off x="868680" y="5257800"/>
+            <a:ext cx="3136392" cy="868680"/>
+          </a:xfrm>
+          <a:prstGeom prst="rect">
+            <a:avLst/>
+          </a:prstGeom>
+          <a:noFill/>
+          <a:ln/>
+        </p:spPr>
+        <p:txBody>
+          <a:bodyPr wrap="square" rtlCol="0" anchor="ctr"/>
+          <a:lstStyle/>
+          <a:p>
+            <a:pPr indent="0" marL="0">
+              <a:buNone/>
+            </a:pPr>
+            <a:r>
+              <a:rPr lang="en-US" sz="850" dirty="0">
+                <a:solidFill>
+                  <a:srgbClr val="334155"/>
+                </a:solidFill>
+                <a:latin typeface="Arial" pitchFamily="34" charset="0"/>
+                <a:ea typeface="Arial" pitchFamily="34" charset="-122"/>
+                <a:cs typeface="Arial" pitchFamily="34" charset="-120"/>
+              </a:rPr>
+              <a:t>Bahan baku dari kebun sendiri terjamin umur petik optimal dan ukuran butir seragam.</a:t>
+            </a:r>
+            <a:endParaRPr lang="en-US" sz="850" dirty="0"/>
+          </a:p>
+        </p:txBody>
+      </p:sp>
+      <p:sp>
+        <p:nvSpPr>
+          <p:cNvPr id="24" name="Shape 22"/>
+          <p:cNvSpPr/>
+          <p:nvPr/>
+        </p:nvSpPr>
+        <p:spPr>
+          <a:xfrm>
+            <a:off x="4370832" y="4754880"/>
+            <a:ext cx="3410712" cy="1508760"/>
+          </a:xfrm>
+          <a:prstGeom prst="roundRect">
+            <a:avLst>
+              <a:gd name="adj" fmla="val 4848"/>
+            </a:avLst>
+          </a:prstGeom>
+          <a:solidFill>
+            <a:srgbClr val="FFFFFF"/>
+          </a:solidFill>
+          <a:ln w="12700">
+            <a:solidFill>
+              <a:srgbClr val="CBD5E1"/>
+            </a:solidFill>
+            <a:prstDash val="solid"/>
+          </a:ln>
+        </p:spPr>
+      </p:sp>
+      <p:sp>
+        <p:nvSpPr>
+          <p:cNvPr id="25" name="Text 23"/>
+          <p:cNvSpPr/>
+          <p:nvPr/>
+        </p:nvSpPr>
+        <p:spPr>
+          <a:xfrm>
+            <a:off x="4507992" y="4892040"/>
+            <a:ext cx="3136392" cy="320040"/>
+          </a:xfrm>
+          <a:prstGeom prst="rect">
+            <a:avLst/>
+          </a:prstGeom>
+          <a:noFill/>
+          <a:ln/>
+        </p:spPr>
+        <p:txBody>
+          <a:bodyPr wrap="square" rtlCol="0" anchor="ctr"/>
+          <a:lstStyle/>
+          <a:p>
+            <a:pPr indent="0" marL="0">
+              <a:buNone/>
+            </a:pPr>
+            <a:r>
+              <a:rPr lang="en-US" sz="900" b="1" dirty="0">
+                <a:solidFill>
+                  <a:srgbClr val="064E3B"/>
+                </a:solidFill>
+                <a:latin typeface="Arial" pitchFamily="34" charset="0"/>
+                <a:ea typeface="Arial" pitchFamily="34" charset="-122"/>
+                <a:cs typeface="Arial" pitchFamily="34" charset="-120"/>
+              </a:rPr>
+              <a:t>2. MITIGASI FLUKTUASI HARGA</a:t>
+            </a:r>
+            <a:endParaRPr lang="en-US" sz="900" dirty="0"/>
+          </a:p>
+        </p:txBody>
+      </p:sp>
+      <p:sp>
+        <p:nvSpPr>
+          <p:cNvPr id="26" name="Text 24"/>
+          <p:cNvSpPr/>
+          <p:nvPr/>
+        </p:nvSpPr>
+        <p:spPr>
+          <a:xfrm>
+            <a:off x="4507992" y="5257800"/>
+            <a:ext cx="3136392" cy="868680"/>
+          </a:xfrm>
+          <a:prstGeom prst="rect">
+            <a:avLst/>
+          </a:prstGeom>
+          <a:noFill/>
+          <a:ln/>
+        </p:spPr>
+        <p:txBody>
+          <a:bodyPr wrap="square" rtlCol="0" anchor="ctr"/>
+          <a:lstStyle/>
+          <a:p>
+            <a:pPr indent="0" marL="0">
+              <a:buNone/>
+            </a:pPr>
+            <a:r>
+              <a:rPr lang="en-US" sz="850" dirty="0">
+                <a:solidFill>
+                  <a:srgbClr val="334155"/>
+                </a:solidFill>
+                <a:latin typeface="Arial" pitchFamily="34" charset="0"/>
+                <a:ea typeface="Arial" pitchFamily="34" charset="-122"/>
+                <a:cs typeface="Arial" pitchFamily="34" charset="-120"/>
+              </a:rPr>
+              <a:t>Menurunkan sensitivitas biaya produksi saat lonjakan harga kelapa di pasar bebas.</a:t>
+            </a:r>
+            <a:endParaRPr lang="en-US" sz="850" dirty="0"/>
+          </a:p>
+        </p:txBody>
+      </p:sp>
+      <p:sp>
+        <p:nvSpPr>
+          <p:cNvPr id="27" name="Shape 25"/>
+          <p:cNvSpPr/>
+          <p:nvPr/>
+        </p:nvSpPr>
+        <p:spPr>
+          <a:xfrm>
+            <a:off x="8010144" y="4754880"/>
+            <a:ext cx="3410712" cy="1508760"/>
+          </a:xfrm>
+          <a:prstGeom prst="roundRect">
+            <a:avLst>
+              <a:gd name="adj" fmla="val 4848"/>
+            </a:avLst>
+          </a:prstGeom>
+          <a:solidFill>
+            <a:srgbClr val="FFFFFF"/>
+          </a:solidFill>
+          <a:ln w="12700">
+            <a:solidFill>
+              <a:srgbClr val="CBD5E1"/>
+            </a:solidFill>
+            <a:prstDash val="solid"/>
+          </a:ln>
+        </p:spPr>
+      </p:sp>
+      <p:sp>
+        <p:nvSpPr>
+          <p:cNvPr id="28" name="Text 26"/>
+          <p:cNvSpPr/>
+          <p:nvPr/>
+        </p:nvSpPr>
+        <p:spPr>
+          <a:xfrm>
+            <a:off x="8147304" y="4892040"/>
+            <a:ext cx="3136392" cy="320040"/>
+          </a:xfrm>
+          <a:prstGeom prst="rect">
+            <a:avLst/>
+          </a:prstGeom>
+          <a:noFill/>
+          <a:ln/>
+        </p:spPr>
+        <p:txBody>
+          <a:bodyPr wrap="square" rtlCol="0" anchor="ctr"/>
+          <a:lstStyle/>
+          <a:p>
+            <a:pPr indent="0" marL="0">
+              <a:buNone/>
+            </a:pPr>
+            <a:r>
+              <a:rPr lang="en-US" sz="900" b="1" dirty="0">
+                <a:solidFill>
+                  <a:srgbClr val="064E3B"/>
+                </a:solidFill>
+                <a:latin typeface="Arial" pitchFamily="34" charset="0"/>
+                <a:ea typeface="Arial" pitchFamily="34" charset="-122"/>
+                <a:cs typeface="Arial" pitchFamily="34" charset="-120"/>
+              </a:rPr>
+              <a:t>3. BUFFER KELANGKAAN PASOKAN</a:t>
+            </a:r>
+            <a:endParaRPr lang="en-US" sz="900" dirty="0"/>
+          </a:p>
+        </p:txBody>
+      </p:sp>
+      <p:sp>
+        <p:nvSpPr>
+          <p:cNvPr id="29" name="Text 27"/>
+          <p:cNvSpPr/>
+          <p:nvPr/>
+        </p:nvSpPr>
+        <p:spPr>
+          <a:xfrm>
+            <a:off x="8147304" y="5257800"/>
+            <a:ext cx="3136392" cy="868680"/>
+          </a:xfrm>
+          <a:prstGeom prst="rect">
+            <a:avLst/>
+          </a:prstGeom>
+          <a:noFill/>
+          <a:ln/>
+        </p:spPr>
+        <p:txBody>
+          <a:bodyPr wrap="square" rtlCol="0" anchor="ctr"/>
+          <a:lstStyle/>
+          <a:p>
+            <a:pPr indent="0" marL="0">
+              <a:buNone/>
+            </a:pPr>
+            <a:r>
+              <a:rPr lang="en-US" sz="850" dirty="0">
+                <a:solidFill>
+                  <a:srgbClr val="334155"/>
+                </a:solidFill>
+                <a:latin typeface="Arial" pitchFamily="34" charset="0"/>
+                <a:ea typeface="Arial" pitchFamily="34" charset="-122"/>
+                <a:cs typeface="Arial" pitchFamily="34" charset="-120"/>
+              </a:rPr>
+              <a:t>Pabrik tetap dapat beroperasi secara kontinyu saat terjadi kendala panen di petani mitra.</a:t>
+            </a:r>
+            <a:endParaRPr lang="en-US" sz="850" dirty="0"/>
+          </a:p>
+        </p:txBody>
+      </p:sp>
+      <p:sp>
+        <p:nvSpPr>
+          <p:cNvPr id="30" name="Text 28"/>
+          <p:cNvSpPr/>
+          <p:nvPr/>
+        </p:nvSpPr>
+        <p:spPr>
+          <a:xfrm>
+            <a:off x="731520" y="6400800"/>
+            <a:ext cx="7772400" cy="274320"/>
+          </a:xfrm>
+          <a:prstGeom prst="rect">
+            <a:avLst/>
+          </a:prstGeom>
+          <a:noFill/>
+          <a:ln/>
+        </p:spPr>
+        <p:txBody>
+          <a:bodyPr wrap="square" rtlCol="0" anchor="ctr"/>
+          <a:lstStyle/>
+          <a:p>
+            <a:pPr indent="0" marL="0">
+              <a:buNone/>
+            </a:pPr>
+            <a:r>
+              <a:rPr lang="en-US" sz="850" b="1" dirty="0">
+                <a:solidFill>
+                  <a:srgbClr val="64748B"/>
+                </a:solidFill>
+                <a:latin typeface="Arial" pitchFamily="34" charset="0"/>
+                <a:ea typeface="Arial" pitchFamily="34" charset="-122"/>
+                <a:cs typeface="Arial" pitchFamily="34" charset="-120"/>
+              </a:rPr>
+              <a:t>PERKEBUNAN TMC (MEMBER OF RAI)</a:t>
+            </a:r>
+            <a:endParaRPr lang="en-US" sz="850" dirty="0"/>
+          </a:p>
+        </p:txBody>
+      </p:sp>
+      <p:sp>
+        <p:nvSpPr>
+          <p:cNvPr id="31" name="Text 29"/>
+          <p:cNvSpPr/>
+          <p:nvPr/>
+        </p:nvSpPr>
+        <p:spPr>
+          <a:xfrm>
+            <a:off x="8686800" y="6400800"/>
+            <a:ext cx="2743200" cy="274320"/>
+          </a:xfrm>
+          <a:prstGeom prst="rect">
+            <a:avLst/>
+          </a:prstGeom>
+          <a:noFill/>
+          <a:ln/>
+        </p:spPr>
+        <p:txBody>
+          <a:bodyPr wrap="square" rtlCol="0" anchor="ctr"/>
+          <a:lstStyle/>
+          <a:p>
+            <a:pPr algn="r" indent="0" marL="0">
+              <a:buNone/>
+            </a:pPr>
+            <a:r>
+              <a:rPr lang="en-US" sz="800" dirty="0">
+                <a:solidFill>
+                  <a:srgbClr val="64748B"/>
+                </a:solidFill>
+                <a:latin typeface="Arial" pitchFamily="34" charset="0"/>
+                <a:ea typeface="Arial" pitchFamily="34" charset="-122"/>
+                <a:cs typeface="Arial" pitchFamily="34" charset="-120"/>
+              </a:rPr>
+              <a:t>Slide 6 of 7</a:t>
+            </a:r>
+            <a:endParaRPr lang="en-US" sz="800" dirty="0"/>
+          </a:p>
+        </p:txBody>
+      </p:sp>
+    </p:spTree>
+  </p:cSld>
+  <p:clrMapOvr>
+    <a:masterClrMapping/>
+  </p:clrMapOvr>
+</p:sld>
+</file>
+
+<file path=ppt/slides/slide7.xml><?xml version="1.0" encoding="utf-8"?>
+<p:sld xmlns:a="http://schemas.openxmlformats.org/drawingml/2006/main" xmlns:r="http://schemas.openxmlformats.org/officeDocument/2006/relationships" xmlns:p="http://schemas.openxmlformats.org/presentationml/2006/main">
+  <p:cSld name="Slide 7">
+    <p:spTree>
+      <p:nvGrpSpPr>
+        <p:cNvPr id="1" name=""/>
+        <p:cNvGrpSpPr/>
+        <p:nvPr/>
+      </p:nvGrpSpPr>
+      <p:grpSpPr>
+        <a:xfrm>
+          <a:off x="0" y="0"/>
+          <a:ext cx="0" cy="0"/>
+          <a:chOff x="0" y="0"/>
+          <a:chExt cx="0" cy="0"/>
+        </a:xfrm>
+      </p:grpSpPr>
+      <p:sp>
+        <p:nvSpPr>
+          <p:cNvPr id="2" name="Text 0"/>
+          <p:cNvSpPr/>
+          <p:nvPr/>
+        </p:nvSpPr>
+        <p:spPr>
+          <a:xfrm>
+            <a:off x="731520" y="411480"/>
+            <a:ext cx="10515600" cy="274320"/>
+          </a:xfrm>
+          <a:prstGeom prst="rect">
+            <a:avLst/>
+          </a:prstGeom>
+          <a:noFill/>
+          <a:ln/>
+        </p:spPr>
+        <p:txBody>
+          <a:bodyPr wrap="square" rtlCol="0" anchor="ctr"/>
+          <a:lstStyle/>
+          <a:p>
+            <a:pPr indent="0" marL="0">
+              <a:buNone/>
+            </a:pPr>
+            <a:r>
+              <a:rPr lang="en-US" sz="900" b="1" dirty="0">
+                <a:solidFill>
+                  <a:srgbClr val="047857"/>
+                </a:solidFill>
+                <a:latin typeface="Arial" pitchFamily="34" charset="0"/>
+                <a:ea typeface="Arial" pitchFamily="34" charset="-122"/>
+                <a:cs typeface="Arial" pitchFamily="34" charset="-120"/>
+              </a:rPr>
+              <a:t>PORTOFOLIO KEBUN TMC</a:t>
+            </a:r>
+            <a:endParaRPr lang="en-US" sz="900" dirty="0"/>
+          </a:p>
+        </p:txBody>
+      </p:sp>
+      <p:sp>
+        <p:nvSpPr>
+          <p:cNvPr id="3" name="Text 1"/>
+          <p:cNvSpPr/>
+          <p:nvPr/>
+        </p:nvSpPr>
+        <p:spPr>
+          <a:xfrm>
+            <a:off x="731520" y="658368"/>
+            <a:ext cx="10515600" cy="502920"/>
+          </a:xfrm>
+          <a:prstGeom prst="rect">
+            <a:avLst/>
+          </a:prstGeom>
+          <a:noFill/>
+          <a:ln/>
+        </p:spPr>
+        <p:txBody>
+          <a:bodyPr wrap="square" rtlCol="0" anchor="ctr"/>
+          <a:lstStyle/>
+          <a:p>
+            <a:pPr indent="0" marL="0">
+              <a:buNone/>
+            </a:pPr>
+            <a:r>
+              <a:rPr lang="en-US" sz="1800" b="1" dirty="0">
+                <a:solidFill>
+                  <a:srgbClr val="0F172A"/>
+                </a:solidFill>
+                <a:latin typeface="Arial" pitchFamily="34" charset="0"/>
+                <a:ea typeface="Arial" pitchFamily="34" charset="-122"/>
+                <a:cs typeface="Arial" pitchFamily="34" charset="-120"/>
+              </a:rPr>
+              <a:t>6. Kesimpulan Portofolio &amp; Rekomendasi Investasi</a:t>
+            </a:r>
+            <a:endParaRPr lang="en-US" sz="1800" dirty="0"/>
+          </a:p>
+        </p:txBody>
+      </p:sp>
+      <p:sp>
+        <p:nvSpPr>
+          <p:cNvPr id="4" name="Shape 2"/>
+          <p:cNvSpPr/>
+          <p:nvPr/>
+        </p:nvSpPr>
+        <p:spPr>
+          <a:xfrm>
+            <a:off x="731520" y="1188720"/>
+            <a:ext cx="10698480" cy="0"/>
+          </a:xfrm>
+          <a:prstGeom prst="line">
+            <a:avLst/>
+          </a:prstGeom>
+          <a:noFill/>
+          <a:ln w="12700">
+            <a:solidFill>
+              <a:srgbClr val="CBD5E1"/>
+            </a:solidFill>
+            <a:prstDash val="solid"/>
+          </a:ln>
+        </p:spPr>
+      </p:sp>
+      <p:sp>
+        <p:nvSpPr>
+          <p:cNvPr id="5" name="Shape 3"/>
+          <p:cNvSpPr/>
+          <p:nvPr/>
+        </p:nvSpPr>
+        <p:spPr>
+          <a:xfrm>
+            <a:off x="731520" y="1417320"/>
+            <a:ext cx="10698480" cy="1234440"/>
+          </a:xfrm>
+          <a:prstGeom prst="roundRect">
+            <a:avLst>
+              <a:gd name="adj" fmla="val 5926"/>
+            </a:avLst>
+          </a:prstGeom>
+          <a:solidFill>
+            <a:srgbClr val="FFFFFF"/>
+          </a:solidFill>
+          <a:ln w="12700">
+            <a:solidFill>
+              <a:srgbClr val="CBD5E1"/>
+            </a:solidFill>
+            <a:prstDash val="solid"/>
+          </a:ln>
+        </p:spPr>
+      </p:sp>
+      <p:sp>
+        <p:nvSpPr>
           <p:cNvPr id="6" name="Shape 4"/>
           <p:cNvSpPr/>
           <p:nvPr/>
@@ -11313,7 +14247,7 @@
                 <a:ea typeface="Arial" pitchFamily="34" charset="-122"/>
                 <a:cs typeface="Arial" pitchFamily="34" charset="-120"/>
               </a:rPr>
-              <a:t>Slide 6 of 6</a:t>
+              <a:t>Slide 7 of 7</a:t>
             </a:r>
             <a:endParaRPr lang="en-US" sz="800" dirty="0"/>
           </a:p>
